--- a/3испсп/технологии программирования/лекции/3.pptx
+++ b/3испсп/технологии программирования/лекции/3.pptx
@@ -6,27 +6,20 @@
   </p:sldMasterIdLst>
   <p:sldIdLst>
     <p:sldId id="256" r:id="rId2"/>
-    <p:sldId id="262" r:id="rId3"/>
-    <p:sldId id="263" r:id="rId4"/>
-    <p:sldId id="265" r:id="rId5"/>
-    <p:sldId id="264" r:id="rId6"/>
-    <p:sldId id="261" r:id="rId7"/>
-    <p:sldId id="257" r:id="rId8"/>
-    <p:sldId id="266" r:id="rId9"/>
-    <p:sldId id="267" r:id="rId10"/>
-    <p:sldId id="268" r:id="rId11"/>
-    <p:sldId id="269" r:id="rId12"/>
-    <p:sldId id="270" r:id="rId13"/>
-    <p:sldId id="271" r:id="rId14"/>
-    <p:sldId id="272" r:id="rId15"/>
-    <p:sldId id="258" r:id="rId16"/>
-    <p:sldId id="274" r:id="rId17"/>
-    <p:sldId id="275" r:id="rId18"/>
-    <p:sldId id="276" r:id="rId19"/>
-    <p:sldId id="280" r:id="rId20"/>
-    <p:sldId id="277" r:id="rId21"/>
-    <p:sldId id="278" r:id="rId22"/>
-    <p:sldId id="279" r:id="rId23"/>
+    <p:sldId id="257" r:id="rId3"/>
+    <p:sldId id="258" r:id="rId4"/>
+    <p:sldId id="260" r:id="rId5"/>
+    <p:sldId id="261" r:id="rId6"/>
+    <p:sldId id="262" r:id="rId7"/>
+    <p:sldId id="263" r:id="rId8"/>
+    <p:sldId id="264" r:id="rId9"/>
+    <p:sldId id="265" r:id="rId10"/>
+    <p:sldId id="266" r:id="rId11"/>
+    <p:sldId id="267" r:id="rId12"/>
+    <p:sldId id="268" r:id="rId13"/>
+    <p:sldId id="269" r:id="rId14"/>
+    <p:sldId id="270" r:id="rId15"/>
+    <p:sldId id="271" r:id="rId16"/>
   </p:sldIdLst>
   <p:sldSz cx="9144000" cy="6858000" type="screen4x3"/>
   <p:notesSz cx="6858000" cy="9144000"/>
@@ -307,10 +300,10 @@
           <a:bodyPr/>
           <a:lstStyle/>
           <a:p>
-            <a:fld id="{829CC5B7-A91B-431A-81BA-289E7AE4BB3B}" type="datetimeFigureOut">
+            <a:fld id="{5C0F2F08-77E9-4D5A-BDFB-DF2633486EF0}" type="datetimeFigureOut">
               <a:rPr lang="ru-RU" smtClean="0"/>
               <a:pPr/>
-              <a:t>24.02.2026</a:t>
+              <a:t>04.04.2026</a:t>
             </a:fld>
             <a:endParaRPr lang="ru-RU"/>
           </a:p>
@@ -350,7 +343,7 @@
           <a:bodyPr/>
           <a:lstStyle/>
           <a:p>
-            <a:fld id="{482C422A-F566-485C-8DC6-0021ABE64B94}" type="slidenum">
+            <a:fld id="{B932AB50-7A97-4E3F-BA31-585E9AA365E7}" type="slidenum">
               <a:rPr lang="ru-RU" smtClean="0"/>
               <a:pPr/>
               <a:t>‹#›</a:t>
@@ -474,10 +467,10 @@
           <a:bodyPr/>
           <a:lstStyle/>
           <a:p>
-            <a:fld id="{829CC5B7-A91B-431A-81BA-289E7AE4BB3B}" type="datetimeFigureOut">
+            <a:fld id="{5C0F2F08-77E9-4D5A-BDFB-DF2633486EF0}" type="datetimeFigureOut">
               <a:rPr lang="ru-RU" smtClean="0"/>
               <a:pPr/>
-              <a:t>24.02.2026</a:t>
+              <a:t>04.04.2026</a:t>
             </a:fld>
             <a:endParaRPr lang="ru-RU"/>
           </a:p>
@@ -517,7 +510,7 @@
           <a:bodyPr/>
           <a:lstStyle/>
           <a:p>
-            <a:fld id="{482C422A-F566-485C-8DC6-0021ABE64B94}" type="slidenum">
+            <a:fld id="{B932AB50-7A97-4E3F-BA31-585E9AA365E7}" type="slidenum">
               <a:rPr lang="ru-RU" smtClean="0"/>
               <a:pPr/>
               <a:t>‹#›</a:t>
@@ -651,10 +644,10 @@
           <a:bodyPr/>
           <a:lstStyle/>
           <a:p>
-            <a:fld id="{829CC5B7-A91B-431A-81BA-289E7AE4BB3B}" type="datetimeFigureOut">
+            <a:fld id="{5C0F2F08-77E9-4D5A-BDFB-DF2633486EF0}" type="datetimeFigureOut">
               <a:rPr lang="ru-RU" smtClean="0"/>
               <a:pPr/>
-              <a:t>24.02.2026</a:t>
+              <a:t>04.04.2026</a:t>
             </a:fld>
             <a:endParaRPr lang="ru-RU"/>
           </a:p>
@@ -694,7 +687,7 @@
           <a:bodyPr/>
           <a:lstStyle/>
           <a:p>
-            <a:fld id="{482C422A-F566-485C-8DC6-0021ABE64B94}" type="slidenum">
+            <a:fld id="{B932AB50-7A97-4E3F-BA31-585E9AA365E7}" type="slidenum">
               <a:rPr lang="ru-RU" smtClean="0"/>
               <a:pPr/>
               <a:t>‹#›</a:t>
@@ -818,10 +811,10 @@
           <a:bodyPr/>
           <a:lstStyle/>
           <a:p>
-            <a:fld id="{829CC5B7-A91B-431A-81BA-289E7AE4BB3B}" type="datetimeFigureOut">
+            <a:fld id="{5C0F2F08-77E9-4D5A-BDFB-DF2633486EF0}" type="datetimeFigureOut">
               <a:rPr lang="ru-RU" smtClean="0"/>
               <a:pPr/>
-              <a:t>24.02.2026</a:t>
+              <a:t>04.04.2026</a:t>
             </a:fld>
             <a:endParaRPr lang="ru-RU"/>
           </a:p>
@@ -861,7 +854,7 @@
           <a:bodyPr/>
           <a:lstStyle/>
           <a:p>
-            <a:fld id="{482C422A-F566-485C-8DC6-0021ABE64B94}" type="slidenum">
+            <a:fld id="{B932AB50-7A97-4E3F-BA31-585E9AA365E7}" type="slidenum">
               <a:rPr lang="ru-RU" smtClean="0"/>
               <a:pPr/>
               <a:t>‹#›</a:t>
@@ -1061,10 +1054,10 @@
           <a:bodyPr/>
           <a:lstStyle/>
           <a:p>
-            <a:fld id="{829CC5B7-A91B-431A-81BA-289E7AE4BB3B}" type="datetimeFigureOut">
+            <a:fld id="{5C0F2F08-77E9-4D5A-BDFB-DF2633486EF0}" type="datetimeFigureOut">
               <a:rPr lang="ru-RU" smtClean="0"/>
               <a:pPr/>
-              <a:t>24.02.2026</a:t>
+              <a:t>04.04.2026</a:t>
             </a:fld>
             <a:endParaRPr lang="ru-RU"/>
           </a:p>
@@ -1104,7 +1097,7 @@
           <a:bodyPr/>
           <a:lstStyle/>
           <a:p>
-            <a:fld id="{482C422A-F566-485C-8DC6-0021ABE64B94}" type="slidenum">
+            <a:fld id="{B932AB50-7A97-4E3F-BA31-585E9AA365E7}" type="slidenum">
               <a:rPr lang="ru-RU" smtClean="0"/>
               <a:pPr/>
               <a:t>‹#›</a:t>
@@ -1346,10 +1339,10 @@
           <a:bodyPr/>
           <a:lstStyle/>
           <a:p>
-            <a:fld id="{829CC5B7-A91B-431A-81BA-289E7AE4BB3B}" type="datetimeFigureOut">
+            <a:fld id="{5C0F2F08-77E9-4D5A-BDFB-DF2633486EF0}" type="datetimeFigureOut">
               <a:rPr lang="ru-RU" smtClean="0"/>
               <a:pPr/>
-              <a:t>24.02.2026</a:t>
+              <a:t>04.04.2026</a:t>
             </a:fld>
             <a:endParaRPr lang="ru-RU"/>
           </a:p>
@@ -1389,7 +1382,7 @@
           <a:bodyPr/>
           <a:lstStyle/>
           <a:p>
-            <a:fld id="{482C422A-F566-485C-8DC6-0021ABE64B94}" type="slidenum">
+            <a:fld id="{B932AB50-7A97-4E3F-BA31-585E9AA365E7}" type="slidenum">
               <a:rPr lang="ru-RU" smtClean="0"/>
               <a:pPr/>
               <a:t>‹#›</a:t>
@@ -1765,10 +1758,10 @@
           <a:bodyPr/>
           <a:lstStyle/>
           <a:p>
-            <a:fld id="{829CC5B7-A91B-431A-81BA-289E7AE4BB3B}" type="datetimeFigureOut">
+            <a:fld id="{5C0F2F08-77E9-4D5A-BDFB-DF2633486EF0}" type="datetimeFigureOut">
               <a:rPr lang="ru-RU" smtClean="0"/>
               <a:pPr/>
-              <a:t>24.02.2026</a:t>
+              <a:t>04.04.2026</a:t>
             </a:fld>
             <a:endParaRPr lang="ru-RU"/>
           </a:p>
@@ -1808,7 +1801,7 @@
           <a:bodyPr/>
           <a:lstStyle/>
           <a:p>
-            <a:fld id="{482C422A-F566-485C-8DC6-0021ABE64B94}" type="slidenum">
+            <a:fld id="{B932AB50-7A97-4E3F-BA31-585E9AA365E7}" type="slidenum">
               <a:rPr lang="ru-RU" smtClean="0"/>
               <a:pPr/>
               <a:t>‹#›</a:t>
@@ -1880,10 +1873,10 @@
           <a:bodyPr/>
           <a:lstStyle/>
           <a:p>
-            <a:fld id="{829CC5B7-A91B-431A-81BA-289E7AE4BB3B}" type="datetimeFigureOut">
+            <a:fld id="{5C0F2F08-77E9-4D5A-BDFB-DF2633486EF0}" type="datetimeFigureOut">
               <a:rPr lang="ru-RU" smtClean="0"/>
               <a:pPr/>
-              <a:t>24.02.2026</a:t>
+              <a:t>04.04.2026</a:t>
             </a:fld>
             <a:endParaRPr lang="ru-RU"/>
           </a:p>
@@ -1923,7 +1916,7 @@
           <a:bodyPr/>
           <a:lstStyle/>
           <a:p>
-            <a:fld id="{482C422A-F566-485C-8DC6-0021ABE64B94}" type="slidenum">
+            <a:fld id="{B932AB50-7A97-4E3F-BA31-585E9AA365E7}" type="slidenum">
               <a:rPr lang="ru-RU" smtClean="0"/>
               <a:pPr/>
               <a:t>‹#›</a:t>
@@ -1972,10 +1965,10 @@
           <a:bodyPr/>
           <a:lstStyle/>
           <a:p>
-            <a:fld id="{829CC5B7-A91B-431A-81BA-289E7AE4BB3B}" type="datetimeFigureOut">
+            <a:fld id="{5C0F2F08-77E9-4D5A-BDFB-DF2633486EF0}" type="datetimeFigureOut">
               <a:rPr lang="ru-RU" smtClean="0"/>
               <a:pPr/>
-              <a:t>24.02.2026</a:t>
+              <a:t>04.04.2026</a:t>
             </a:fld>
             <a:endParaRPr lang="ru-RU"/>
           </a:p>
@@ -2015,7 +2008,7 @@
           <a:bodyPr/>
           <a:lstStyle/>
           <a:p>
-            <a:fld id="{482C422A-F566-485C-8DC6-0021ABE64B94}" type="slidenum">
+            <a:fld id="{B932AB50-7A97-4E3F-BA31-585E9AA365E7}" type="slidenum">
               <a:rPr lang="ru-RU" smtClean="0"/>
               <a:pPr/>
               <a:t>‹#›</a:t>
@@ -2246,10 +2239,10 @@
           <a:bodyPr/>
           <a:lstStyle/>
           <a:p>
-            <a:fld id="{829CC5B7-A91B-431A-81BA-289E7AE4BB3B}" type="datetimeFigureOut">
+            <a:fld id="{5C0F2F08-77E9-4D5A-BDFB-DF2633486EF0}" type="datetimeFigureOut">
               <a:rPr lang="ru-RU" smtClean="0"/>
               <a:pPr/>
-              <a:t>24.02.2026</a:t>
+              <a:t>04.04.2026</a:t>
             </a:fld>
             <a:endParaRPr lang="ru-RU"/>
           </a:p>
@@ -2289,7 +2282,7 @@
           <a:bodyPr/>
           <a:lstStyle/>
           <a:p>
-            <a:fld id="{482C422A-F566-485C-8DC6-0021ABE64B94}" type="slidenum">
+            <a:fld id="{B932AB50-7A97-4E3F-BA31-585E9AA365E7}" type="slidenum">
               <a:rPr lang="ru-RU" smtClean="0"/>
               <a:pPr/>
               <a:t>‹#›</a:t>
@@ -2496,10 +2489,10 @@
           <a:bodyPr/>
           <a:lstStyle/>
           <a:p>
-            <a:fld id="{829CC5B7-A91B-431A-81BA-289E7AE4BB3B}" type="datetimeFigureOut">
+            <a:fld id="{5C0F2F08-77E9-4D5A-BDFB-DF2633486EF0}" type="datetimeFigureOut">
               <a:rPr lang="ru-RU" smtClean="0"/>
               <a:pPr/>
-              <a:t>24.02.2026</a:t>
+              <a:t>04.04.2026</a:t>
             </a:fld>
             <a:endParaRPr lang="ru-RU"/>
           </a:p>
@@ -2539,7 +2532,7 @@
           <a:bodyPr/>
           <a:lstStyle/>
           <a:p>
-            <a:fld id="{482C422A-F566-485C-8DC6-0021ABE64B94}" type="slidenum">
+            <a:fld id="{B932AB50-7A97-4E3F-BA31-585E9AA365E7}" type="slidenum">
               <a:rPr lang="ru-RU" smtClean="0"/>
               <a:pPr/>
               <a:t>‹#›</a:t>
@@ -2706,10 +2699,10 @@
             </a:lvl1pPr>
           </a:lstStyle>
           <a:p>
-            <a:fld id="{829CC5B7-A91B-431A-81BA-289E7AE4BB3B}" type="datetimeFigureOut">
+            <a:fld id="{5C0F2F08-77E9-4D5A-BDFB-DF2633486EF0}" type="datetimeFigureOut">
               <a:rPr lang="ru-RU" smtClean="0"/>
               <a:pPr/>
-              <a:t>24.02.2026</a:t>
+              <a:t>04.04.2026</a:t>
             </a:fld>
             <a:endParaRPr lang="ru-RU"/>
           </a:p>
@@ -2785,7 +2778,7 @@
             </a:lvl1pPr>
           </a:lstStyle>
           <a:p>
-            <a:fld id="{482C422A-F566-485C-8DC6-0021ABE64B94}" type="slidenum">
+            <a:fld id="{B932AB50-7A97-4E3F-BA31-585E9AA365E7}" type="slidenum">
               <a:rPr lang="ru-RU" smtClean="0"/>
               <a:pPr/>
               <a:t>‹#›</a:t>
@@ -3092,14 +3085,28 @@
         </p:nvSpPr>
         <p:spPr/>
         <p:txBody>
-          <a:bodyPr>
-            <a:normAutofit fontScale="90000"/>
-          </a:bodyPr>
+          <a:bodyPr/>
           <a:lstStyle/>
           <a:p>
             <a:r>
               <a:rPr lang="ru-RU" dirty="0" smtClean="0"/>
-              <a:t>ОБЪЕКТНО-ОРИЕНТИРОВАННОЕ ПРОГРАММИРОВАНИЕ</a:t>
+              <a:t>Паттерны</a:t>
+            </a:r>
+            <a:r>
+              <a:rPr lang="en-US" dirty="0" smtClean="0"/>
+              <a:t>,</a:t>
+            </a:r>
+            <a:r>
+              <a:rPr lang="ru-RU" dirty="0" smtClean="0"/>
+              <a:t> проекты</a:t>
+            </a:r>
+            <a:r>
+              <a:rPr lang="en-US" dirty="0" smtClean="0"/>
+              <a:t>, </a:t>
+            </a:r>
+            <a:r>
+              <a:rPr lang="ru-RU" dirty="0" smtClean="0"/>
+              <a:t>интеграция с другими языками</a:t>
             </a:r>
             <a:endParaRPr lang="ru-RU" dirty="0"/>
           </a:p>
@@ -3130,69 +3137,9 @@
           <a:chExt cx="0" cy="0"/>
         </a:xfrm>
       </p:grpSpPr>
-      <p:sp>
-        <p:nvSpPr>
-          <p:cNvPr id="3" name="Прямоугольник 2"/>
-          <p:cNvSpPr/>
-          <p:nvPr/>
-        </p:nvSpPr>
-        <p:spPr>
-          <a:xfrm>
-            <a:off x="0" y="0"/>
-            <a:ext cx="9144000" cy="1569660"/>
-          </a:xfrm>
-          <a:prstGeom prst="rect">
-            <a:avLst/>
-          </a:prstGeom>
-        </p:spPr>
-        <p:txBody>
-          <a:bodyPr wrap="square">
-            <a:spAutoFit/>
-          </a:bodyPr>
-          <a:lstStyle/>
-          <a:p>
-            <a:pPr algn="just"/>
-            <a:r>
-              <a:rPr lang="ru-RU" sz="1600" dirty="0" smtClean="0">
-                <a:latin typeface="Times New Roman" pitchFamily="18" charset="0"/>
-                <a:cs typeface="Times New Roman" pitchFamily="18" charset="0"/>
-              </a:rPr>
-              <a:t>Если константы принадлежат только типу, то поля могут принадлежать как типу, так и экземпляру типа. Для управления принадлежностью используется ключевое слово </a:t>
-            </a:r>
-            <a:r>
-              <a:rPr lang="ru-RU" sz="1600" dirty="0" err="1" smtClean="0">
-                <a:latin typeface="Times New Roman" pitchFamily="18" charset="0"/>
-                <a:cs typeface="Times New Roman" pitchFamily="18" charset="0"/>
-              </a:rPr>
-              <a:t>static</a:t>
-            </a:r>
-            <a:r>
-              <a:rPr lang="ru-RU" sz="1600" dirty="0" smtClean="0">
-                <a:latin typeface="Times New Roman" pitchFamily="18" charset="0"/>
-                <a:cs typeface="Times New Roman" pitchFamily="18" charset="0"/>
-              </a:rPr>
-              <a:t>. Если его указать, то поле будет принадлежать типу, доступ к нему можно будет получить только через имя типа. Такие поля называют статическими.</a:t>
-            </a:r>
-          </a:p>
-          <a:p>
-            <a:pPr algn="just"/>
-            <a:r>
-              <a:rPr lang="ru-RU" sz="1600" dirty="0" smtClean="0">
-                <a:latin typeface="Times New Roman" pitchFamily="18" charset="0"/>
-                <a:cs typeface="Times New Roman" pitchFamily="18" charset="0"/>
-              </a:rPr>
-              <a:t>Важно помнить: если вы меняете значение статического поля в одном месте вашей программы, то во всех других местах, где оно используется, оно тоже изменится.</a:t>
-            </a:r>
-            <a:endParaRPr lang="ru-RU" sz="1600" dirty="0">
-              <a:latin typeface="Times New Roman" pitchFamily="18" charset="0"/>
-              <a:cs typeface="Times New Roman" pitchFamily="18" charset="0"/>
-            </a:endParaRPr>
-          </a:p>
-        </p:txBody>
-      </p:sp>
       <p:pic>
         <p:nvPicPr>
-          <p:cNvPr id="25602" name="Picture 2"/>
+          <p:cNvPr id="1026" name="Picture 2" descr="https://sun9-66.userapi.com/s/v1/ig2/tJNH781-gNrHhVJJOMktGVPoDIMMCOx1AtqikQpdXooLn8I17j88VgC0W1GcIZ7Pft1x5B9HkrYC0vTYmclnvK-o.jpg?quality=95&amp;as=32x25,48x38,72x57,108x85,160x126,240x190,360x284,438x346&amp;from=bu&amp;cs=438x0"/>
           <p:cNvPicPr>
             <a:picLocks noChangeAspect="1" noChangeArrowheads="1"/>
           </p:cNvPicPr>
@@ -3207,170 +3154,18 @@
         </p:blipFill>
         <p:spPr bwMode="auto">
           <a:xfrm>
-            <a:off x="2714612" y="1500174"/>
-            <a:ext cx="3681407" cy="1891725"/>
+            <a:off x="0" y="0"/>
+            <a:ext cx="5516416" cy="4357718"/>
           </a:xfrm>
           <a:prstGeom prst="rect">
             <a:avLst/>
           </a:prstGeom>
           <a:noFill/>
-          <a:ln w="9525">
-            <a:noFill/>
-            <a:miter lim="800000"/>
-            <a:headEnd/>
-            <a:tailEnd/>
-          </a:ln>
-          <a:effectLst/>
         </p:spPr>
       </p:pic>
-      <p:sp>
-        <p:nvSpPr>
-          <p:cNvPr id="5" name="Прямоугольник 4"/>
-          <p:cNvSpPr/>
-          <p:nvPr/>
-        </p:nvSpPr>
-        <p:spPr>
-          <a:xfrm>
-            <a:off x="0" y="3318570"/>
-            <a:ext cx="4572000" cy="3539430"/>
-          </a:xfrm>
-          <a:prstGeom prst="rect">
-            <a:avLst/>
-          </a:prstGeom>
-        </p:spPr>
-        <p:txBody>
-          <a:bodyPr>
-            <a:spAutoFit/>
-          </a:bodyPr>
-          <a:lstStyle/>
-          <a:p>
-            <a:pPr algn="just"/>
-            <a:r>
-              <a:rPr lang="ru-RU" sz="1600" dirty="0" smtClean="0">
-                <a:latin typeface="Times New Roman" pitchFamily="18" charset="0"/>
-                <a:cs typeface="Times New Roman" pitchFamily="18" charset="0"/>
-              </a:rPr>
-              <a:t>В C# ключевое слово </a:t>
-            </a:r>
-            <a:r>
-              <a:rPr lang="ru-RU" sz="1600" dirty="0" err="1" smtClean="0">
-                <a:latin typeface="Times New Roman" pitchFamily="18" charset="0"/>
-                <a:cs typeface="Times New Roman" pitchFamily="18" charset="0"/>
-              </a:rPr>
-              <a:t>readonly</a:t>
-            </a:r>
-            <a:r>
-              <a:rPr lang="ru-RU" sz="1600" dirty="0" smtClean="0">
-                <a:latin typeface="Times New Roman" pitchFamily="18" charset="0"/>
-                <a:cs typeface="Times New Roman" pitchFamily="18" charset="0"/>
-              </a:rPr>
-              <a:t> применяется к полям класса и означает: поле можно инициализировать только при объявлении или в конструкторе, а после — оно становится неизменяемым.</a:t>
-            </a:r>
-          </a:p>
-          <a:p>
-            <a:pPr algn="just"/>
-            <a:r>
-              <a:rPr lang="ru-RU" sz="1600" dirty="0" smtClean="0">
-                <a:latin typeface="Times New Roman" pitchFamily="18" charset="0"/>
-                <a:cs typeface="Times New Roman" pitchFamily="18" charset="0"/>
-              </a:rPr>
-              <a:t>Основные правила</a:t>
-            </a:r>
-          </a:p>
-          <a:p>
-            <a:pPr algn="just"/>
-            <a:r>
-              <a:rPr lang="ru-RU" sz="1600" dirty="0" err="1" smtClean="0">
-                <a:latin typeface="Times New Roman" pitchFamily="18" charset="0"/>
-                <a:cs typeface="Times New Roman" pitchFamily="18" charset="0"/>
-              </a:rPr>
-              <a:t>readonly‑поле</a:t>
-            </a:r>
-            <a:r>
-              <a:rPr lang="ru-RU" sz="1600" dirty="0" smtClean="0">
-                <a:latin typeface="Times New Roman" pitchFamily="18" charset="0"/>
-                <a:cs typeface="Times New Roman" pitchFamily="18" charset="0"/>
-              </a:rPr>
-              <a:t> можно задать:</a:t>
-            </a:r>
-          </a:p>
-          <a:p>
-            <a:pPr algn="just"/>
-            <a:r>
-              <a:rPr lang="ru-RU" sz="1600" dirty="0" smtClean="0">
-                <a:latin typeface="Times New Roman" pitchFamily="18" charset="0"/>
-                <a:cs typeface="Times New Roman" pitchFamily="18" charset="0"/>
-              </a:rPr>
-              <a:t>прямо при объявлении;</a:t>
-            </a:r>
-          </a:p>
-          <a:p>
-            <a:pPr algn="just"/>
-            <a:r>
-              <a:rPr lang="ru-RU" sz="1600" dirty="0" smtClean="0">
-                <a:latin typeface="Times New Roman" pitchFamily="18" charset="0"/>
-                <a:cs typeface="Times New Roman" pitchFamily="18" charset="0"/>
-              </a:rPr>
-              <a:t>в конструкторе класса (в том числе в блоке инициализации);</a:t>
-            </a:r>
-          </a:p>
-          <a:p>
-            <a:pPr algn="just"/>
-            <a:r>
-              <a:rPr lang="ru-RU" sz="1600" dirty="0" smtClean="0">
-                <a:latin typeface="Times New Roman" pitchFamily="18" charset="0"/>
-                <a:cs typeface="Times New Roman" pitchFamily="18" charset="0"/>
-              </a:rPr>
-              <a:t>после выхода из конструктора изменить значение нельзя;</a:t>
-            </a:r>
-          </a:p>
-          <a:p>
-            <a:pPr algn="just"/>
-            <a:r>
-              <a:rPr lang="ru-RU" sz="1600" dirty="0" smtClean="0">
-                <a:latin typeface="Times New Roman" pitchFamily="18" charset="0"/>
-                <a:cs typeface="Times New Roman" pitchFamily="18" charset="0"/>
-              </a:rPr>
-              <a:t>действует на уровне экземпляра (для </a:t>
-            </a:r>
-            <a:r>
-              <a:rPr lang="ru-RU" sz="1600" dirty="0" err="1" smtClean="0">
-                <a:latin typeface="Times New Roman" pitchFamily="18" charset="0"/>
-                <a:cs typeface="Times New Roman" pitchFamily="18" charset="0"/>
-              </a:rPr>
-              <a:t>static</a:t>
-            </a:r>
-            <a:r>
-              <a:rPr lang="ru-RU" sz="1600" dirty="0" smtClean="0">
-                <a:latin typeface="Times New Roman" pitchFamily="18" charset="0"/>
-                <a:cs typeface="Times New Roman" pitchFamily="18" charset="0"/>
-              </a:rPr>
-              <a:t> </a:t>
-            </a:r>
-            <a:r>
-              <a:rPr lang="ru-RU" sz="1600" dirty="0" err="1" smtClean="0">
-                <a:latin typeface="Times New Roman" pitchFamily="18" charset="0"/>
-                <a:cs typeface="Times New Roman" pitchFamily="18" charset="0"/>
-              </a:rPr>
-              <a:t>readonly</a:t>
-            </a:r>
-            <a:r>
-              <a:rPr lang="ru-RU" sz="1600" dirty="0" smtClean="0">
-                <a:latin typeface="Times New Roman" pitchFamily="18" charset="0"/>
-                <a:cs typeface="Times New Roman" pitchFamily="18" charset="0"/>
-              </a:rPr>
-              <a:t> — на уровне типа).</a:t>
-            </a:r>
-            <a:endParaRPr lang="ru-RU" sz="1600" dirty="0">
-              <a:latin typeface="Times New Roman" pitchFamily="18" charset="0"/>
-              <a:cs typeface="Times New Roman" pitchFamily="18" charset="0"/>
-            </a:endParaRPr>
-          </a:p>
-        </p:txBody>
-      </p:sp>
       <p:pic>
         <p:nvPicPr>
-          <p:cNvPr id="25603" name="Picture 3"/>
+          <p:cNvPr id="1028" name="Picture 4" descr="https://sun9-66.userapi.com/s/v1/ig2/gl1iZKlmyjGsM87l_Fw73tkC7Gz6P6eoUqapAd8vS7aLkKpCHDYKKTYNeG_nxu-r4i7-KCK3k3DgyKDRqcGQ3_Gb.jpg?quality=95&amp;as=32x14,48x22,72x33,108x49,160x72,240x108,360x163,480x217,540x244,640x289,715x323&amp;from=bu&amp;cs=715x0"/>
           <p:cNvPicPr>
             <a:picLocks noChangeAspect="1" noChangeArrowheads="1"/>
           </p:cNvPicPr>
@@ -3385,22 +3180,200 @@
         </p:blipFill>
         <p:spPr bwMode="auto">
           <a:xfrm>
-            <a:off x="4643438" y="3429000"/>
-            <a:ext cx="4500562" cy="3429000"/>
+            <a:off x="2333625" y="3781425"/>
+            <a:ext cx="6810375" cy="3076575"/>
           </a:xfrm>
           <a:prstGeom prst="rect">
             <a:avLst/>
           </a:prstGeom>
           <a:noFill/>
-          <a:ln w="9525">
-            <a:noFill/>
-            <a:miter lim="800000"/>
-            <a:headEnd/>
-            <a:tailEnd/>
+        </p:spPr>
+      </p:pic>
+      <p:sp>
+        <p:nvSpPr>
+          <p:cNvPr id="4" name="Прямоугольник 3"/>
+          <p:cNvSpPr/>
+          <p:nvPr/>
+        </p:nvSpPr>
+        <p:spPr>
+          <a:xfrm>
+            <a:off x="0" y="4786322"/>
+            <a:ext cx="2357438" cy="369332"/>
+          </a:xfrm>
+          <a:prstGeom prst="rect">
+            <a:avLst/>
+          </a:prstGeom>
+        </p:spPr>
+        <p:txBody>
+          <a:bodyPr wrap="square">
+            <a:spAutoFit/>
+          </a:bodyPr>
+          <a:lstStyle/>
+          <a:p>
+            <a:r>
+              <a:rPr lang="en-US" b="1" dirty="0" smtClean="0">
+                <a:latin typeface="Times New Roman" pitchFamily="18" charset="0"/>
+                <a:cs typeface="Times New Roman" pitchFamily="18" charset="0"/>
+              </a:rPr>
+              <a:t>pip install </a:t>
+            </a:r>
+            <a:r>
+              <a:rPr lang="en-US" b="1" dirty="0" err="1" smtClean="0">
+                <a:latin typeface="Times New Roman" pitchFamily="18" charset="0"/>
+                <a:cs typeface="Times New Roman" pitchFamily="18" charset="0"/>
+              </a:rPr>
+              <a:t>pythonnet</a:t>
+            </a:r>
+            <a:endParaRPr lang="ru-RU" b="1" dirty="0">
+              <a:latin typeface="Times New Roman" pitchFamily="18" charset="0"/>
+              <a:cs typeface="Times New Roman" pitchFamily="18" charset="0"/>
+            </a:endParaRPr>
+          </a:p>
+        </p:txBody>
+      </p:sp>
+      <p:cxnSp>
+        <p:nvCxnSpPr>
+          <p:cNvPr id="6" name="Прямая со стрелкой 5"/>
+          <p:cNvCxnSpPr>
+            <a:stCxn id="4" idx="0"/>
+          </p:cNvCxnSpPr>
+          <p:nvPr/>
+        </p:nvCxnSpPr>
+        <p:spPr>
+          <a:xfrm rot="5400000" flipH="1" flipV="1">
+            <a:off x="1375161" y="3804062"/>
+            <a:ext cx="785818" cy="1178703"/>
+          </a:xfrm>
+          <a:prstGeom prst="straightConnector1">
+            <a:avLst/>
+          </a:prstGeom>
+          <a:ln>
+            <a:solidFill>
+              <a:srgbClr val="FF0000"/>
+            </a:solidFill>
+            <a:tailEnd type="arrow"/>
           </a:ln>
-          <a:effectLst/>
+        </p:spPr>
+        <p:style>
+          <a:lnRef idx="1">
+            <a:schemeClr val="accent1"/>
+          </a:lnRef>
+          <a:fillRef idx="0">
+            <a:schemeClr val="accent1"/>
+          </a:fillRef>
+          <a:effectRef idx="0">
+            <a:schemeClr val="accent1"/>
+          </a:effectRef>
+          <a:fontRef idx="minor">
+            <a:schemeClr val="tx1"/>
+          </a:fontRef>
+        </p:style>
+      </p:cxnSp>
+      <p:pic>
+        <p:nvPicPr>
+          <p:cNvPr id="1030" name="Picture 6" descr="https://sun9-36.userapi.com/s/v1/ig2/uiX0L1GMSUDMpuqNjkIBCn2-jhGXk1i1F18t767YxjAB5n4N5v2wZa81Dp-9neUOfltcPipGORmRWONI3BVUy687.jpg?quality=95&amp;as=32x20,48x30,72x44,108x66,160x98,240x148,360x221,480x295,540x332,640x394,720x443,751x462&amp;from=bu&amp;cs=751x0"/>
+          <p:cNvPicPr>
+            <a:picLocks noChangeAspect="1" noChangeArrowheads="1"/>
+          </p:cNvPicPr>
+          <p:nvPr/>
+        </p:nvPicPr>
+        <p:blipFill>
+          <a:blip r:embed="rId4"/>
+          <a:srcRect/>
+          <a:stretch>
+            <a:fillRect/>
+          </a:stretch>
+        </p:blipFill>
+        <p:spPr bwMode="auto">
+          <a:xfrm>
+            <a:off x="4963526" y="1"/>
+            <a:ext cx="4180473" cy="2571743"/>
+          </a:xfrm>
+          <a:prstGeom prst="rect">
+            <a:avLst/>
+          </a:prstGeom>
+          <a:noFill/>
         </p:spPr>
       </p:pic>
+      <p:sp>
+        <p:nvSpPr>
+          <p:cNvPr id="8" name="Прямоугольник 7"/>
+          <p:cNvSpPr/>
+          <p:nvPr/>
+        </p:nvSpPr>
+        <p:spPr>
+          <a:xfrm>
+            <a:off x="2643174" y="0"/>
+            <a:ext cx="2357438" cy="584775"/>
+          </a:xfrm>
+          <a:prstGeom prst="rect">
+            <a:avLst/>
+          </a:prstGeom>
+        </p:spPr>
+        <p:txBody>
+          <a:bodyPr wrap="square">
+            <a:spAutoFit/>
+          </a:bodyPr>
+          <a:lstStyle/>
+          <a:p>
+            <a:pPr algn="ctr"/>
+            <a:r>
+              <a:rPr lang="en-US" sz="3200" b="1" dirty="0" smtClean="0">
+                <a:latin typeface="Times New Roman" pitchFamily="18" charset="0"/>
+                <a:cs typeface="Times New Roman" pitchFamily="18" charset="0"/>
+              </a:rPr>
+              <a:t>DLL</a:t>
+            </a:r>
+            <a:endParaRPr lang="ru-RU" sz="3200" b="1" dirty="0">
+              <a:latin typeface="Times New Roman" pitchFamily="18" charset="0"/>
+              <a:cs typeface="Times New Roman" pitchFamily="18" charset="0"/>
+            </a:endParaRPr>
+          </a:p>
+        </p:txBody>
+      </p:sp>
+      <p:sp>
+        <p:nvSpPr>
+          <p:cNvPr id="9" name="Прямоугольник 8"/>
+          <p:cNvSpPr/>
+          <p:nvPr/>
+        </p:nvSpPr>
+        <p:spPr>
+          <a:xfrm>
+            <a:off x="6072198" y="2571744"/>
+            <a:ext cx="2357438" cy="646331"/>
+          </a:xfrm>
+          <a:prstGeom prst="rect">
+            <a:avLst/>
+          </a:prstGeom>
+        </p:spPr>
+        <p:txBody>
+          <a:bodyPr wrap="square">
+            <a:spAutoFit/>
+          </a:bodyPr>
+          <a:lstStyle/>
+          <a:p>
+            <a:pPr algn="ctr"/>
+            <a:r>
+              <a:rPr lang="en-US" b="1" dirty="0" smtClean="0">
+                <a:latin typeface="Times New Roman" pitchFamily="18" charset="0"/>
+                <a:cs typeface="Times New Roman" pitchFamily="18" charset="0"/>
+              </a:rPr>
+              <a:t>DLL </a:t>
+            </a:r>
+            <a:r>
+              <a:rPr lang="ru-RU" b="1" dirty="0" smtClean="0">
+                <a:latin typeface="Times New Roman" pitchFamily="18" charset="0"/>
+                <a:cs typeface="Times New Roman" pitchFamily="18" charset="0"/>
+              </a:rPr>
+              <a:t>создается через библиотеку классов</a:t>
+            </a:r>
+            <a:endParaRPr lang="ru-RU" b="1" dirty="0">
+              <a:latin typeface="Times New Roman" pitchFamily="18" charset="0"/>
+              <a:cs typeface="Times New Roman" pitchFamily="18" charset="0"/>
+            </a:endParaRPr>
+          </a:p>
+        </p:txBody>
+      </p:sp>
     </p:spTree>
   </p:cSld>
   <p:clrMapOvr>
@@ -3428,7 +3401,7 @@
       </p:grpSpPr>
       <p:pic>
         <p:nvPicPr>
-          <p:cNvPr id="26626" name="Picture 2"/>
+          <p:cNvPr id="16386" name="Picture 2"/>
           <p:cNvPicPr>
             <a:picLocks noChangeAspect="1" noChangeArrowheads="1"/>
           </p:cNvPicPr>
@@ -3443,8 +3416,8 @@
         </p:blipFill>
         <p:spPr bwMode="auto">
           <a:xfrm>
-            <a:off x="0" y="2071679"/>
-            <a:ext cx="9144000" cy="3143272"/>
+            <a:off x="0" y="0"/>
+            <a:ext cx="5164373" cy="6858000"/>
           </a:xfrm>
           <a:prstGeom prst="rect">
             <a:avLst/>
@@ -3461,7 +3434,7 @@
       </p:pic>
       <p:pic>
         <p:nvPicPr>
-          <p:cNvPr id="26627" name="Picture 3"/>
+          <p:cNvPr id="16387" name="Picture 3"/>
           <p:cNvPicPr>
             <a:picLocks noChangeAspect="1" noChangeArrowheads="1"/>
           </p:cNvPicPr>
@@ -3476,8 +3449,8 @@
         </p:blipFill>
         <p:spPr bwMode="auto">
           <a:xfrm>
-            <a:off x="0" y="0"/>
-            <a:ext cx="9144000" cy="2085975"/>
+            <a:off x="4071934" y="3460763"/>
+            <a:ext cx="5072066" cy="3397237"/>
           </a:xfrm>
           <a:prstGeom prst="rect">
             <a:avLst/>
@@ -3492,101 +3465,36 @@
           <a:effectLst/>
         </p:spPr>
       </p:pic>
-      <p:pic>
-        <p:nvPicPr>
-          <p:cNvPr id="26628" name="Picture 4"/>
-          <p:cNvPicPr>
-            <a:picLocks noChangeAspect="1" noChangeArrowheads="1"/>
-          </p:cNvPicPr>
+      <p:sp>
+        <p:nvSpPr>
+          <p:cNvPr id="4" name="Прямоугольник 3"/>
+          <p:cNvSpPr/>
           <p:nvPr/>
-        </p:nvPicPr>
-        <p:blipFill>
-          <a:blip r:embed="rId4"/>
-          <a:srcRect/>
-          <a:stretch>
-            <a:fillRect/>
-          </a:stretch>
-        </p:blipFill>
-        <p:spPr bwMode="auto">
-          <a:xfrm>
-            <a:off x="214282" y="5143512"/>
-            <a:ext cx="4943475" cy="1190625"/>
+        </p:nvSpPr>
+        <p:spPr>
+          <a:xfrm>
+            <a:off x="3143240" y="0"/>
+            <a:ext cx="2357438" cy="584775"/>
           </a:xfrm>
           <a:prstGeom prst="rect">
             <a:avLst/>
           </a:prstGeom>
-          <a:noFill/>
-          <a:ln w="9525">
-            <a:noFill/>
-            <a:miter lim="800000"/>
-            <a:headEnd/>
-            <a:tailEnd/>
-          </a:ln>
-          <a:effectLst/>
-        </p:spPr>
-      </p:pic>
-      <p:pic>
-        <p:nvPicPr>
-          <p:cNvPr id="26629" name="Picture 5"/>
-          <p:cNvPicPr>
-            <a:picLocks noChangeAspect="1" noChangeArrowheads="1"/>
-          </p:cNvPicPr>
-          <p:nvPr/>
-        </p:nvPicPr>
-        <p:blipFill>
-          <a:blip r:embed="rId5"/>
-          <a:srcRect/>
-          <a:stretch>
-            <a:fillRect/>
-          </a:stretch>
-        </p:blipFill>
-        <p:spPr bwMode="auto">
-          <a:xfrm>
-            <a:off x="5572132" y="4971793"/>
-            <a:ext cx="2557455" cy="1886207"/>
-          </a:xfrm>
-          <a:prstGeom prst="rect">
-            <a:avLst/>
-          </a:prstGeom>
-          <a:noFill/>
-          <a:ln w="9525">
-            <a:noFill/>
-            <a:miter lim="800000"/>
-            <a:headEnd/>
-            <a:tailEnd/>
-          </a:ln>
-          <a:effectLst/>
-        </p:spPr>
-      </p:pic>
-      <p:sp>
-        <p:nvSpPr>
-          <p:cNvPr id="6" name="Прямоугольник 5"/>
-          <p:cNvSpPr/>
-          <p:nvPr/>
-        </p:nvSpPr>
-        <p:spPr>
-          <a:xfrm>
-            <a:off x="1571604" y="6286520"/>
-            <a:ext cx="2252283" cy="369332"/>
-          </a:xfrm>
-          <a:prstGeom prst="rect">
-            <a:avLst/>
-          </a:prstGeom>
-        </p:spPr>
-        <p:txBody>
-          <a:bodyPr wrap="none">
+        </p:spPr>
+        <p:txBody>
+          <a:bodyPr wrap="square">
             <a:spAutoFit/>
           </a:bodyPr>
           <a:lstStyle/>
           <a:p>
-            <a:r>
-              <a:rPr lang="ru-RU" dirty="0" smtClean="0">
-                <a:latin typeface="Times New Roman" pitchFamily="18" charset="0"/>
-                <a:cs typeface="Times New Roman" pitchFamily="18" charset="0"/>
-              </a:rPr>
-              <a:t>Методы расширения</a:t>
-            </a:r>
-            <a:endParaRPr lang="ru-RU" dirty="0">
+            <a:pPr algn="ctr"/>
+            <a:r>
+              <a:rPr lang="en-US" sz="3200" b="1" dirty="0" smtClean="0">
+                <a:latin typeface="Times New Roman" pitchFamily="18" charset="0"/>
+                <a:cs typeface="Times New Roman" pitchFamily="18" charset="0"/>
+              </a:rPr>
+              <a:t>COM</a:t>
+            </a:r>
+            <a:endParaRPr lang="ru-RU" sz="3200" b="1" dirty="0">
               <a:latin typeface="Times New Roman" pitchFamily="18" charset="0"/>
               <a:cs typeface="Times New Roman" pitchFamily="18" charset="0"/>
             </a:endParaRPr>
@@ -3620,7 +3528,7 @@
       </p:grpSpPr>
       <p:pic>
         <p:nvPicPr>
-          <p:cNvPr id="27650" name="Picture 2"/>
+          <p:cNvPr id="17410" name="Picture 2"/>
           <p:cNvPicPr>
             <a:picLocks noChangeAspect="1" noChangeArrowheads="1"/>
           </p:cNvPicPr>
@@ -3635,8 +3543,8 @@
         </p:blipFill>
         <p:spPr bwMode="auto">
           <a:xfrm>
-            <a:off x="1357290" y="0"/>
-            <a:ext cx="5823979" cy="3071810"/>
+            <a:off x="0" y="1285860"/>
+            <a:ext cx="3571868" cy="3609975"/>
           </a:xfrm>
           <a:prstGeom prst="rect">
             <a:avLst/>
@@ -3653,7 +3561,7 @@
       </p:pic>
       <p:pic>
         <p:nvPicPr>
-          <p:cNvPr id="27653" name="Picture 5"/>
+          <p:cNvPr id="17411" name="Picture 3"/>
           <p:cNvPicPr>
             <a:picLocks noChangeAspect="1" noChangeArrowheads="1"/>
           </p:cNvPicPr>
@@ -3668,8 +3576,8 @@
         </p:blipFill>
         <p:spPr bwMode="auto">
           <a:xfrm>
-            <a:off x="0" y="3322522"/>
-            <a:ext cx="5572164" cy="3535478"/>
+            <a:off x="3571875" y="0"/>
+            <a:ext cx="5572125" cy="6858000"/>
           </a:xfrm>
           <a:prstGeom prst="rect">
             <a:avLst/>
@@ -3684,39 +3592,42 @@
           <a:effectLst/>
         </p:spPr>
       </p:pic>
-      <p:pic>
-        <p:nvPicPr>
-          <p:cNvPr id="27651" name="Picture 3"/>
-          <p:cNvPicPr>
-            <a:picLocks noChangeAspect="1" noChangeArrowheads="1"/>
-          </p:cNvPicPr>
+      <p:sp>
+        <p:nvSpPr>
+          <p:cNvPr id="4" name="Прямоугольник 3"/>
+          <p:cNvSpPr/>
           <p:nvPr/>
-        </p:nvPicPr>
-        <p:blipFill>
-          <a:blip r:embed="rId4"/>
-          <a:srcRect/>
-          <a:stretch>
-            <a:fillRect/>
-          </a:stretch>
-        </p:blipFill>
-        <p:spPr bwMode="auto">
-          <a:xfrm>
-            <a:off x="3571868" y="4357694"/>
-            <a:ext cx="5572132" cy="2032072"/>
+        </p:nvSpPr>
+        <p:spPr>
+          <a:xfrm>
+            <a:off x="642910" y="0"/>
+            <a:ext cx="2357438" cy="584775"/>
           </a:xfrm>
           <a:prstGeom prst="rect">
             <a:avLst/>
           </a:prstGeom>
-          <a:noFill/>
-          <a:ln w="9525">
-            <a:noFill/>
-            <a:miter lim="800000"/>
-            <a:headEnd/>
-            <a:tailEnd/>
-          </a:ln>
-          <a:effectLst/>
-        </p:spPr>
-      </p:pic>
+        </p:spPr>
+        <p:txBody>
+          <a:bodyPr wrap="square">
+            <a:spAutoFit/>
+          </a:bodyPr>
+          <a:lstStyle/>
+          <a:p>
+            <a:pPr algn="ctr"/>
+            <a:r>
+              <a:rPr lang="en-US" sz="3200" b="1" dirty="0" smtClean="0">
+                <a:latin typeface="Times New Roman" pitchFamily="18" charset="0"/>
+                <a:cs typeface="Times New Roman" pitchFamily="18" charset="0"/>
+              </a:rPr>
+              <a:t>WEB</a:t>
+            </a:r>
+            <a:endParaRPr lang="ru-RU" sz="3200" b="1" dirty="0">
+              <a:latin typeface="Times New Roman" pitchFamily="18" charset="0"/>
+              <a:cs typeface="Times New Roman" pitchFamily="18" charset="0"/>
+            </a:endParaRPr>
+          </a:p>
+        </p:txBody>
+      </p:sp>
     </p:spTree>
   </p:cSld>
   <p:clrMapOvr>
@@ -3750,8 +3661,8 @@
         </p:nvSpPr>
         <p:spPr>
           <a:xfrm>
-            <a:off x="0" y="0"/>
-            <a:ext cx="9144000" cy="1754326"/>
+            <a:off x="928662" y="0"/>
+            <a:ext cx="6286544" cy="584775"/>
           </a:xfrm>
           <a:prstGeom prst="rect">
             <a:avLst/>
@@ -3763,78 +3674,22 @@
           </a:bodyPr>
           <a:lstStyle/>
           <a:p>
-            <a:pPr algn="just"/>
-            <a:r>
-              <a:rPr lang="ru-RU" b="1" dirty="0" smtClean="0">
-                <a:latin typeface="Times New Roman" pitchFamily="18" charset="0"/>
-                <a:cs typeface="Times New Roman" pitchFamily="18" charset="0"/>
-              </a:rPr>
-              <a:t>Свойства </a:t>
-            </a:r>
-            <a:r>
-              <a:rPr lang="ru-RU" dirty="0" smtClean="0">
-                <a:latin typeface="Times New Roman" pitchFamily="18" charset="0"/>
-                <a:cs typeface="Times New Roman" pitchFamily="18" charset="0"/>
-              </a:rPr>
-              <a:t>представляют собой элементы конструкции типа, предоставляющие механизм для управляемого доступа к полям.</a:t>
-            </a:r>
-            <a:r>
-              <a:rPr lang="en-US" dirty="0" smtClean="0">
-                <a:latin typeface="Times New Roman" pitchFamily="18" charset="0"/>
-                <a:cs typeface="Times New Roman" pitchFamily="18" charset="0"/>
-              </a:rPr>
-              <a:t> </a:t>
-            </a:r>
-            <a:r>
-              <a:rPr lang="ru-RU" dirty="0" smtClean="0">
-                <a:latin typeface="Times New Roman" pitchFamily="18" charset="0"/>
-                <a:cs typeface="Times New Roman" pitchFamily="18" charset="0"/>
-              </a:rPr>
-              <a:t>Если мы хотим ограничить доступ к свойству объекта, т.е. сделать невозможным задание значений свойствам после объявления экземпляра типа, то можно создать приватный </a:t>
-            </a:r>
-            <a:r>
-              <a:rPr lang="ru-RU" dirty="0" err="1" smtClean="0">
-                <a:latin typeface="Times New Roman" pitchFamily="18" charset="0"/>
-                <a:cs typeface="Times New Roman" pitchFamily="18" charset="0"/>
-              </a:rPr>
-              <a:t>setter</a:t>
-            </a:r>
-            <a:r>
-              <a:rPr lang="ru-RU" dirty="0" smtClean="0">
-                <a:latin typeface="Times New Roman" pitchFamily="18" charset="0"/>
-                <a:cs typeface="Times New Roman" pitchFamily="18" charset="0"/>
-              </a:rPr>
-              <a:t>. Для этого перед методом </a:t>
-            </a:r>
-            <a:r>
-              <a:rPr lang="ru-RU" dirty="0" err="1" smtClean="0">
-                <a:latin typeface="Times New Roman" pitchFamily="18" charset="0"/>
-                <a:cs typeface="Times New Roman" pitchFamily="18" charset="0"/>
-              </a:rPr>
-              <a:t>set</a:t>
-            </a:r>
-            <a:r>
-              <a:rPr lang="ru-RU" dirty="0" smtClean="0">
-                <a:latin typeface="Times New Roman" pitchFamily="18" charset="0"/>
-                <a:cs typeface="Times New Roman" pitchFamily="18" charset="0"/>
-              </a:rPr>
-              <a:t> необходимо поставить ключевое слово </a:t>
-            </a:r>
-            <a:r>
-              <a:rPr lang="ru-RU" dirty="0" err="1" smtClean="0">
-                <a:latin typeface="Times New Roman" pitchFamily="18" charset="0"/>
-                <a:cs typeface="Times New Roman" pitchFamily="18" charset="0"/>
-              </a:rPr>
-              <a:t>private</a:t>
-            </a:r>
-            <a:r>
-              <a:rPr lang="ru-RU" dirty="0" smtClean="0">
-                <a:latin typeface="Times New Roman" pitchFamily="18" charset="0"/>
-                <a:cs typeface="Times New Roman" pitchFamily="18" charset="0"/>
-              </a:rPr>
-              <a:t>. Значение, в этом случае, можно будет задать только внутри класса, в том числе и в конструкторе.</a:t>
-            </a:r>
-            <a:endParaRPr lang="ru-RU" dirty="0">
+            <a:pPr algn="ctr"/>
+            <a:r>
+              <a:rPr lang="ru-RU" sz="3200" b="1" dirty="0" smtClean="0">
+                <a:latin typeface="Times New Roman" pitchFamily="18" charset="0"/>
+                <a:cs typeface="Times New Roman" pitchFamily="18" charset="0"/>
+              </a:rPr>
+              <a:t>Вызов Питона из файла </a:t>
+            </a:r>
+            <a:r>
+              <a:rPr lang="en-US" sz="3200" b="1" dirty="0" smtClean="0">
+                <a:latin typeface="Times New Roman" pitchFamily="18" charset="0"/>
+                <a:cs typeface="Times New Roman" pitchFamily="18" charset="0"/>
+              </a:rPr>
+              <a:t>C#</a:t>
+            </a:r>
+            <a:endParaRPr lang="ru-RU" sz="3200" b="1" dirty="0">
               <a:latin typeface="Times New Roman" pitchFamily="18" charset="0"/>
               <a:cs typeface="Times New Roman" pitchFamily="18" charset="0"/>
             </a:endParaRPr>
@@ -3843,7 +3698,7 @@
       </p:sp>
       <p:pic>
         <p:nvPicPr>
-          <p:cNvPr id="28675" name="Picture 3"/>
+          <p:cNvPr id="19458" name="Picture 2" descr="https://sun4-21.userapi.com/s/v1/ig2/AXY4AC8Vik38Put6tyvAYLfg82VjRjBa3RHlYZanjyn51ukYwHKKPQO8ZZPlwCQ06_29MRBjXpj98Oi-3YkDLGkj.jpg?quality=95&amp;as=32x46,48x70,72x104,108x157,160x232,240x348,360x522,480x696,528x766&amp;from=bu&amp;cs=528x0"/>
           <p:cNvPicPr>
             <a:picLocks noChangeAspect="1" noChangeArrowheads="1"/>
           </p:cNvPicPr>
@@ -3858,92 +3713,15 @@
         </p:blipFill>
         <p:spPr bwMode="auto">
           <a:xfrm>
-            <a:off x="0" y="1643050"/>
-            <a:ext cx="6105525" cy="4714908"/>
+            <a:off x="1785918" y="714356"/>
+            <a:ext cx="5029200" cy="6143644"/>
           </a:xfrm>
           <a:prstGeom prst="rect">
             <a:avLst/>
           </a:prstGeom>
           <a:noFill/>
-          <a:ln w="9525">
-            <a:noFill/>
-            <a:miter lim="800000"/>
-            <a:headEnd/>
-            <a:tailEnd/>
-          </a:ln>
-          <a:effectLst/>
         </p:spPr>
       </p:pic>
-      <p:pic>
-        <p:nvPicPr>
-          <p:cNvPr id="28674" name="Picture 2"/>
-          <p:cNvPicPr>
-            <a:picLocks noChangeAspect="1" noChangeArrowheads="1"/>
-          </p:cNvPicPr>
-          <p:nvPr/>
-        </p:nvPicPr>
-        <p:blipFill>
-          <a:blip r:embed="rId3"/>
-          <a:srcRect/>
-          <a:stretch>
-            <a:fillRect/>
-          </a:stretch>
-        </p:blipFill>
-        <p:spPr bwMode="auto">
-          <a:xfrm>
-            <a:off x="4500562" y="3071810"/>
-            <a:ext cx="4643438" cy="2388730"/>
-          </a:xfrm>
-          <a:prstGeom prst="rect">
-            <a:avLst/>
-          </a:prstGeom>
-          <a:noFill/>
-          <a:ln w="9525">
-            <a:noFill/>
-            <a:miter lim="800000"/>
-            <a:headEnd/>
-            <a:tailEnd/>
-          </a:ln>
-          <a:effectLst/>
-        </p:spPr>
-      </p:pic>
-      <p:sp>
-        <p:nvSpPr>
-          <p:cNvPr id="5" name="Прямоугольник 4"/>
-          <p:cNvSpPr/>
-          <p:nvPr/>
-        </p:nvSpPr>
-        <p:spPr>
-          <a:xfrm>
-            <a:off x="0" y="6286520"/>
-            <a:ext cx="9144000" cy="369332"/>
-          </a:xfrm>
-          <a:prstGeom prst="rect">
-            <a:avLst/>
-          </a:prstGeom>
-        </p:spPr>
-        <p:txBody>
-          <a:bodyPr wrap="square">
-            <a:spAutoFit/>
-          </a:bodyPr>
-          <a:lstStyle/>
-          <a:p>
-            <a:pPr algn="ctr"/>
-            <a:r>
-              <a:rPr lang="en-US" dirty="0" smtClean="0">
-                <a:latin typeface="Times New Roman" pitchFamily="18" charset="0"/>
-                <a:cs typeface="Times New Roman" pitchFamily="18" charset="0"/>
-                <a:hlinkClick r:id="rId4"/>
-              </a:rPr>
-              <a:t>https://metanit.com/sharp/tutorial/3.4.php?ysclid=mluqvmd9ho914585276</a:t>
-            </a:r>
-            <a:endParaRPr lang="en-US" dirty="0" smtClean="0">
-              <a:latin typeface="Times New Roman" pitchFamily="18" charset="0"/>
-              <a:cs typeface="Times New Roman" pitchFamily="18" charset="0"/>
-            </a:endParaRPr>
-          </a:p>
-        </p:txBody>
-      </p:sp>
     </p:spTree>
   </p:cSld>
   <p:clrMapOvr>
@@ -3969,87 +3747,9 @@
           <a:chExt cx="0" cy="0"/>
         </a:xfrm>
       </p:grpSpPr>
-      <p:sp>
-        <p:nvSpPr>
-          <p:cNvPr id="2" name="Прямоугольник 1"/>
-          <p:cNvSpPr/>
-          <p:nvPr/>
-        </p:nvSpPr>
-        <p:spPr>
-          <a:xfrm>
-            <a:off x="0" y="357166"/>
-            <a:ext cx="9144000" cy="1569660"/>
-          </a:xfrm>
-          <a:prstGeom prst="rect">
-            <a:avLst/>
-          </a:prstGeom>
-        </p:spPr>
-        <p:txBody>
-          <a:bodyPr wrap="square">
-            <a:spAutoFit/>
-          </a:bodyPr>
-          <a:lstStyle/>
-          <a:p>
-            <a:pPr algn="just"/>
-            <a:r>
-              <a:rPr lang="ru-RU" sz="2400" dirty="0" smtClean="0">
-                <a:latin typeface="Times New Roman" pitchFamily="18" charset="0"/>
-                <a:cs typeface="Times New Roman" pitchFamily="18" charset="0"/>
-              </a:rPr>
-              <a:t>Ключевое слово </a:t>
-            </a:r>
-            <a:r>
-              <a:rPr lang="ru-RU" sz="2400" dirty="0" err="1" smtClean="0">
-                <a:latin typeface="Times New Roman" pitchFamily="18" charset="0"/>
-                <a:cs typeface="Times New Roman" pitchFamily="18" charset="0"/>
-              </a:rPr>
-              <a:t>this</a:t>
-            </a:r>
-            <a:r>
-              <a:rPr lang="ru-RU" sz="2400" dirty="0" smtClean="0">
-                <a:latin typeface="Times New Roman" pitchFamily="18" charset="0"/>
-                <a:cs typeface="Times New Roman" pitchFamily="18" charset="0"/>
-              </a:rPr>
-              <a:t> используется для доступа к текущему экземпляру класса. Например, рассмотрим класс </a:t>
-            </a:r>
-            <a:r>
-              <a:rPr lang="ru-RU" sz="2400" dirty="0" err="1" smtClean="0">
-                <a:latin typeface="Times New Roman" pitchFamily="18" charset="0"/>
-                <a:cs typeface="Times New Roman" pitchFamily="18" charset="0"/>
-              </a:rPr>
-              <a:t>Shape</a:t>
-            </a:r>
-            <a:r>
-              <a:rPr lang="ru-RU" sz="2400" dirty="0" smtClean="0">
-                <a:latin typeface="Times New Roman" pitchFamily="18" charset="0"/>
-                <a:cs typeface="Times New Roman" pitchFamily="18" charset="0"/>
-              </a:rPr>
-              <a:t>, который содержит закрытое поле, отвечающее за хранение цвета с именем </a:t>
-            </a:r>
-            <a:r>
-              <a:rPr lang="ru-RU" sz="2400" dirty="0" err="1" smtClean="0">
-                <a:latin typeface="Times New Roman" pitchFamily="18" charset="0"/>
-                <a:cs typeface="Times New Roman" pitchFamily="18" charset="0"/>
-              </a:rPr>
-              <a:t>color</a:t>
-            </a:r>
-            <a:r>
-              <a:rPr lang="ru-RU" sz="2400" dirty="0" smtClean="0">
-                <a:latin typeface="Times New Roman" pitchFamily="18" charset="0"/>
-                <a:cs typeface="Times New Roman" pitchFamily="18" charset="0"/>
-              </a:rPr>
-              <a:t>, без приставки в виде символа подчеркивания.</a:t>
-            </a:r>
-            <a:endParaRPr lang="ru-RU" sz="2400" dirty="0">
-              <a:latin typeface="Times New Roman" pitchFamily="18" charset="0"/>
-              <a:cs typeface="Times New Roman" pitchFamily="18" charset="0"/>
-            </a:endParaRPr>
-          </a:p>
-        </p:txBody>
-      </p:sp>
       <p:pic>
         <p:nvPicPr>
-          <p:cNvPr id="29698" name="Picture 2"/>
+          <p:cNvPr id="18434" name="Picture 2"/>
           <p:cNvPicPr>
             <a:picLocks noChangeAspect="1" noChangeArrowheads="1"/>
           </p:cNvPicPr>
@@ -4064,8 +3764,8 @@
         </p:blipFill>
         <p:spPr bwMode="auto">
           <a:xfrm>
-            <a:off x="238125" y="2000240"/>
-            <a:ext cx="8905875" cy="2409825"/>
+            <a:off x="0" y="0"/>
+            <a:ext cx="5572164" cy="5394144"/>
           </a:xfrm>
           <a:prstGeom prst="rect">
             <a:avLst/>
@@ -4080,6 +3780,89 @@
           <a:effectLst/>
         </p:spPr>
       </p:pic>
+      <p:pic>
+        <p:nvPicPr>
+          <p:cNvPr id="18435" name="Picture 3"/>
+          <p:cNvPicPr>
+            <a:picLocks noChangeAspect="1" noChangeArrowheads="1"/>
+          </p:cNvPicPr>
+          <p:nvPr/>
+        </p:nvPicPr>
+        <p:blipFill>
+          <a:blip r:embed="rId3"/>
+          <a:srcRect/>
+          <a:stretch>
+            <a:fillRect/>
+          </a:stretch>
+        </p:blipFill>
+        <p:spPr bwMode="auto">
+          <a:xfrm>
+            <a:off x="3357555" y="4260285"/>
+            <a:ext cx="5786446" cy="2597716"/>
+          </a:xfrm>
+          <a:prstGeom prst="rect">
+            <a:avLst/>
+          </a:prstGeom>
+          <a:noFill/>
+          <a:ln w="9525">
+            <a:noFill/>
+            <a:miter lim="800000"/>
+            <a:headEnd/>
+            <a:tailEnd/>
+          </a:ln>
+          <a:effectLst/>
+        </p:spPr>
+      </p:pic>
+      <p:sp>
+        <p:nvSpPr>
+          <p:cNvPr id="4" name="Прямоугольник 3"/>
+          <p:cNvSpPr/>
+          <p:nvPr/>
+        </p:nvSpPr>
+        <p:spPr>
+          <a:xfrm>
+            <a:off x="2643174" y="0"/>
+            <a:ext cx="5143536" cy="584775"/>
+          </a:xfrm>
+          <a:prstGeom prst="rect">
+            <a:avLst/>
+          </a:prstGeom>
+        </p:spPr>
+        <p:txBody>
+          <a:bodyPr wrap="square">
+            <a:spAutoFit/>
+          </a:bodyPr>
+          <a:lstStyle/>
+          <a:p>
+            <a:pPr algn="ctr"/>
+            <a:r>
+              <a:rPr lang="ru-RU" sz="3200" b="1" dirty="0" smtClean="0">
+                <a:latin typeface="Times New Roman" pitchFamily="18" charset="0"/>
+                <a:cs typeface="Times New Roman" pitchFamily="18" charset="0"/>
+              </a:rPr>
+              <a:t>Вызов </a:t>
+            </a:r>
+            <a:r>
+              <a:rPr lang="en-US" sz="3200" b="1" dirty="0" smtClean="0">
+                <a:latin typeface="Times New Roman" pitchFamily="18" charset="0"/>
+                <a:cs typeface="Times New Roman" pitchFamily="18" charset="0"/>
+              </a:rPr>
+              <a:t>C#-</a:t>
+            </a:r>
+            <a:r>
+              <a:rPr lang="ru-RU" sz="3200" b="1" dirty="0" smtClean="0">
+                <a:latin typeface="Times New Roman" pitchFamily="18" charset="0"/>
+                <a:cs typeface="Times New Roman" pitchFamily="18" charset="0"/>
+              </a:rPr>
+              <a:t>файла из Питон</a:t>
+            </a:r>
+            <a:endParaRPr lang="ru-RU" sz="3200" b="1" dirty="0">
+              <a:latin typeface="Times New Roman" pitchFamily="18" charset="0"/>
+              <a:cs typeface="Times New Roman" pitchFamily="18" charset="0"/>
+            </a:endParaRPr>
+          </a:p>
+        </p:txBody>
+      </p:sp>
     </p:spTree>
   </p:cSld>
   <p:clrMapOvr>
@@ -4107,7 +3890,7 @@
       </p:grpSpPr>
       <p:pic>
         <p:nvPicPr>
-          <p:cNvPr id="2050" name="Picture 2"/>
+          <p:cNvPr id="20482" name="Picture 2"/>
           <p:cNvPicPr>
             <a:picLocks noChangeAspect="1" noChangeArrowheads="1"/>
           </p:cNvPicPr>
@@ -4122,8 +3905,8 @@
         </p:blipFill>
         <p:spPr bwMode="auto">
           <a:xfrm>
-            <a:off x="41492" y="1000108"/>
-            <a:ext cx="5673516" cy="5857892"/>
+            <a:off x="0" y="928670"/>
+            <a:ext cx="4714876" cy="1340654"/>
           </a:xfrm>
           <a:prstGeom prst="rect">
             <a:avLst/>
@@ -4138,41 +3921,9 @@
           <a:effectLst/>
         </p:spPr>
       </p:pic>
-      <p:sp>
-        <p:nvSpPr>
-          <p:cNvPr id="3" name="Прямоугольник 2"/>
-          <p:cNvSpPr/>
-          <p:nvPr/>
-        </p:nvSpPr>
-        <p:spPr>
-          <a:xfrm>
-            <a:off x="2786050" y="0"/>
-            <a:ext cx="4142994" cy="646331"/>
-          </a:xfrm>
-          <a:prstGeom prst="rect">
-            <a:avLst/>
-          </a:prstGeom>
-        </p:spPr>
-        <p:txBody>
-          <a:bodyPr wrap="none">
-            <a:spAutoFit/>
-          </a:bodyPr>
-          <a:lstStyle/>
-          <a:p>
-            <a:r>
-              <a:rPr lang="ru-RU" sz="3600" b="1" dirty="0" smtClean="0">
-                <a:latin typeface="Times New Roman" pitchFamily="18" charset="0"/>
-                <a:cs typeface="Times New Roman" pitchFamily="18" charset="0"/>
-              </a:rPr>
-              <a:t>НАСЛЕДОВАНИЕ</a:t>
-            </a:r>
-            <a:endParaRPr lang="ru-RU" sz="3600" b="1" dirty="0"/>
-          </a:p>
-        </p:txBody>
-      </p:sp>
       <p:pic>
         <p:nvPicPr>
-          <p:cNvPr id="4" name="Picture 2"/>
+          <p:cNvPr id="20483" name="Picture 3"/>
           <p:cNvPicPr>
             <a:picLocks noChangeAspect="1" noChangeArrowheads="1"/>
           </p:cNvPicPr>
@@ -4187,8 +3938,8 @@
         </p:blipFill>
         <p:spPr bwMode="auto">
           <a:xfrm>
-            <a:off x="5786446" y="1076325"/>
-            <a:ext cx="3357554" cy="5781675"/>
+            <a:off x="-1" y="2285992"/>
+            <a:ext cx="4885355" cy="4572008"/>
           </a:xfrm>
           <a:prstGeom prst="rect">
             <a:avLst/>
@@ -4203,41 +3954,16 @@
           <a:effectLst/>
         </p:spPr>
       </p:pic>
-    </p:spTree>
-  </p:cSld>
-  <p:clrMapOvr>
-    <a:masterClrMapping/>
-  </p:clrMapOvr>
-</p:sld>
-</file>
-
-<file path=ppt/slides/slide16.xml><?xml version="1.0" encoding="utf-8"?>
-<p:sld xmlns:a="http://schemas.openxmlformats.org/drawingml/2006/main" xmlns:r="http://schemas.openxmlformats.org/officeDocument/2006/relationships" xmlns:p="http://schemas.openxmlformats.org/presentationml/2006/main">
-  <p:cSld>
-    <p:spTree>
-      <p:nvGrpSpPr>
-        <p:cNvPr id="1" name=""/>
-        <p:cNvGrpSpPr/>
-        <p:nvPr/>
-      </p:nvGrpSpPr>
-      <p:grpSpPr>
-        <a:xfrm>
-          <a:off x="0" y="0"/>
-          <a:ext cx="0" cy="0"/>
-          <a:chOff x="0" y="0"/>
-          <a:chExt cx="0" cy="0"/>
-        </a:xfrm>
-      </p:grpSpPr>
-      <p:sp>
-        <p:nvSpPr>
-          <p:cNvPr id="2" name="Прямоугольник 1"/>
+      <p:sp>
+        <p:nvSpPr>
+          <p:cNvPr id="4" name="Прямоугольник 3"/>
           <p:cNvSpPr/>
           <p:nvPr/>
         </p:nvSpPr>
         <p:spPr>
           <a:xfrm>
-            <a:off x="0" y="0"/>
-            <a:ext cx="9144000" cy="1200329"/>
+            <a:off x="4786314" y="571480"/>
+            <a:ext cx="4357686" cy="2554545"/>
           </a:xfrm>
           <a:prstGeom prst="rect">
             <a:avLst/>
@@ -4249,53 +3975,195 @@
           </a:bodyPr>
           <a:lstStyle/>
           <a:p>
-            <a:pPr algn="ctr"/>
-            <a:r>
-              <a:rPr lang="ru-RU" sz="3600" b="1" dirty="0" smtClean="0">
-                <a:latin typeface="Times New Roman" pitchFamily="18" charset="0"/>
-                <a:cs typeface="Times New Roman" pitchFamily="18" charset="0"/>
-              </a:rPr>
-              <a:t>Переопределение методов в классе наследнике</a:t>
-            </a:r>
-            <a:r>
-              <a:rPr lang="en-US" sz="3600" b="1" dirty="0" smtClean="0">
-                <a:latin typeface="Times New Roman" pitchFamily="18" charset="0"/>
-                <a:cs typeface="Times New Roman" pitchFamily="18" charset="0"/>
-              </a:rPr>
-              <a:t>: </a:t>
-            </a:r>
-            <a:r>
-              <a:rPr lang="ru-RU" sz="3600" b="1" dirty="0" smtClean="0">
-                <a:latin typeface="Times New Roman" pitchFamily="18" charset="0"/>
-                <a:cs typeface="Times New Roman" pitchFamily="18" charset="0"/>
-              </a:rPr>
-              <a:t>ПОЛИМОРФИЗМ</a:t>
-            </a:r>
-          </a:p>
-        </p:txBody>
-      </p:sp>
-      <p:sp>
-        <p:nvSpPr>
-          <p:cNvPr id="3" name="Прямоугольник 2"/>
+            <a:pPr algn="just"/>
+            <a:r>
+              <a:rPr lang="en-US" sz="2000" dirty="0" smtClean="0">
+                <a:latin typeface="Times New Roman" pitchFamily="18" charset="0"/>
+                <a:cs typeface="Times New Roman" pitchFamily="18" charset="0"/>
+              </a:rPr>
+              <a:t>Arrange: </a:t>
+            </a:r>
+            <a:r>
+              <a:rPr lang="ru-RU" sz="2000" dirty="0" smtClean="0">
+                <a:latin typeface="Times New Roman" pitchFamily="18" charset="0"/>
+                <a:cs typeface="Times New Roman" pitchFamily="18" charset="0"/>
+              </a:rPr>
+              <a:t>создали экземпляр </a:t>
+            </a:r>
+            <a:r>
+              <a:rPr lang="en-US" sz="2000" dirty="0" smtClean="0">
+                <a:latin typeface="Times New Roman" pitchFamily="18" charset="0"/>
+                <a:cs typeface="Times New Roman" pitchFamily="18" charset="0"/>
+              </a:rPr>
+              <a:t>Calculator, </a:t>
+            </a:r>
+            <a:r>
+              <a:rPr lang="ru-RU" sz="2000" dirty="0" smtClean="0">
+                <a:latin typeface="Times New Roman" pitchFamily="18" charset="0"/>
+                <a:cs typeface="Times New Roman" pitchFamily="18" charset="0"/>
+              </a:rPr>
+              <a:t>задали входные числа </a:t>
+            </a:r>
+            <a:r>
+              <a:rPr lang="en-US" sz="2000" dirty="0" smtClean="0">
+                <a:latin typeface="Times New Roman" pitchFamily="18" charset="0"/>
+                <a:cs typeface="Times New Roman" pitchFamily="18" charset="0"/>
+              </a:rPr>
+              <a:t>a </a:t>
+            </a:r>
+            <a:r>
+              <a:rPr lang="ru-RU" sz="2000" dirty="0" smtClean="0">
+                <a:latin typeface="Times New Roman" pitchFamily="18" charset="0"/>
+                <a:cs typeface="Times New Roman" pitchFamily="18" charset="0"/>
+              </a:rPr>
+              <a:t>и </a:t>
+            </a:r>
+            <a:r>
+              <a:rPr lang="en-US" sz="2000" dirty="0" smtClean="0">
+                <a:latin typeface="Times New Roman" pitchFamily="18" charset="0"/>
+                <a:cs typeface="Times New Roman" pitchFamily="18" charset="0"/>
+              </a:rPr>
+              <a:t>b, </a:t>
+            </a:r>
+            <a:r>
+              <a:rPr lang="ru-RU" sz="2000" dirty="0" smtClean="0">
+                <a:latin typeface="Times New Roman" pitchFamily="18" charset="0"/>
+                <a:cs typeface="Times New Roman" pitchFamily="18" charset="0"/>
+              </a:rPr>
+              <a:t>указали ожидаемый результат </a:t>
+            </a:r>
+            <a:r>
+              <a:rPr lang="en-US" sz="2000" dirty="0" smtClean="0">
+                <a:latin typeface="Times New Roman" pitchFamily="18" charset="0"/>
+                <a:cs typeface="Times New Roman" pitchFamily="18" charset="0"/>
+              </a:rPr>
+              <a:t>expected.</a:t>
+            </a:r>
+          </a:p>
+          <a:p>
+            <a:pPr algn="just"/>
+            <a:r>
+              <a:rPr lang="en-US" sz="2000" dirty="0" smtClean="0">
+                <a:latin typeface="Times New Roman" pitchFamily="18" charset="0"/>
+                <a:cs typeface="Times New Roman" pitchFamily="18" charset="0"/>
+              </a:rPr>
+              <a:t>Act: </a:t>
+            </a:r>
+            <a:r>
+              <a:rPr lang="ru-RU" sz="2000" dirty="0" smtClean="0">
+                <a:latin typeface="Times New Roman" pitchFamily="18" charset="0"/>
+                <a:cs typeface="Times New Roman" pitchFamily="18" charset="0"/>
+              </a:rPr>
+              <a:t>вызвали метод </a:t>
+            </a:r>
+            <a:r>
+              <a:rPr lang="en-US" sz="2000" dirty="0" smtClean="0">
+                <a:latin typeface="Times New Roman" pitchFamily="18" charset="0"/>
+                <a:cs typeface="Times New Roman" pitchFamily="18" charset="0"/>
+              </a:rPr>
+              <a:t>Add </a:t>
+            </a:r>
+            <a:r>
+              <a:rPr lang="ru-RU" sz="2000" dirty="0" smtClean="0">
+                <a:latin typeface="Times New Roman" pitchFamily="18" charset="0"/>
+                <a:cs typeface="Times New Roman" pitchFamily="18" charset="0"/>
+              </a:rPr>
+              <a:t>с аргументами </a:t>
+            </a:r>
+            <a:r>
+              <a:rPr lang="en-US" sz="2000" dirty="0" smtClean="0">
+                <a:latin typeface="Times New Roman" pitchFamily="18" charset="0"/>
+                <a:cs typeface="Times New Roman" pitchFamily="18" charset="0"/>
+              </a:rPr>
+              <a:t>a </a:t>
+            </a:r>
+            <a:r>
+              <a:rPr lang="ru-RU" sz="2000" dirty="0" smtClean="0">
+                <a:latin typeface="Times New Roman" pitchFamily="18" charset="0"/>
+                <a:cs typeface="Times New Roman" pitchFamily="18" charset="0"/>
+              </a:rPr>
+              <a:t>и </a:t>
+            </a:r>
+            <a:r>
+              <a:rPr lang="en-US" sz="2000" dirty="0" smtClean="0">
+                <a:latin typeface="Times New Roman" pitchFamily="18" charset="0"/>
+                <a:cs typeface="Times New Roman" pitchFamily="18" charset="0"/>
+              </a:rPr>
+              <a:t>b, </a:t>
+            </a:r>
+            <a:r>
+              <a:rPr lang="ru-RU" sz="2000" dirty="0" smtClean="0">
+                <a:latin typeface="Times New Roman" pitchFamily="18" charset="0"/>
+                <a:cs typeface="Times New Roman" pitchFamily="18" charset="0"/>
+              </a:rPr>
+              <a:t>сохранили результат в переменную </a:t>
+            </a:r>
+            <a:r>
+              <a:rPr lang="en-US" sz="2000" dirty="0" smtClean="0">
+                <a:latin typeface="Times New Roman" pitchFamily="18" charset="0"/>
+                <a:cs typeface="Times New Roman" pitchFamily="18" charset="0"/>
+              </a:rPr>
+              <a:t>result.</a:t>
+            </a:r>
+          </a:p>
+          <a:p>
+            <a:pPr algn="just"/>
+            <a:r>
+              <a:rPr lang="en-US" sz="2000" dirty="0" smtClean="0">
+                <a:latin typeface="Times New Roman" pitchFamily="18" charset="0"/>
+                <a:cs typeface="Times New Roman" pitchFamily="18" charset="0"/>
+              </a:rPr>
+              <a:t>Assert: </a:t>
+            </a:r>
+            <a:r>
+              <a:rPr lang="ru-RU" sz="2000" dirty="0" smtClean="0">
+                <a:latin typeface="Times New Roman" pitchFamily="18" charset="0"/>
+                <a:cs typeface="Times New Roman" pitchFamily="18" charset="0"/>
+              </a:rPr>
+              <a:t>проверили, что </a:t>
+            </a:r>
+            <a:r>
+              <a:rPr lang="en-US" sz="2000" dirty="0" smtClean="0">
+                <a:latin typeface="Times New Roman" pitchFamily="18" charset="0"/>
+                <a:cs typeface="Times New Roman" pitchFamily="18" charset="0"/>
+              </a:rPr>
+              <a:t>result </a:t>
+            </a:r>
+            <a:r>
+              <a:rPr lang="ru-RU" sz="2000" dirty="0" smtClean="0">
+                <a:latin typeface="Times New Roman" pitchFamily="18" charset="0"/>
+                <a:cs typeface="Times New Roman" pitchFamily="18" charset="0"/>
+              </a:rPr>
+              <a:t>равен </a:t>
+            </a:r>
+            <a:r>
+              <a:rPr lang="en-US" sz="2000" dirty="0" smtClean="0">
+                <a:latin typeface="Times New Roman" pitchFamily="18" charset="0"/>
+                <a:cs typeface="Times New Roman" pitchFamily="18" charset="0"/>
+              </a:rPr>
+              <a:t>expected (8 = 8).</a:t>
+            </a:r>
+            <a:endParaRPr lang="ru-RU" sz="2000" dirty="0">
+              <a:latin typeface="Times New Roman" pitchFamily="18" charset="0"/>
+              <a:cs typeface="Times New Roman" pitchFamily="18" charset="0"/>
+            </a:endParaRPr>
+          </a:p>
+        </p:txBody>
+      </p:sp>
+      <p:sp>
+        <p:nvSpPr>
+          <p:cNvPr id="5" name="Прямоугольник 4"/>
           <p:cNvSpPr/>
           <p:nvPr/>
         </p:nvSpPr>
         <p:spPr>
           <a:xfrm>
-            <a:off x="5000628" y="1285860"/>
-            <a:ext cx="4143372" cy="1323439"/>
+            <a:off x="2071670" y="0"/>
+            <a:ext cx="5143536" cy="584775"/>
           </a:xfrm>
           <a:prstGeom prst="rect">
             <a:avLst/>
           </a:prstGeom>
-          <a:solidFill>
-            <a:schemeClr val="bg2"/>
-          </a:solidFill>
-          <a:ln>
-            <a:solidFill>
-              <a:schemeClr val="tx1"/>
-            </a:solidFill>
-          </a:ln>
         </p:spPr>
         <p:txBody>
           <a:bodyPr wrap="square">
@@ -4303,22 +4171,15 @@
           </a:bodyPr>
           <a:lstStyle/>
           <a:p>
-            <a:pPr algn="just"/>
-            <a:r>
-              <a:rPr lang="ru-RU" sz="1600" b="1" dirty="0" err="1" smtClean="0">
-                <a:latin typeface="Times New Roman" pitchFamily="18" charset="0"/>
-                <a:cs typeface="Times New Roman" pitchFamily="18" charset="0"/>
-              </a:rPr>
-              <a:t>Virtual</a:t>
-            </a:r>
-            <a:r>
-              <a:rPr lang="ru-RU" sz="1600" dirty="0" smtClean="0">
-                <a:latin typeface="Times New Roman" pitchFamily="18" charset="0"/>
-                <a:cs typeface="Times New Roman" pitchFamily="18" charset="0"/>
-              </a:rPr>
-              <a:t> в C# — ключевое слово, которым помечают методы и свойства в базовом классе, чтобы сделать их доступными для переопределения. Такие методы и свойства называют виртуальными.</a:t>
-            </a:r>
-            <a:endParaRPr lang="ru-RU" sz="1600" dirty="0">
+            <a:pPr algn="ctr"/>
+            <a:r>
+              <a:rPr lang="ru-RU" sz="3200" b="1" dirty="0" smtClean="0">
+                <a:latin typeface="Times New Roman" pitchFamily="18" charset="0"/>
+                <a:cs typeface="Times New Roman" pitchFamily="18" charset="0"/>
+              </a:rPr>
+              <a:t>Тестирование</a:t>
+            </a:r>
+            <a:endParaRPr lang="ru-RU" sz="3200" b="1" dirty="0">
               <a:latin typeface="Times New Roman" pitchFamily="18" charset="0"/>
               <a:cs typeface="Times New Roman" pitchFamily="18" charset="0"/>
             </a:endParaRPr>
@@ -4327,530 +4188,7 @@
       </p:sp>
       <p:pic>
         <p:nvPicPr>
-          <p:cNvPr id="4" name="Picture 3"/>
-          <p:cNvPicPr>
-            <a:picLocks noChangeAspect="1" noChangeArrowheads="1"/>
-          </p:cNvPicPr>
-          <p:nvPr/>
-        </p:nvPicPr>
-        <p:blipFill>
-          <a:blip r:embed="rId2"/>
-          <a:srcRect/>
-          <a:stretch>
-            <a:fillRect/>
-          </a:stretch>
-        </p:blipFill>
-        <p:spPr bwMode="auto">
-          <a:xfrm>
-            <a:off x="500034" y="1714488"/>
-            <a:ext cx="3738559" cy="3721756"/>
-          </a:xfrm>
-          <a:prstGeom prst="rect">
-            <a:avLst/>
-          </a:prstGeom>
-          <a:noFill/>
-          <a:ln w="9525">
-            <a:noFill/>
-            <a:miter lim="800000"/>
-            <a:headEnd/>
-            <a:tailEnd/>
-          </a:ln>
-          <a:effectLst/>
-        </p:spPr>
-      </p:pic>
-      <p:sp>
-        <p:nvSpPr>
-          <p:cNvPr id="5" name="Прямоугольник 4"/>
-          <p:cNvSpPr/>
-          <p:nvPr/>
-        </p:nvSpPr>
-        <p:spPr>
-          <a:xfrm>
-            <a:off x="857224" y="5429264"/>
-            <a:ext cx="2927212" cy="369332"/>
-          </a:xfrm>
-          <a:prstGeom prst="rect">
-            <a:avLst/>
-          </a:prstGeom>
-        </p:spPr>
-        <p:txBody>
-          <a:bodyPr wrap="none">
-            <a:spAutoFit/>
-          </a:bodyPr>
-          <a:lstStyle/>
-          <a:p>
-            <a:r>
-              <a:rPr lang="ru-RU" b="1" dirty="0" smtClean="0"/>
-              <a:t>Переопределение методов</a:t>
-            </a:r>
-            <a:endParaRPr lang="ru-RU" b="1" dirty="0"/>
-          </a:p>
-        </p:txBody>
-      </p:sp>
-      <p:sp>
-        <p:nvSpPr>
-          <p:cNvPr id="6" name="Прямоугольник 5"/>
-          <p:cNvSpPr/>
-          <p:nvPr/>
-        </p:nvSpPr>
-        <p:spPr>
-          <a:xfrm>
-            <a:off x="5000628" y="3500438"/>
-            <a:ext cx="4143372" cy="1815882"/>
-          </a:xfrm>
-          <a:prstGeom prst="rect">
-            <a:avLst/>
-          </a:prstGeom>
-          <a:solidFill>
-            <a:schemeClr val="bg2"/>
-          </a:solidFill>
-          <a:ln>
-            <a:solidFill>
-              <a:schemeClr val="tx1"/>
-            </a:solidFill>
-          </a:ln>
-        </p:spPr>
-        <p:txBody>
-          <a:bodyPr wrap="square">
-            <a:spAutoFit/>
-          </a:bodyPr>
-          <a:lstStyle/>
-          <a:p>
-            <a:pPr algn="just"/>
-            <a:r>
-              <a:rPr lang="ru-RU" sz="1600" b="1" dirty="0" err="1" smtClean="0">
-                <a:latin typeface="Times New Roman" pitchFamily="18" charset="0"/>
-                <a:cs typeface="Times New Roman" pitchFamily="18" charset="0"/>
-              </a:rPr>
-              <a:t>Override</a:t>
-            </a:r>
-            <a:r>
-              <a:rPr lang="ru-RU" sz="1600" dirty="0" smtClean="0">
-                <a:latin typeface="Times New Roman" pitchFamily="18" charset="0"/>
-                <a:cs typeface="Times New Roman" pitchFamily="18" charset="0"/>
-              </a:rPr>
-              <a:t> — модификатор для переопределения виртуальных методов, свойств и событий базового класса. </a:t>
-            </a:r>
-          </a:p>
-          <a:p>
-            <a:pPr algn="just"/>
-            <a:r>
-              <a:rPr lang="ru-RU" sz="1600" dirty="0" smtClean="0">
-                <a:latin typeface="Times New Roman" pitchFamily="18" charset="0"/>
-                <a:cs typeface="Times New Roman" pitchFamily="18" charset="0"/>
-              </a:rPr>
-              <a:t>Переопределённый метод в классе-наследнике должен иметь тот же набор параметров, что и виртуальный метод в базовом классе.</a:t>
-            </a:r>
-          </a:p>
-        </p:txBody>
-      </p:sp>
-      <p:cxnSp>
-        <p:nvCxnSpPr>
-          <p:cNvPr id="7" name="Прямая со стрелкой 6"/>
-          <p:cNvCxnSpPr>
-            <a:stCxn id="3" idx="1"/>
-          </p:cNvCxnSpPr>
-          <p:nvPr/>
-        </p:nvCxnSpPr>
-        <p:spPr>
-          <a:xfrm rot="10800000" flipV="1">
-            <a:off x="2071670" y="1947580"/>
-            <a:ext cx="2928958" cy="52660"/>
-          </a:xfrm>
-          <a:prstGeom prst="straightConnector1">
-            <a:avLst/>
-          </a:prstGeom>
-          <a:ln w="25400">
-            <a:solidFill>
-              <a:srgbClr val="FF0000"/>
-            </a:solidFill>
-            <a:tailEnd type="arrow"/>
-          </a:ln>
-        </p:spPr>
-        <p:style>
-          <a:lnRef idx="1">
-            <a:schemeClr val="accent1"/>
-          </a:lnRef>
-          <a:fillRef idx="0">
-            <a:schemeClr val="accent1"/>
-          </a:fillRef>
-          <a:effectRef idx="0">
-            <a:schemeClr val="accent1"/>
-          </a:effectRef>
-          <a:fontRef idx="minor">
-            <a:schemeClr val="tx1"/>
-          </a:fontRef>
-        </p:style>
-      </p:cxnSp>
-      <p:cxnSp>
-        <p:nvCxnSpPr>
-          <p:cNvPr id="8" name="Прямая со стрелкой 7"/>
-          <p:cNvCxnSpPr>
-            <a:stCxn id="6" idx="1"/>
-          </p:cNvCxnSpPr>
-          <p:nvPr/>
-        </p:nvCxnSpPr>
-        <p:spPr>
-          <a:xfrm rot="10800000">
-            <a:off x="2143108" y="3500439"/>
-            <a:ext cx="2857520" cy="907941"/>
-          </a:xfrm>
-          <a:prstGeom prst="straightConnector1">
-            <a:avLst/>
-          </a:prstGeom>
-          <a:ln w="25400">
-            <a:solidFill>
-              <a:srgbClr val="FF0000"/>
-            </a:solidFill>
-            <a:tailEnd type="arrow"/>
-          </a:ln>
-        </p:spPr>
-        <p:style>
-          <a:lnRef idx="1">
-            <a:schemeClr val="accent1"/>
-          </a:lnRef>
-          <a:fillRef idx="0">
-            <a:schemeClr val="accent1"/>
-          </a:fillRef>
-          <a:effectRef idx="0">
-            <a:schemeClr val="accent1"/>
-          </a:effectRef>
-          <a:fontRef idx="minor">
-            <a:schemeClr val="tx1"/>
-          </a:fontRef>
-        </p:style>
-      </p:cxnSp>
-    </p:spTree>
-  </p:cSld>
-  <p:clrMapOvr>
-    <a:masterClrMapping/>
-  </p:clrMapOvr>
-</p:sld>
-</file>
-
-<file path=ppt/slides/slide17.xml><?xml version="1.0" encoding="utf-8"?>
-<p:sld xmlns:a="http://schemas.openxmlformats.org/drawingml/2006/main" xmlns:r="http://schemas.openxmlformats.org/officeDocument/2006/relationships" xmlns:p="http://schemas.openxmlformats.org/presentationml/2006/main">
-  <p:cSld>
-    <p:spTree>
-      <p:nvGrpSpPr>
-        <p:cNvPr id="1" name=""/>
-        <p:cNvGrpSpPr/>
-        <p:nvPr/>
-      </p:nvGrpSpPr>
-      <p:grpSpPr>
-        <a:xfrm>
-          <a:off x="0" y="0"/>
-          <a:ext cx="0" cy="0"/>
-          <a:chOff x="0" y="0"/>
-          <a:chExt cx="0" cy="0"/>
-        </a:xfrm>
-      </p:grpSpPr>
-      <p:sp>
-        <p:nvSpPr>
-          <p:cNvPr id="2" name="Прямоугольник 1"/>
-          <p:cNvSpPr/>
-          <p:nvPr/>
-        </p:nvSpPr>
-        <p:spPr>
-          <a:xfrm>
-            <a:off x="0" y="0"/>
-            <a:ext cx="9144000" cy="1477328"/>
-          </a:xfrm>
-          <a:prstGeom prst="rect">
-            <a:avLst/>
-          </a:prstGeom>
-        </p:spPr>
-        <p:txBody>
-          <a:bodyPr wrap="square">
-            <a:spAutoFit/>
-          </a:bodyPr>
-          <a:lstStyle/>
-          <a:p>
-            <a:pPr algn="just"/>
-            <a:r>
-              <a:rPr lang="ru-RU" b="1" dirty="0" smtClean="0">
-                <a:latin typeface="Times New Roman" pitchFamily="18" charset="0"/>
-                <a:cs typeface="Times New Roman" pitchFamily="18" charset="0"/>
-              </a:rPr>
-              <a:t>Абстрактные классы </a:t>
-            </a:r>
-            <a:r>
-              <a:rPr lang="ru-RU" dirty="0" smtClean="0">
-                <a:latin typeface="Times New Roman" pitchFamily="18" charset="0"/>
-                <a:cs typeface="Times New Roman" pitchFamily="18" charset="0"/>
-              </a:rPr>
-              <a:t>- это специальный вид классов с неполной реализацией, который используется в организации иерархий наследования. Разработчик не может создавать объекты таких классов. Их назначение - быть базовыми для каких-либо других классов проекта. Для объявления того, что класс является абстрактным, при объявлении класса перед ключевым словом </a:t>
-            </a:r>
-            <a:r>
-              <a:rPr lang="ru-RU" dirty="0" err="1" smtClean="0">
-                <a:latin typeface="Times New Roman" pitchFamily="18" charset="0"/>
-                <a:cs typeface="Times New Roman" pitchFamily="18" charset="0"/>
-              </a:rPr>
-              <a:t>class</a:t>
-            </a:r>
-            <a:r>
-              <a:rPr lang="ru-RU" dirty="0" smtClean="0">
-                <a:latin typeface="Times New Roman" pitchFamily="18" charset="0"/>
-                <a:cs typeface="Times New Roman" pitchFamily="18" charset="0"/>
-              </a:rPr>
-              <a:t> необходимо поставить </a:t>
-            </a:r>
-            <a:r>
-              <a:rPr lang="ru-RU" dirty="0" err="1" smtClean="0">
-                <a:latin typeface="Times New Roman" pitchFamily="18" charset="0"/>
-                <a:cs typeface="Times New Roman" pitchFamily="18" charset="0"/>
-              </a:rPr>
-              <a:t>abstract</a:t>
-            </a:r>
-            <a:r>
-              <a:rPr lang="ru-RU" dirty="0" smtClean="0">
-                <a:latin typeface="Times New Roman" pitchFamily="18" charset="0"/>
-                <a:cs typeface="Times New Roman" pitchFamily="18" charset="0"/>
-              </a:rPr>
-              <a:t>.</a:t>
-            </a:r>
-            <a:endParaRPr lang="ru-RU" dirty="0">
-              <a:latin typeface="Times New Roman" pitchFamily="18" charset="0"/>
-              <a:cs typeface="Times New Roman" pitchFamily="18" charset="0"/>
-            </a:endParaRPr>
-          </a:p>
-        </p:txBody>
-      </p:sp>
-      <p:pic>
-        <p:nvPicPr>
-          <p:cNvPr id="33794" name="Picture 2"/>
-          <p:cNvPicPr>
-            <a:picLocks noChangeAspect="1" noChangeArrowheads="1"/>
-          </p:cNvPicPr>
-          <p:nvPr/>
-        </p:nvPicPr>
-        <p:blipFill>
-          <a:blip r:embed="rId2"/>
-          <a:srcRect/>
-          <a:stretch>
-            <a:fillRect/>
-          </a:stretch>
-        </p:blipFill>
-        <p:spPr bwMode="auto">
-          <a:xfrm>
-            <a:off x="214282" y="1714488"/>
-            <a:ext cx="3552825" cy="2009775"/>
-          </a:xfrm>
-          <a:prstGeom prst="rect">
-            <a:avLst/>
-          </a:prstGeom>
-          <a:noFill/>
-          <a:ln w="9525">
-            <a:noFill/>
-            <a:miter lim="800000"/>
-            <a:headEnd/>
-            <a:tailEnd/>
-          </a:ln>
-          <a:effectLst/>
-        </p:spPr>
-      </p:pic>
-      <p:sp>
-        <p:nvSpPr>
-          <p:cNvPr id="5" name="Прямоугольник 4"/>
-          <p:cNvSpPr/>
-          <p:nvPr/>
-        </p:nvSpPr>
-        <p:spPr>
-          <a:xfrm>
-            <a:off x="3857620" y="1785926"/>
-            <a:ext cx="5286380" cy="1815882"/>
-          </a:xfrm>
-          <a:prstGeom prst="rect">
-            <a:avLst/>
-          </a:prstGeom>
-        </p:spPr>
-        <p:txBody>
-          <a:bodyPr wrap="square">
-            <a:spAutoFit/>
-          </a:bodyPr>
-          <a:lstStyle/>
-          <a:p>
-            <a:pPr algn="just"/>
-            <a:r>
-              <a:rPr lang="ru-RU" sz="1600" dirty="0" smtClean="0">
-                <a:latin typeface="Times New Roman" pitchFamily="18" charset="0"/>
-                <a:cs typeface="Times New Roman" pitchFamily="18" charset="0"/>
-              </a:rPr>
-              <a:t>абстрактный класс </a:t>
-            </a:r>
-            <a:r>
-              <a:rPr lang="ru-RU" sz="1600" dirty="0" err="1" smtClean="0">
-                <a:latin typeface="Times New Roman" pitchFamily="18" charset="0"/>
-                <a:cs typeface="Times New Roman" pitchFamily="18" charset="0"/>
-              </a:rPr>
-              <a:t>Shape</a:t>
-            </a:r>
-            <a:r>
-              <a:rPr lang="ru-RU" sz="1600" dirty="0" smtClean="0">
-                <a:latin typeface="Times New Roman" pitchFamily="18" charset="0"/>
-                <a:cs typeface="Times New Roman" pitchFamily="18" charset="0"/>
-              </a:rPr>
-              <a:t>, который имеет закрытое свойство, конструктор, и абстрактный метод </a:t>
-            </a:r>
-            <a:r>
-              <a:rPr lang="ru-RU" sz="1600" dirty="0" err="1" smtClean="0">
-                <a:latin typeface="Times New Roman" pitchFamily="18" charset="0"/>
-                <a:cs typeface="Times New Roman" pitchFamily="18" charset="0"/>
-              </a:rPr>
-              <a:t>Square</a:t>
-            </a:r>
-            <a:r>
-              <a:rPr lang="ru-RU" sz="1600" dirty="0" smtClean="0">
-                <a:latin typeface="Times New Roman" pitchFamily="18" charset="0"/>
-                <a:cs typeface="Times New Roman" pitchFamily="18" charset="0"/>
-              </a:rPr>
-              <a:t> для вычисления площади фигуры. Предполагается, что все наследники класса </a:t>
-            </a:r>
-            <a:r>
-              <a:rPr lang="ru-RU" sz="1600" dirty="0" err="1" smtClean="0">
-                <a:latin typeface="Times New Roman" pitchFamily="18" charset="0"/>
-                <a:cs typeface="Times New Roman" pitchFamily="18" charset="0"/>
-              </a:rPr>
-              <a:t>Shape</a:t>
-            </a:r>
-            <a:r>
-              <a:rPr lang="ru-RU" sz="1600" dirty="0" smtClean="0">
-                <a:latin typeface="Times New Roman" pitchFamily="18" charset="0"/>
-                <a:cs typeface="Times New Roman" pitchFamily="18" charset="0"/>
-              </a:rPr>
-              <a:t>, будут эту площадь вычислять в соответствии с определенными правилами. Так как для абстрактной фигуры это сделать невозможно, то и реализации у этого метода нет.</a:t>
-            </a:r>
-            <a:endParaRPr lang="ru-RU" sz="1600" dirty="0">
-              <a:latin typeface="Times New Roman" pitchFamily="18" charset="0"/>
-              <a:cs typeface="Times New Roman" pitchFamily="18" charset="0"/>
-            </a:endParaRPr>
-          </a:p>
-        </p:txBody>
-      </p:sp>
-      <p:pic>
-        <p:nvPicPr>
-          <p:cNvPr id="33796" name="Picture 4"/>
-          <p:cNvPicPr>
-            <a:picLocks noChangeAspect="1" noChangeArrowheads="1"/>
-          </p:cNvPicPr>
-          <p:nvPr/>
-        </p:nvPicPr>
-        <p:blipFill>
-          <a:blip r:embed="rId3"/>
-          <a:srcRect/>
-          <a:stretch>
-            <a:fillRect/>
-          </a:stretch>
-        </p:blipFill>
-        <p:spPr bwMode="auto">
-          <a:xfrm>
-            <a:off x="0" y="3743325"/>
-            <a:ext cx="4429125" cy="3114675"/>
-          </a:xfrm>
-          <a:prstGeom prst="rect">
-            <a:avLst/>
-          </a:prstGeom>
-          <a:noFill/>
-          <a:ln w="9525">
-            <a:noFill/>
-            <a:miter lim="800000"/>
-            <a:headEnd/>
-            <a:tailEnd/>
-          </a:ln>
-          <a:effectLst/>
-        </p:spPr>
-      </p:pic>
-      <p:sp>
-        <p:nvSpPr>
-          <p:cNvPr id="8" name="Прямоугольник 7"/>
-          <p:cNvSpPr/>
-          <p:nvPr/>
-        </p:nvSpPr>
-        <p:spPr>
-          <a:xfrm>
-            <a:off x="4572000" y="3786190"/>
-            <a:ext cx="4572000" cy="1754326"/>
-          </a:xfrm>
-          <a:prstGeom prst="rect">
-            <a:avLst/>
-          </a:prstGeom>
-        </p:spPr>
-        <p:txBody>
-          <a:bodyPr>
-            <a:spAutoFit/>
-          </a:bodyPr>
-          <a:lstStyle/>
-          <a:p>
-            <a:pPr algn="just"/>
-            <a:r>
-              <a:rPr lang="ru-RU" dirty="0" smtClean="0">
-                <a:latin typeface="Times New Roman" pitchFamily="18" charset="0"/>
-                <a:cs typeface="Times New Roman" pitchFamily="18" charset="0"/>
-              </a:rPr>
-              <a:t>Ключевое слово </a:t>
-            </a:r>
-            <a:r>
-              <a:rPr lang="ru-RU" dirty="0" err="1" smtClean="0">
-                <a:latin typeface="Times New Roman" pitchFamily="18" charset="0"/>
-                <a:cs typeface="Times New Roman" pitchFamily="18" charset="0"/>
-              </a:rPr>
-              <a:t>base</a:t>
-            </a:r>
-            <a:r>
-              <a:rPr lang="ru-RU" dirty="0" smtClean="0">
-                <a:latin typeface="Times New Roman" pitchFamily="18" charset="0"/>
-                <a:cs typeface="Times New Roman" pitchFamily="18" charset="0"/>
-              </a:rPr>
-              <a:t> используется для обращения к базовому классу. Оно применяется в случаях, когда необходимо вызвать конструктор базового класса и для обращения к методам базового класса, которые были переопределены в текущем.</a:t>
-            </a:r>
-            <a:endParaRPr lang="ru-RU" dirty="0">
-              <a:latin typeface="Times New Roman" pitchFamily="18" charset="0"/>
-              <a:cs typeface="Times New Roman" pitchFamily="18" charset="0"/>
-            </a:endParaRPr>
-          </a:p>
-        </p:txBody>
-      </p:sp>
-      <p:cxnSp>
-        <p:nvCxnSpPr>
-          <p:cNvPr id="10" name="Прямая со стрелкой 9"/>
-          <p:cNvCxnSpPr>
-            <a:stCxn id="8" idx="1"/>
-          </p:cNvCxnSpPr>
-          <p:nvPr/>
-        </p:nvCxnSpPr>
-        <p:spPr>
-          <a:xfrm rot="10800000" flipV="1">
-            <a:off x="1928794" y="4663352"/>
-            <a:ext cx="2643206" cy="551597"/>
-          </a:xfrm>
-          <a:prstGeom prst="straightConnector1">
-            <a:avLst/>
-          </a:prstGeom>
-          <a:ln w="19050">
-            <a:solidFill>
-              <a:srgbClr val="FF0000"/>
-            </a:solidFill>
-            <a:tailEnd type="arrow"/>
-          </a:ln>
-        </p:spPr>
-        <p:style>
-          <a:lnRef idx="1">
-            <a:schemeClr val="accent1"/>
-          </a:lnRef>
-          <a:fillRef idx="0">
-            <a:schemeClr val="accent1"/>
-          </a:fillRef>
-          <a:effectRef idx="0">
-            <a:schemeClr val="accent1"/>
-          </a:effectRef>
-          <a:fontRef idx="minor">
-            <a:schemeClr val="tx1"/>
-          </a:fontRef>
-        </p:style>
-      </p:cxnSp>
-      <p:pic>
-        <p:nvPicPr>
-          <p:cNvPr id="33798" name="Picture 6"/>
+          <p:cNvPr id="20484" name="Picture 4"/>
           <p:cNvPicPr>
             <a:picLocks noChangeAspect="1" noChangeArrowheads="1"/>
           </p:cNvPicPr>
@@ -4865,8 +4203,8 @@
         </p:blipFill>
         <p:spPr bwMode="auto">
           <a:xfrm>
-            <a:off x="4786314" y="5619750"/>
-            <a:ext cx="4029075" cy="1238250"/>
+            <a:off x="4929190" y="3305175"/>
+            <a:ext cx="3800475" cy="3552825"/>
           </a:xfrm>
           <a:prstGeom prst="rect">
             <a:avLst/>
@@ -4881,372 +4219,6 @@
           <a:effectLst/>
         </p:spPr>
       </p:pic>
-    </p:spTree>
-  </p:cSld>
-  <p:clrMapOvr>
-    <a:masterClrMapping/>
-  </p:clrMapOvr>
-</p:sld>
-</file>
-
-<file path=ppt/slides/slide18.xml><?xml version="1.0" encoding="utf-8"?>
-<p:sld xmlns:a="http://schemas.openxmlformats.org/drawingml/2006/main" xmlns:r="http://schemas.openxmlformats.org/officeDocument/2006/relationships" xmlns:p="http://schemas.openxmlformats.org/presentationml/2006/main">
-  <p:cSld>
-    <p:spTree>
-      <p:nvGrpSpPr>
-        <p:cNvPr id="1" name=""/>
-        <p:cNvGrpSpPr/>
-        <p:nvPr/>
-      </p:nvGrpSpPr>
-      <p:grpSpPr>
-        <a:xfrm>
-          <a:off x="0" y="0"/>
-          <a:ext cx="0" cy="0"/>
-          <a:chOff x="0" y="0"/>
-          <a:chExt cx="0" cy="0"/>
-        </a:xfrm>
-      </p:grpSpPr>
-      <p:sp>
-        <p:nvSpPr>
-          <p:cNvPr id="2" name="Прямоугольник 1"/>
-          <p:cNvSpPr/>
-          <p:nvPr/>
-        </p:nvSpPr>
-        <p:spPr>
-          <a:xfrm>
-            <a:off x="2786050" y="0"/>
-            <a:ext cx="3642472" cy="646331"/>
-          </a:xfrm>
-          <a:prstGeom prst="rect">
-            <a:avLst/>
-          </a:prstGeom>
-        </p:spPr>
-        <p:txBody>
-          <a:bodyPr wrap="none">
-            <a:spAutoFit/>
-          </a:bodyPr>
-          <a:lstStyle/>
-          <a:p>
-            <a:r>
-              <a:rPr lang="ru-RU" sz="3600" b="1" dirty="0" smtClean="0">
-                <a:latin typeface="Times New Roman" pitchFamily="18" charset="0"/>
-                <a:cs typeface="Times New Roman" pitchFamily="18" charset="0"/>
-              </a:rPr>
-              <a:t>ИНТЕРФЕЙСЫ</a:t>
-            </a:r>
-            <a:endParaRPr lang="ru-RU" sz="3600" b="1" dirty="0"/>
-          </a:p>
-        </p:txBody>
-      </p:sp>
-      <p:sp>
-        <p:nvSpPr>
-          <p:cNvPr id="4" name="Прямоугольник 3"/>
-          <p:cNvSpPr/>
-          <p:nvPr/>
-        </p:nvSpPr>
-        <p:spPr>
-          <a:xfrm>
-            <a:off x="0" y="571480"/>
-            <a:ext cx="9144000" cy="646331"/>
-          </a:xfrm>
-          <a:prstGeom prst="rect">
-            <a:avLst/>
-          </a:prstGeom>
-        </p:spPr>
-        <p:txBody>
-          <a:bodyPr wrap="square">
-            <a:spAutoFit/>
-          </a:bodyPr>
-          <a:lstStyle/>
-          <a:p>
-            <a:pPr algn="just"/>
-            <a:r>
-              <a:rPr lang="ru-RU" dirty="0" smtClean="0">
-                <a:latin typeface="Times New Roman" pitchFamily="18" charset="0"/>
-                <a:cs typeface="Times New Roman" pitchFamily="18" charset="0"/>
-              </a:rPr>
-              <a:t>Для объявления интерфейса используется ключевое слово </a:t>
-            </a:r>
-            <a:r>
-              <a:rPr lang="ru-RU" dirty="0" err="1" smtClean="0">
-                <a:latin typeface="Times New Roman" pitchFamily="18" charset="0"/>
-                <a:cs typeface="Times New Roman" pitchFamily="18" charset="0"/>
-              </a:rPr>
-              <a:t>interface</a:t>
-            </a:r>
-            <a:r>
-              <a:rPr lang="ru-RU" dirty="0" smtClean="0">
-                <a:latin typeface="Times New Roman" pitchFamily="18" charset="0"/>
-                <a:cs typeface="Times New Roman" pitchFamily="18" charset="0"/>
-              </a:rPr>
-              <a:t>, после которого следует его имя.</a:t>
-            </a:r>
-            <a:endParaRPr lang="ru-RU" dirty="0">
-              <a:latin typeface="Times New Roman" pitchFamily="18" charset="0"/>
-              <a:cs typeface="Times New Roman" pitchFamily="18" charset="0"/>
-            </a:endParaRPr>
-          </a:p>
-        </p:txBody>
-      </p:sp>
-      <p:pic>
-        <p:nvPicPr>
-          <p:cNvPr id="35842" name="Picture 2"/>
-          <p:cNvPicPr>
-            <a:picLocks noChangeAspect="1" noChangeArrowheads="1"/>
-          </p:cNvPicPr>
-          <p:nvPr/>
-        </p:nvPicPr>
-        <p:blipFill>
-          <a:blip r:embed="rId2"/>
-          <a:srcRect/>
-          <a:stretch>
-            <a:fillRect/>
-          </a:stretch>
-        </p:blipFill>
-        <p:spPr bwMode="auto">
-          <a:xfrm>
-            <a:off x="0" y="1142984"/>
-            <a:ext cx="4238625" cy="2219325"/>
-          </a:xfrm>
-          <a:prstGeom prst="rect">
-            <a:avLst/>
-          </a:prstGeom>
-          <a:noFill/>
-          <a:ln w="9525">
-            <a:noFill/>
-            <a:miter lim="800000"/>
-            <a:headEnd/>
-            <a:tailEnd/>
-          </a:ln>
-          <a:effectLst/>
-        </p:spPr>
-      </p:pic>
-      <p:pic>
-        <p:nvPicPr>
-          <p:cNvPr id="35843" name="Picture 3"/>
-          <p:cNvPicPr>
-            <a:picLocks noChangeAspect="1" noChangeArrowheads="1"/>
-          </p:cNvPicPr>
-          <p:nvPr/>
-        </p:nvPicPr>
-        <p:blipFill>
-          <a:blip r:embed="rId3"/>
-          <a:srcRect/>
-          <a:stretch>
-            <a:fillRect/>
-          </a:stretch>
-        </p:blipFill>
-        <p:spPr bwMode="auto">
-          <a:xfrm>
-            <a:off x="4352925" y="1142984"/>
-            <a:ext cx="4791075" cy="5324475"/>
-          </a:xfrm>
-          <a:prstGeom prst="rect">
-            <a:avLst/>
-          </a:prstGeom>
-          <a:noFill/>
-          <a:ln w="9525">
-            <a:noFill/>
-            <a:miter lim="800000"/>
-            <a:headEnd/>
-            <a:tailEnd/>
-          </a:ln>
-          <a:effectLst/>
-        </p:spPr>
-      </p:pic>
-      <p:pic>
-        <p:nvPicPr>
-          <p:cNvPr id="35846" name="Picture 6"/>
-          <p:cNvPicPr>
-            <a:picLocks noChangeAspect="1" noChangeArrowheads="1"/>
-          </p:cNvPicPr>
-          <p:nvPr/>
-        </p:nvPicPr>
-        <p:blipFill>
-          <a:blip r:embed="rId4"/>
-          <a:srcRect/>
-          <a:stretch>
-            <a:fillRect/>
-          </a:stretch>
-        </p:blipFill>
-        <p:spPr bwMode="auto">
-          <a:xfrm>
-            <a:off x="928662" y="3714752"/>
-            <a:ext cx="1952625" cy="2828925"/>
-          </a:xfrm>
-          <a:prstGeom prst="rect">
-            <a:avLst/>
-          </a:prstGeom>
-          <a:noFill/>
-          <a:ln w="9525">
-            <a:noFill/>
-            <a:miter lim="800000"/>
-            <a:headEnd/>
-            <a:tailEnd/>
-          </a:ln>
-          <a:effectLst/>
-        </p:spPr>
-      </p:pic>
-    </p:spTree>
-  </p:cSld>
-  <p:clrMapOvr>
-    <a:masterClrMapping/>
-  </p:clrMapOvr>
-</p:sld>
-</file>
-
-<file path=ppt/slides/slide19.xml><?xml version="1.0" encoding="utf-8"?>
-<p:sld xmlns:a="http://schemas.openxmlformats.org/drawingml/2006/main" xmlns:r="http://schemas.openxmlformats.org/officeDocument/2006/relationships" xmlns:p="http://schemas.openxmlformats.org/presentationml/2006/main">
-  <p:cSld>
-    <p:spTree>
-      <p:nvGrpSpPr>
-        <p:cNvPr id="1" name=""/>
-        <p:cNvGrpSpPr/>
-        <p:nvPr/>
-      </p:nvGrpSpPr>
-      <p:grpSpPr>
-        <a:xfrm>
-          <a:off x="0" y="0"/>
-          <a:ext cx="0" cy="0"/>
-          <a:chOff x="0" y="0"/>
-          <a:chExt cx="0" cy="0"/>
-        </a:xfrm>
-      </p:grpSpPr>
-      <p:pic>
-        <p:nvPicPr>
-          <p:cNvPr id="39939" name="Picture 3"/>
-          <p:cNvPicPr>
-            <a:picLocks noChangeAspect="1" noChangeArrowheads="1"/>
-          </p:cNvPicPr>
-          <p:nvPr/>
-        </p:nvPicPr>
-        <p:blipFill>
-          <a:blip r:embed="rId2"/>
-          <a:srcRect/>
-          <a:stretch>
-            <a:fillRect/>
-          </a:stretch>
-        </p:blipFill>
-        <p:spPr bwMode="auto">
-          <a:xfrm>
-            <a:off x="1" y="1"/>
-            <a:ext cx="4286247" cy="2928346"/>
-          </a:xfrm>
-          <a:prstGeom prst="rect">
-            <a:avLst/>
-          </a:prstGeom>
-          <a:noFill/>
-          <a:ln w="9525">
-            <a:noFill/>
-            <a:miter lim="800000"/>
-            <a:headEnd/>
-            <a:tailEnd/>
-          </a:ln>
-          <a:effectLst/>
-        </p:spPr>
-      </p:pic>
-      <p:pic>
-        <p:nvPicPr>
-          <p:cNvPr id="39940" name="Picture 4"/>
-          <p:cNvPicPr>
-            <a:picLocks noChangeAspect="1" noChangeArrowheads="1"/>
-          </p:cNvPicPr>
-          <p:nvPr/>
-        </p:nvPicPr>
-        <p:blipFill>
-          <a:blip r:embed="rId3"/>
-          <a:srcRect/>
-          <a:stretch>
-            <a:fillRect/>
-          </a:stretch>
-        </p:blipFill>
-        <p:spPr bwMode="auto">
-          <a:xfrm>
-            <a:off x="3643306" y="2734310"/>
-            <a:ext cx="5500694" cy="4123690"/>
-          </a:xfrm>
-          <a:prstGeom prst="rect">
-            <a:avLst/>
-          </a:prstGeom>
-          <a:noFill/>
-          <a:ln w="9525">
-            <a:noFill/>
-            <a:miter lim="800000"/>
-            <a:headEnd/>
-            <a:tailEnd/>
-          </a:ln>
-          <a:effectLst/>
-        </p:spPr>
-      </p:pic>
-      <p:pic>
-        <p:nvPicPr>
-          <p:cNvPr id="39941" name="Picture 5"/>
-          <p:cNvPicPr>
-            <a:picLocks noChangeAspect="1" noChangeArrowheads="1"/>
-          </p:cNvPicPr>
-          <p:nvPr/>
-        </p:nvPicPr>
-        <p:blipFill>
-          <a:blip r:embed="rId4"/>
-          <a:srcRect/>
-          <a:stretch>
-            <a:fillRect/>
-          </a:stretch>
-        </p:blipFill>
-        <p:spPr bwMode="auto">
-          <a:xfrm>
-            <a:off x="357158" y="3786190"/>
-            <a:ext cx="2993369" cy="2571768"/>
-          </a:xfrm>
-          <a:prstGeom prst="rect">
-            <a:avLst/>
-          </a:prstGeom>
-          <a:noFill/>
-          <a:ln w="9525">
-            <a:noFill/>
-            <a:miter lim="800000"/>
-            <a:headEnd/>
-            <a:tailEnd/>
-          </a:ln>
-          <a:effectLst/>
-        </p:spPr>
-      </p:pic>
-      <p:sp>
-        <p:nvSpPr>
-          <p:cNvPr id="6" name="Прямоугольник 5"/>
-          <p:cNvSpPr/>
-          <p:nvPr/>
-        </p:nvSpPr>
-        <p:spPr>
-          <a:xfrm>
-            <a:off x="4429124" y="714356"/>
-            <a:ext cx="4572000" cy="830997"/>
-          </a:xfrm>
-          <a:prstGeom prst="rect">
-            <a:avLst/>
-          </a:prstGeom>
-        </p:spPr>
-        <p:txBody>
-          <a:bodyPr>
-            <a:spAutoFit/>
-          </a:bodyPr>
-          <a:lstStyle/>
-          <a:p>
-            <a:pPr algn="just"/>
-            <a:r>
-              <a:rPr lang="ru-RU" sz="2400" b="1" dirty="0" smtClean="0">
-                <a:latin typeface="Times New Roman" pitchFamily="18" charset="0"/>
-                <a:cs typeface="Times New Roman" pitchFamily="18" charset="0"/>
-              </a:rPr>
-              <a:t>Практический пример для иллюстрации (краткий)</a:t>
-            </a:r>
-            <a:endParaRPr lang="ru-RU" sz="2400" dirty="0">
-              <a:latin typeface="Times New Roman" pitchFamily="18" charset="0"/>
-              <a:cs typeface="Times New Roman" pitchFamily="18" charset="0"/>
-            </a:endParaRPr>
-          </a:p>
-        </p:txBody>
-      </p:sp>
     </p:spTree>
   </p:cSld>
   <p:clrMapOvr>
@@ -5272,9 +4244,285 @@
           <a:chExt cx="0" cy="0"/>
         </a:xfrm>
       </p:grpSpPr>
+      <p:sp>
+        <p:nvSpPr>
+          <p:cNvPr id="2" name="Прямоугольник 1"/>
+          <p:cNvSpPr/>
+          <p:nvPr/>
+        </p:nvSpPr>
+        <p:spPr>
+          <a:xfrm>
+            <a:off x="0" y="0"/>
+            <a:ext cx="5429256" cy="5755422"/>
+          </a:xfrm>
+          <a:prstGeom prst="rect">
+            <a:avLst/>
+          </a:prstGeom>
+        </p:spPr>
+        <p:txBody>
+          <a:bodyPr wrap="square">
+            <a:spAutoFit/>
+          </a:bodyPr>
+          <a:lstStyle/>
+          <a:p>
+            <a:pPr algn="just"/>
+            <a:r>
+              <a:rPr lang="ru-RU" sz="1600" dirty="0" smtClean="0">
+                <a:latin typeface="Times New Roman" pitchFamily="18" charset="0"/>
+                <a:cs typeface="Times New Roman" pitchFamily="18" charset="0"/>
+              </a:rPr>
+              <a:t>ASP.NET расширяет платформу .NET инструментами и библиотеками, специально предназначенными для создания </a:t>
+            </a:r>
+            <a:r>
+              <a:rPr lang="ru-RU" sz="1600" dirty="0" err="1" smtClean="0">
+                <a:latin typeface="Times New Roman" pitchFamily="18" charset="0"/>
+                <a:cs typeface="Times New Roman" pitchFamily="18" charset="0"/>
+              </a:rPr>
+              <a:t>веб-приложений</a:t>
+            </a:r>
+            <a:r>
+              <a:rPr lang="ru-RU" sz="1600" dirty="0" smtClean="0">
+                <a:latin typeface="Times New Roman" pitchFamily="18" charset="0"/>
+                <a:cs typeface="Times New Roman" pitchFamily="18" charset="0"/>
+              </a:rPr>
+              <a:t>.</a:t>
+            </a:r>
+          </a:p>
+          <a:p>
+            <a:pPr algn="just"/>
+            <a:endParaRPr lang="ru-RU" sz="1600" dirty="0" smtClean="0">
+              <a:latin typeface="Times New Roman" pitchFamily="18" charset="0"/>
+              <a:cs typeface="Times New Roman" pitchFamily="18" charset="0"/>
+            </a:endParaRPr>
+          </a:p>
+          <a:p>
+            <a:pPr algn="just"/>
+            <a:r>
+              <a:rPr lang="ru-RU" sz="1600" dirty="0" smtClean="0">
+                <a:latin typeface="Times New Roman" pitchFamily="18" charset="0"/>
+                <a:cs typeface="Times New Roman" pitchFamily="18" charset="0"/>
+              </a:rPr>
+              <a:t>Вот некоторые вещи, которые ASP.NET добавляет к платформе .NET:</a:t>
+            </a:r>
+          </a:p>
+          <a:p>
+            <a:pPr algn="just"/>
+            <a:endParaRPr lang="ru-RU" sz="1600" dirty="0" smtClean="0">
+              <a:latin typeface="Times New Roman" pitchFamily="18" charset="0"/>
+              <a:cs typeface="Times New Roman" pitchFamily="18" charset="0"/>
+            </a:endParaRPr>
+          </a:p>
+          <a:p>
+            <a:pPr algn="just"/>
+            <a:r>
+              <a:rPr lang="ru-RU" sz="1600" dirty="0" smtClean="0">
+                <a:latin typeface="Times New Roman" pitchFamily="18" charset="0"/>
+                <a:cs typeface="Times New Roman" pitchFamily="18" charset="0"/>
+              </a:rPr>
+              <a:t>    Базовая структура для обработки </a:t>
+            </a:r>
+            <a:r>
+              <a:rPr lang="ru-RU" sz="1600" dirty="0" err="1" smtClean="0">
+                <a:latin typeface="Times New Roman" pitchFamily="18" charset="0"/>
+                <a:cs typeface="Times New Roman" pitchFamily="18" charset="0"/>
+              </a:rPr>
+              <a:t>веб-запросов</a:t>
+            </a:r>
+            <a:r>
+              <a:rPr lang="ru-RU" sz="1600" dirty="0" smtClean="0">
+                <a:latin typeface="Times New Roman" pitchFamily="18" charset="0"/>
+                <a:cs typeface="Times New Roman" pitchFamily="18" charset="0"/>
+              </a:rPr>
+              <a:t> на C# или F#.</a:t>
+            </a:r>
+          </a:p>
+          <a:p>
+            <a:pPr algn="just">
+              <a:buFont typeface="Arial" pitchFamily="34" charset="0"/>
+              <a:buChar char="•"/>
+            </a:pPr>
+            <a:r>
+              <a:rPr lang="ru-RU" sz="1600" dirty="0" smtClean="0">
+                <a:latin typeface="Times New Roman" pitchFamily="18" charset="0"/>
+                <a:cs typeface="Times New Roman" pitchFamily="18" charset="0"/>
+              </a:rPr>
+              <a:t>    Синтаксис шаблонов </a:t>
+            </a:r>
+            <a:r>
+              <a:rPr lang="ru-RU" sz="1600" dirty="0" err="1" smtClean="0">
+                <a:latin typeface="Times New Roman" pitchFamily="18" charset="0"/>
+                <a:cs typeface="Times New Roman" pitchFamily="18" charset="0"/>
+              </a:rPr>
+              <a:t>веб-страниц</a:t>
+            </a:r>
+            <a:r>
+              <a:rPr lang="ru-RU" sz="1600" dirty="0" smtClean="0">
+                <a:latin typeface="Times New Roman" pitchFamily="18" charset="0"/>
+                <a:cs typeface="Times New Roman" pitchFamily="18" charset="0"/>
+              </a:rPr>
+              <a:t>, известный как </a:t>
+            </a:r>
+            <a:r>
+              <a:rPr lang="ru-RU" sz="1600" dirty="0" err="1" smtClean="0">
+                <a:latin typeface="Times New Roman" pitchFamily="18" charset="0"/>
+                <a:cs typeface="Times New Roman" pitchFamily="18" charset="0"/>
+              </a:rPr>
+              <a:t>Razor</a:t>
+            </a:r>
+            <a:r>
+              <a:rPr lang="ru-RU" sz="1600" dirty="0" smtClean="0">
+                <a:latin typeface="Times New Roman" pitchFamily="18" charset="0"/>
+                <a:cs typeface="Times New Roman" pitchFamily="18" charset="0"/>
+              </a:rPr>
+              <a:t>, для создания динамических </a:t>
+            </a:r>
+            <a:r>
+              <a:rPr lang="ru-RU" sz="1600" dirty="0" err="1" smtClean="0">
+                <a:latin typeface="Times New Roman" pitchFamily="18" charset="0"/>
+                <a:cs typeface="Times New Roman" pitchFamily="18" charset="0"/>
+              </a:rPr>
+              <a:t>веб-страниц</a:t>
+            </a:r>
+            <a:r>
+              <a:rPr lang="ru-RU" sz="1600" dirty="0" smtClean="0">
+                <a:latin typeface="Times New Roman" pitchFamily="18" charset="0"/>
+                <a:cs typeface="Times New Roman" pitchFamily="18" charset="0"/>
+              </a:rPr>
+              <a:t> с использованием C#</a:t>
+            </a:r>
+          </a:p>
+          <a:p>
+            <a:pPr algn="just">
+              <a:buFont typeface="Arial" pitchFamily="34" charset="0"/>
+              <a:buChar char="•"/>
+            </a:pPr>
+            <a:r>
+              <a:rPr lang="ru-RU" sz="1600" dirty="0" smtClean="0">
+                <a:latin typeface="Times New Roman" pitchFamily="18" charset="0"/>
+                <a:cs typeface="Times New Roman" pitchFamily="18" charset="0"/>
+              </a:rPr>
+              <a:t>    Библиотеки для распространенных </a:t>
+            </a:r>
+            <a:r>
+              <a:rPr lang="ru-RU" sz="1600" dirty="0" err="1" smtClean="0">
+                <a:latin typeface="Times New Roman" pitchFamily="18" charset="0"/>
+                <a:cs typeface="Times New Roman" pitchFamily="18" charset="0"/>
+              </a:rPr>
+              <a:t>веб-шаблонов</a:t>
+            </a:r>
+            <a:r>
+              <a:rPr lang="ru-RU" sz="1600" dirty="0" smtClean="0">
+                <a:latin typeface="Times New Roman" pitchFamily="18" charset="0"/>
+                <a:cs typeface="Times New Roman" pitchFamily="18" charset="0"/>
+              </a:rPr>
+              <a:t>, например </a:t>
+            </a:r>
+            <a:r>
+              <a:rPr lang="ru-RU" sz="1600" dirty="0" err="1" smtClean="0">
+                <a:latin typeface="Times New Roman" pitchFamily="18" charset="0"/>
+                <a:cs typeface="Times New Roman" pitchFamily="18" charset="0"/>
+              </a:rPr>
+              <a:t>Model</a:t>
+            </a:r>
+            <a:r>
+              <a:rPr lang="ru-RU" sz="1600" dirty="0" smtClean="0">
+                <a:latin typeface="Times New Roman" pitchFamily="18" charset="0"/>
+                <a:cs typeface="Times New Roman" pitchFamily="18" charset="0"/>
+              </a:rPr>
+              <a:t> </a:t>
+            </a:r>
+            <a:r>
+              <a:rPr lang="ru-RU" sz="1600" dirty="0" err="1" smtClean="0">
+                <a:latin typeface="Times New Roman" pitchFamily="18" charset="0"/>
+                <a:cs typeface="Times New Roman" pitchFamily="18" charset="0"/>
+              </a:rPr>
+              <a:t>View</a:t>
+            </a:r>
+            <a:r>
+              <a:rPr lang="ru-RU" sz="1600" dirty="0" smtClean="0">
+                <a:latin typeface="Times New Roman" pitchFamily="18" charset="0"/>
+                <a:cs typeface="Times New Roman" pitchFamily="18" charset="0"/>
+              </a:rPr>
+              <a:t> </a:t>
+            </a:r>
+            <a:r>
+              <a:rPr lang="ru-RU" sz="1600" dirty="0" err="1" smtClean="0">
+                <a:latin typeface="Times New Roman" pitchFamily="18" charset="0"/>
+                <a:cs typeface="Times New Roman" pitchFamily="18" charset="0"/>
+              </a:rPr>
+              <a:t>Controller</a:t>
+            </a:r>
+            <a:r>
+              <a:rPr lang="ru-RU" sz="1600" dirty="0" smtClean="0">
+                <a:latin typeface="Times New Roman" pitchFamily="18" charset="0"/>
+                <a:cs typeface="Times New Roman" pitchFamily="18" charset="0"/>
+              </a:rPr>
+              <a:t> (модель — представление — контроллер)</a:t>
+            </a:r>
+          </a:p>
+          <a:p>
+            <a:pPr algn="just">
+              <a:buFont typeface="Arial" pitchFamily="34" charset="0"/>
+              <a:buChar char="•"/>
+            </a:pPr>
+            <a:r>
+              <a:rPr lang="ru-RU" sz="1600" dirty="0" smtClean="0">
+                <a:latin typeface="Times New Roman" pitchFamily="18" charset="0"/>
+                <a:cs typeface="Times New Roman" pitchFamily="18" charset="0"/>
+              </a:rPr>
+              <a:t>    Система проверки подлинности, включающая библиотеки, базу данных и страницы шаблонов для обработки входов в систему, включая многофакторную проверку подлинности и внешнюю проверку подлинности с помощью </a:t>
+            </a:r>
+            <a:r>
+              <a:rPr lang="ru-RU" sz="1600" dirty="0" err="1" smtClean="0">
+                <a:latin typeface="Times New Roman" pitchFamily="18" charset="0"/>
+                <a:cs typeface="Times New Roman" pitchFamily="18" charset="0"/>
+              </a:rPr>
+              <a:t>Google</a:t>
+            </a:r>
+            <a:r>
+              <a:rPr lang="ru-RU" sz="1600" dirty="0" smtClean="0">
+                <a:latin typeface="Times New Roman" pitchFamily="18" charset="0"/>
+                <a:cs typeface="Times New Roman" pitchFamily="18" charset="0"/>
+              </a:rPr>
+              <a:t>, X и т. д.</a:t>
+            </a:r>
+          </a:p>
+          <a:p>
+            <a:pPr algn="just">
+              <a:buFont typeface="Arial" pitchFamily="34" charset="0"/>
+              <a:buChar char="•"/>
+            </a:pPr>
+            <a:r>
+              <a:rPr lang="ru-RU" sz="1600" dirty="0" smtClean="0">
+                <a:latin typeface="Times New Roman" pitchFamily="18" charset="0"/>
+                <a:cs typeface="Times New Roman" pitchFamily="18" charset="0"/>
+              </a:rPr>
+              <a:t>    Расширения редактора, обеспечивающие подсветку синтаксиса, завершение кода и другие функции, специально предназначенные для разработки </a:t>
+            </a:r>
+            <a:r>
+              <a:rPr lang="ru-RU" sz="1600" dirty="0" err="1" smtClean="0">
+                <a:latin typeface="Times New Roman" pitchFamily="18" charset="0"/>
+                <a:cs typeface="Times New Roman" pitchFamily="18" charset="0"/>
+              </a:rPr>
+              <a:t>веб-страниц</a:t>
+            </a:r>
+            <a:r>
+              <a:rPr lang="ru-RU" sz="1600" dirty="0" smtClean="0">
+                <a:latin typeface="Times New Roman" pitchFamily="18" charset="0"/>
+                <a:cs typeface="Times New Roman" pitchFamily="18" charset="0"/>
+              </a:rPr>
+              <a:t>.</a:t>
+            </a:r>
+            <a:endParaRPr lang="ru-RU" sz="1600" dirty="0">
+              <a:latin typeface="Times New Roman" pitchFamily="18" charset="0"/>
+              <a:cs typeface="Times New Roman" pitchFamily="18" charset="0"/>
+            </a:endParaRPr>
+          </a:p>
+        </p:txBody>
+      </p:sp>
       <p:pic>
         <p:nvPicPr>
-          <p:cNvPr id="1026" name="Picture 2" descr="https://ucarecdn.stepik.net/97b172aa-9da4-4b37-b3b5-3db999351974/"/>
+          <p:cNvPr id="1026" name="Picture 2" descr="https://ucarecdn.stepik.net/5ef73d84-0a5d-44c3-b576-1ca640fd4dfe/"/>
           <p:cNvPicPr>
             <a:picLocks noChangeAspect="1" noChangeArrowheads="1"/>
           </p:cNvPicPr>
@@ -5289,8 +4537,8 @@
         </p:blipFill>
         <p:spPr bwMode="auto">
           <a:xfrm>
-            <a:off x="1428728" y="0"/>
-            <a:ext cx="6257925" cy="3028950"/>
+            <a:off x="5648325" y="0"/>
+            <a:ext cx="3495675" cy="4781551"/>
           </a:xfrm>
           <a:prstGeom prst="rect">
             <a:avLst/>
@@ -5300,221 +4548,7 @@
       </p:pic>
       <p:pic>
         <p:nvPicPr>
-          <p:cNvPr id="1028" name="Picture 4"/>
-          <p:cNvPicPr>
-            <a:picLocks noChangeAspect="1" noChangeArrowheads="1"/>
-          </p:cNvPicPr>
-          <p:nvPr/>
-        </p:nvPicPr>
-        <p:blipFill>
-          <a:blip r:embed="rId3"/>
-          <a:srcRect l="4128"/>
-          <a:stretch>
-            <a:fillRect/>
-          </a:stretch>
-        </p:blipFill>
-        <p:spPr bwMode="auto">
-          <a:xfrm>
-            <a:off x="0" y="3267075"/>
-            <a:ext cx="4976843" cy="3590925"/>
-          </a:xfrm>
-          <a:prstGeom prst="rect">
-            <a:avLst/>
-          </a:prstGeom>
-          <a:noFill/>
-          <a:ln w="9525">
-            <a:noFill/>
-            <a:miter lim="800000"/>
-            <a:headEnd/>
-            <a:tailEnd/>
-          </a:ln>
-          <a:effectLst/>
-        </p:spPr>
-      </p:pic>
-      <p:pic>
-        <p:nvPicPr>
-          <p:cNvPr id="1029" name="Picture 5"/>
-          <p:cNvPicPr>
-            <a:picLocks noChangeAspect="1" noChangeArrowheads="1"/>
-          </p:cNvPicPr>
-          <p:nvPr/>
-        </p:nvPicPr>
-        <p:blipFill>
-          <a:blip r:embed="rId4"/>
-          <a:srcRect l="5357"/>
-          <a:stretch>
-            <a:fillRect/>
-          </a:stretch>
-        </p:blipFill>
-        <p:spPr bwMode="auto">
-          <a:xfrm>
-            <a:off x="5072066" y="4286256"/>
-            <a:ext cx="4071934" cy="600075"/>
-          </a:xfrm>
-          <a:prstGeom prst="rect">
-            <a:avLst/>
-          </a:prstGeom>
-          <a:noFill/>
-          <a:ln w="9525">
-            <a:noFill/>
-            <a:miter lim="800000"/>
-            <a:headEnd/>
-            <a:tailEnd/>
-          </a:ln>
-          <a:effectLst/>
-        </p:spPr>
-      </p:pic>
-    </p:spTree>
-  </p:cSld>
-  <p:clrMapOvr>
-    <a:masterClrMapping/>
-  </p:clrMapOvr>
-</p:sld>
-</file>
-
-<file path=ppt/slides/slide20.xml><?xml version="1.0" encoding="utf-8"?>
-<p:sld xmlns:a="http://schemas.openxmlformats.org/drawingml/2006/main" xmlns:r="http://schemas.openxmlformats.org/officeDocument/2006/relationships" xmlns:p="http://schemas.openxmlformats.org/presentationml/2006/main">
-  <p:cSld>
-    <p:spTree>
-      <p:nvGrpSpPr>
-        <p:cNvPr id="1" name=""/>
-        <p:cNvGrpSpPr/>
-        <p:nvPr/>
-      </p:nvGrpSpPr>
-      <p:grpSpPr>
-        <a:xfrm>
-          <a:off x="0" y="0"/>
-          <a:ext cx="0" cy="0"/>
-          <a:chOff x="0" y="0"/>
-          <a:chExt cx="0" cy="0"/>
-        </a:xfrm>
-      </p:grpSpPr>
-      <p:pic>
-        <p:nvPicPr>
-          <p:cNvPr id="36866" name="Picture 2"/>
-          <p:cNvPicPr>
-            <a:picLocks noChangeAspect="1" noChangeArrowheads="1"/>
-          </p:cNvPicPr>
-          <p:nvPr/>
-        </p:nvPicPr>
-        <p:blipFill>
-          <a:blip r:embed="rId2"/>
-          <a:srcRect/>
-          <a:stretch>
-            <a:fillRect/>
-          </a:stretch>
-        </p:blipFill>
-        <p:spPr bwMode="auto">
-          <a:xfrm>
-            <a:off x="357158" y="928670"/>
-            <a:ext cx="8191515" cy="5605494"/>
-          </a:xfrm>
-          <a:prstGeom prst="rect">
-            <a:avLst/>
-          </a:prstGeom>
-          <a:noFill/>
-          <a:ln w="9525">
-            <a:noFill/>
-            <a:miter lim="800000"/>
-            <a:headEnd/>
-            <a:tailEnd/>
-          </a:ln>
-          <a:effectLst/>
-        </p:spPr>
-      </p:pic>
-      <p:sp>
-        <p:nvSpPr>
-          <p:cNvPr id="3" name="Прямоугольник 2"/>
-          <p:cNvSpPr/>
-          <p:nvPr/>
-        </p:nvSpPr>
-        <p:spPr>
-          <a:xfrm>
-            <a:off x="1071538" y="0"/>
-            <a:ext cx="6754157" cy="646331"/>
-          </a:xfrm>
-          <a:prstGeom prst="rect">
-            <a:avLst/>
-          </a:prstGeom>
-        </p:spPr>
-        <p:txBody>
-          <a:bodyPr wrap="none">
-            <a:spAutoFit/>
-          </a:bodyPr>
-          <a:lstStyle/>
-          <a:p>
-            <a:r>
-              <a:rPr lang="ru-RU" sz="3600" b="1" dirty="0" smtClean="0">
-                <a:latin typeface="Times New Roman" pitchFamily="18" charset="0"/>
-                <a:cs typeface="Times New Roman" pitchFamily="18" charset="0"/>
-              </a:rPr>
-              <a:t>ОБРАБОТКА ИСКЛЮЧЕНИЙ</a:t>
-            </a:r>
-            <a:endParaRPr lang="ru-RU" sz="3600" b="1" dirty="0"/>
-          </a:p>
-        </p:txBody>
-      </p:sp>
-    </p:spTree>
-  </p:cSld>
-  <p:clrMapOvr>
-    <a:masterClrMapping/>
-  </p:clrMapOvr>
-</p:sld>
-</file>
-
-<file path=ppt/slides/slide21.xml><?xml version="1.0" encoding="utf-8"?>
-<p:sld xmlns:a="http://schemas.openxmlformats.org/drawingml/2006/main" xmlns:r="http://schemas.openxmlformats.org/officeDocument/2006/relationships" xmlns:p="http://schemas.openxmlformats.org/presentationml/2006/main">
-  <p:cSld>
-    <p:spTree>
-      <p:nvGrpSpPr>
-        <p:cNvPr id="1" name=""/>
-        <p:cNvGrpSpPr/>
-        <p:nvPr/>
-      </p:nvGrpSpPr>
-      <p:grpSpPr>
-        <a:xfrm>
-          <a:off x="0" y="0"/>
-          <a:ext cx="0" cy="0"/>
-          <a:chOff x="0" y="0"/>
-          <a:chExt cx="0" cy="0"/>
-        </a:xfrm>
-      </p:grpSpPr>
-      <p:pic>
-        <p:nvPicPr>
-          <p:cNvPr id="37890" name="Picture 2"/>
-          <p:cNvPicPr>
-            <a:picLocks noChangeAspect="1" noChangeArrowheads="1"/>
-          </p:cNvPicPr>
-          <p:nvPr/>
-        </p:nvPicPr>
-        <p:blipFill>
-          <a:blip r:embed="rId2"/>
-          <a:srcRect/>
-          <a:stretch>
-            <a:fillRect/>
-          </a:stretch>
-        </p:blipFill>
-        <p:spPr bwMode="auto">
-          <a:xfrm>
-            <a:off x="0" y="1"/>
-            <a:ext cx="6143625" cy="3571876"/>
-          </a:xfrm>
-          <a:prstGeom prst="rect">
-            <a:avLst/>
-          </a:prstGeom>
-          <a:noFill/>
-          <a:ln w="9525">
-            <a:noFill/>
-            <a:miter lim="800000"/>
-            <a:headEnd/>
-            <a:tailEnd/>
-          </a:ln>
-          <a:effectLst/>
-        </p:spPr>
-      </p:pic>
-      <p:pic>
-        <p:nvPicPr>
-          <p:cNvPr id="37891" name="Picture 3"/>
+          <p:cNvPr id="1028" name="Picture 4" descr="https://ucarecdn.stepik.net/6a1090f1-2d06-4dee-bd54-e1af47656d08/"/>
           <p:cNvPicPr>
             <a:picLocks noChangeAspect="1" noChangeArrowheads="1"/>
           </p:cNvPicPr>
@@ -5529,133 +4563,29 @@
         </p:blipFill>
         <p:spPr bwMode="auto">
           <a:xfrm>
-            <a:off x="4410075" y="0"/>
-            <a:ext cx="4733925" cy="1800225"/>
+            <a:off x="5505450" y="4591049"/>
+            <a:ext cx="3638550" cy="2266951"/>
           </a:xfrm>
           <a:prstGeom prst="rect">
             <a:avLst/>
           </a:prstGeom>
           <a:noFill/>
-          <a:ln w="9525">
-            <a:noFill/>
-            <a:miter lim="800000"/>
-            <a:headEnd/>
-            <a:tailEnd/>
-          </a:ln>
-          <a:effectLst/>
         </p:spPr>
       </p:pic>
-      <p:pic>
-        <p:nvPicPr>
-          <p:cNvPr id="37892" name="Picture 4"/>
-          <p:cNvPicPr>
-            <a:picLocks noChangeAspect="1" noChangeArrowheads="1"/>
-          </p:cNvPicPr>
+      <p:sp>
+        <p:nvSpPr>
+          <p:cNvPr id="5" name="Прямоугольник 4"/>
+          <p:cNvSpPr/>
           <p:nvPr/>
-        </p:nvPicPr>
-        <p:blipFill>
-          <a:blip r:embed="rId4"/>
-          <a:srcRect/>
-          <a:stretch>
-            <a:fillRect/>
-          </a:stretch>
-        </p:blipFill>
-        <p:spPr bwMode="auto">
-          <a:xfrm>
-            <a:off x="0" y="3609975"/>
-            <a:ext cx="7486650" cy="3248025"/>
+        </p:nvSpPr>
+        <p:spPr>
+          <a:xfrm>
+            <a:off x="0" y="6000768"/>
+            <a:ext cx="5429256" cy="646331"/>
           </a:xfrm>
           <a:prstGeom prst="rect">
             <a:avLst/>
           </a:prstGeom>
-          <a:noFill/>
-          <a:ln w="9525">
-            <a:noFill/>
-            <a:miter lim="800000"/>
-            <a:headEnd/>
-            <a:tailEnd/>
-          </a:ln>
-          <a:effectLst/>
-        </p:spPr>
-      </p:pic>
-      <p:pic>
-        <p:nvPicPr>
-          <p:cNvPr id="37893" name="Picture 5"/>
-          <p:cNvPicPr>
-            <a:picLocks noChangeAspect="1" noChangeArrowheads="1"/>
-          </p:cNvPicPr>
-          <p:nvPr/>
-        </p:nvPicPr>
-        <p:blipFill>
-          <a:blip r:embed="rId5"/>
-          <a:srcRect/>
-          <a:stretch>
-            <a:fillRect/>
-          </a:stretch>
-        </p:blipFill>
-        <p:spPr bwMode="auto">
-          <a:xfrm>
-            <a:off x="5715008" y="3500438"/>
-            <a:ext cx="3428992" cy="2411511"/>
-          </a:xfrm>
-          <a:prstGeom prst="rect">
-            <a:avLst/>
-          </a:prstGeom>
-          <a:noFill/>
-          <a:ln w="9525">
-            <a:noFill/>
-            <a:miter lim="800000"/>
-            <a:headEnd/>
-            <a:tailEnd/>
-          </a:ln>
-          <a:effectLst/>
-        </p:spPr>
-      </p:pic>
-    </p:spTree>
-  </p:cSld>
-  <p:clrMapOvr>
-    <a:masterClrMapping/>
-  </p:clrMapOvr>
-</p:sld>
-</file>
-
-<file path=ppt/slides/slide22.xml><?xml version="1.0" encoding="utf-8"?>
-<p:sld xmlns:a="http://schemas.openxmlformats.org/drawingml/2006/main" xmlns:r="http://schemas.openxmlformats.org/officeDocument/2006/relationships" xmlns:p="http://schemas.openxmlformats.org/presentationml/2006/main">
-  <p:cSld>
-    <p:spTree>
-      <p:nvGrpSpPr>
-        <p:cNvPr id="1" name=""/>
-        <p:cNvGrpSpPr/>
-        <p:nvPr/>
-      </p:nvGrpSpPr>
-      <p:grpSpPr>
-        <a:xfrm>
-          <a:off x="0" y="0"/>
-          <a:ext cx="0" cy="0"/>
-          <a:chOff x="0" y="0"/>
-          <a:chExt cx="0" cy="0"/>
-        </a:xfrm>
-      </p:grpSpPr>
-      <p:sp>
-        <p:nvSpPr>
-          <p:cNvPr id="3" name="Прямоугольник 2"/>
-          <p:cNvSpPr/>
-          <p:nvPr/>
-        </p:nvSpPr>
-        <p:spPr>
-          <a:xfrm>
-            <a:off x="0" y="2887682"/>
-            <a:ext cx="9144000" cy="3970318"/>
-          </a:xfrm>
-          <a:prstGeom prst="rect">
-            <a:avLst/>
-          </a:prstGeom>
-          <a:solidFill>
-            <a:schemeClr val="accent3">
-              <a:lumMod val="20000"/>
-              <a:lumOff val="80000"/>
-            </a:schemeClr>
-          </a:solidFill>
         </p:spPr>
         <p:txBody>
           <a:bodyPr wrap="square">
@@ -5663,619 +4593,16 @@
           </a:bodyPr>
           <a:lstStyle/>
           <a:p>
-            <a:pPr algn="just"/>
-            <a:r>
-              <a:rPr lang="ru-RU" sz="1400" b="1" dirty="0" smtClean="0">
-                <a:latin typeface="Courier New" pitchFamily="49" charset="0"/>
-                <a:cs typeface="Courier New" pitchFamily="49" charset="0"/>
-              </a:rPr>
-              <a:t>Задан интерфейс </a:t>
-            </a:r>
-            <a:r>
-              <a:rPr lang="en-US" sz="1400" b="1" dirty="0" err="1" smtClean="0">
-                <a:latin typeface="Courier New" pitchFamily="49" charset="0"/>
-                <a:cs typeface="Courier New" pitchFamily="49" charset="0"/>
-              </a:rPr>
-              <a:t>IDrawable</a:t>
-            </a:r>
-            <a:r>
-              <a:rPr lang="en-US" sz="1400" b="1" dirty="0" smtClean="0">
-                <a:latin typeface="Courier New" pitchFamily="49" charset="0"/>
-                <a:cs typeface="Courier New" pitchFamily="49" charset="0"/>
-              </a:rPr>
-              <a:t> </a:t>
-            </a:r>
-            <a:r>
-              <a:rPr lang="ru-RU" sz="1400" b="1" dirty="0" smtClean="0">
-                <a:latin typeface="Courier New" pitchFamily="49" charset="0"/>
-                <a:cs typeface="Courier New" pitchFamily="49" charset="0"/>
-              </a:rPr>
-              <a:t>следующего вида:</a:t>
-            </a:r>
-          </a:p>
-          <a:p>
-            <a:pPr algn="just"/>
-            <a:r>
-              <a:rPr lang="en-US" sz="1400" dirty="0" smtClean="0">
-                <a:latin typeface="Courier New" pitchFamily="49" charset="0"/>
-                <a:cs typeface="Courier New" pitchFamily="49" charset="0"/>
-              </a:rPr>
-              <a:t>interface </a:t>
-            </a:r>
-            <a:r>
-              <a:rPr lang="en-US" sz="1400" dirty="0" err="1" smtClean="0">
-                <a:latin typeface="Courier New" pitchFamily="49" charset="0"/>
-                <a:cs typeface="Courier New" pitchFamily="49" charset="0"/>
-              </a:rPr>
-              <a:t>IDrawable</a:t>
-            </a:r>
-            <a:endParaRPr lang="en-US" sz="1400" dirty="0" smtClean="0">
-              <a:latin typeface="Courier New" pitchFamily="49" charset="0"/>
-              <a:cs typeface="Courier New" pitchFamily="49" charset="0"/>
-            </a:endParaRPr>
-          </a:p>
-          <a:p>
-            <a:pPr algn="just"/>
-            <a:r>
-              <a:rPr lang="en-US" sz="1400" dirty="0" smtClean="0">
-                <a:latin typeface="Courier New" pitchFamily="49" charset="0"/>
-                <a:cs typeface="Courier New" pitchFamily="49" charset="0"/>
-              </a:rPr>
-              <a:t>{</a:t>
-            </a:r>
-          </a:p>
-          <a:p>
-            <a:pPr algn="just"/>
-            <a:r>
-              <a:rPr lang="en-US" sz="1400" dirty="0" smtClean="0">
-                <a:latin typeface="Courier New" pitchFamily="49" charset="0"/>
-                <a:cs typeface="Courier New" pitchFamily="49" charset="0"/>
-              </a:rPr>
-              <a:t>    void Draw();</a:t>
-            </a:r>
-          </a:p>
-          <a:p>
-            <a:pPr algn="just"/>
-            <a:r>
-              <a:rPr lang="en-US" sz="1400" dirty="0" smtClean="0">
-                <a:latin typeface="Courier New" pitchFamily="49" charset="0"/>
-                <a:cs typeface="Courier New" pitchFamily="49" charset="0"/>
-              </a:rPr>
-              <a:t>}</a:t>
-            </a:r>
-          </a:p>
-          <a:p>
-            <a:pPr algn="just"/>
-            <a:r>
-              <a:rPr lang="ru-RU" sz="1400" b="1" dirty="0" smtClean="0">
-                <a:latin typeface="Courier New" pitchFamily="49" charset="0"/>
-                <a:cs typeface="Courier New" pitchFamily="49" charset="0"/>
-              </a:rPr>
-              <a:t>Напишите реализацию интерфейса с именем </a:t>
-            </a:r>
-            <a:r>
-              <a:rPr lang="en-US" sz="1400" b="1" dirty="0" smtClean="0">
-                <a:latin typeface="Courier New" pitchFamily="49" charset="0"/>
-                <a:cs typeface="Courier New" pitchFamily="49" charset="0"/>
-              </a:rPr>
-              <a:t>Figure, </a:t>
-            </a:r>
-            <a:r>
-              <a:rPr lang="ru-RU" sz="1400" b="1" dirty="0" smtClean="0">
-                <a:latin typeface="Courier New" pitchFamily="49" charset="0"/>
-                <a:cs typeface="Courier New" pitchFamily="49" charset="0"/>
-              </a:rPr>
-              <a:t>которая при вызове </a:t>
-            </a:r>
-            <a:r>
-              <a:rPr lang="en-US" sz="1400" b="1" dirty="0" smtClean="0">
-                <a:latin typeface="Courier New" pitchFamily="49" charset="0"/>
-                <a:cs typeface="Courier New" pitchFamily="49" charset="0"/>
-              </a:rPr>
-              <a:t>Draw </a:t>
-            </a:r>
-            <a:r>
-              <a:rPr lang="ru-RU" sz="1400" b="1" dirty="0" smtClean="0">
-                <a:latin typeface="Courier New" pitchFamily="49" charset="0"/>
-                <a:cs typeface="Courier New" pitchFamily="49" charset="0"/>
-              </a:rPr>
-              <a:t>выводит на консоль сообщение "</a:t>
-            </a:r>
-            <a:r>
-              <a:rPr lang="en-US" sz="1400" b="1" dirty="0" smtClean="0">
-                <a:latin typeface="Courier New" pitchFamily="49" charset="0"/>
-                <a:cs typeface="Courier New" pitchFamily="49" charset="0"/>
-              </a:rPr>
-              <a:t>Draw Figure".</a:t>
-            </a:r>
-          </a:p>
-          <a:p>
-            <a:pPr algn="just"/>
-            <a:r>
-              <a:rPr lang="en-US" sz="1400" dirty="0" smtClean="0">
-                <a:latin typeface="Courier New" pitchFamily="49" charset="0"/>
-                <a:cs typeface="Courier New" pitchFamily="49" charset="0"/>
-              </a:rPr>
-              <a:t>using System;</a:t>
-            </a:r>
-          </a:p>
-          <a:p>
-            <a:pPr algn="just"/>
-            <a:endParaRPr lang="en-US" sz="1400" dirty="0" smtClean="0">
-              <a:latin typeface="Courier New" pitchFamily="49" charset="0"/>
-              <a:cs typeface="Courier New" pitchFamily="49" charset="0"/>
-            </a:endParaRPr>
-          </a:p>
-          <a:p>
-            <a:pPr algn="just"/>
-            <a:r>
-              <a:rPr lang="en-US" sz="1400" dirty="0" err="1" smtClean="0">
-                <a:latin typeface="Courier New" pitchFamily="49" charset="0"/>
-                <a:cs typeface="Courier New" pitchFamily="49" charset="0"/>
-              </a:rPr>
-              <a:t>var</a:t>
-            </a:r>
-            <a:r>
-              <a:rPr lang="en-US" sz="1400" dirty="0" smtClean="0">
-                <a:latin typeface="Courier New" pitchFamily="49" charset="0"/>
-                <a:cs typeface="Courier New" pitchFamily="49" charset="0"/>
-              </a:rPr>
-              <a:t> </a:t>
-            </a:r>
-            <a:r>
-              <a:rPr lang="en-US" sz="1400" dirty="0" err="1" smtClean="0">
-                <a:latin typeface="Courier New" pitchFamily="49" charset="0"/>
-                <a:cs typeface="Courier New" pitchFamily="49" charset="0"/>
-              </a:rPr>
-              <a:t>fg</a:t>
-            </a:r>
-            <a:r>
-              <a:rPr lang="en-US" sz="1400" dirty="0" smtClean="0">
-                <a:latin typeface="Courier New" pitchFamily="49" charset="0"/>
-                <a:cs typeface="Courier New" pitchFamily="49" charset="0"/>
-              </a:rPr>
-              <a:t> = new Figure();</a:t>
-            </a:r>
-          </a:p>
-          <a:p>
-            <a:pPr algn="just"/>
-            <a:r>
-              <a:rPr lang="en-US" sz="1400" dirty="0" err="1" smtClean="0">
-                <a:latin typeface="Courier New" pitchFamily="49" charset="0"/>
-                <a:cs typeface="Courier New" pitchFamily="49" charset="0"/>
-              </a:rPr>
-              <a:t>fg.Draw</a:t>
-            </a:r>
-            <a:r>
-              <a:rPr lang="en-US" sz="1400" dirty="0" smtClean="0">
-                <a:latin typeface="Courier New" pitchFamily="49" charset="0"/>
-                <a:cs typeface="Courier New" pitchFamily="49" charset="0"/>
-              </a:rPr>
-              <a:t>();</a:t>
-            </a:r>
-          </a:p>
-          <a:p>
-            <a:pPr algn="just"/>
-            <a:endParaRPr lang="en-US" sz="1400" dirty="0" smtClean="0">
-              <a:latin typeface="Courier New" pitchFamily="49" charset="0"/>
-              <a:cs typeface="Courier New" pitchFamily="49" charset="0"/>
-            </a:endParaRPr>
-          </a:p>
-          <a:p>
-            <a:pPr algn="just"/>
-            <a:r>
-              <a:rPr lang="en-US" sz="1400" dirty="0" smtClean="0">
-                <a:latin typeface="Courier New" pitchFamily="49" charset="0"/>
-                <a:cs typeface="Courier New" pitchFamily="49" charset="0"/>
-              </a:rPr>
-              <a:t>// TODO: </a:t>
-            </a:r>
-            <a:r>
-              <a:rPr lang="ru-RU" sz="1400" dirty="0" smtClean="0">
-                <a:latin typeface="Courier New" pitchFamily="49" charset="0"/>
-                <a:cs typeface="Courier New" pitchFamily="49" charset="0"/>
-              </a:rPr>
-              <a:t>Реализовать класс </a:t>
-            </a:r>
-            <a:r>
-              <a:rPr lang="en-US" sz="1400" dirty="0" smtClean="0">
-                <a:latin typeface="Courier New" pitchFamily="49" charset="0"/>
-                <a:cs typeface="Courier New" pitchFamily="49" charset="0"/>
-              </a:rPr>
-              <a:t>Figure, </a:t>
-            </a:r>
-            <a:r>
-              <a:rPr lang="ru-RU" sz="1400" dirty="0" smtClean="0">
-                <a:latin typeface="Courier New" pitchFamily="49" charset="0"/>
-                <a:cs typeface="Courier New" pitchFamily="49" charset="0"/>
-              </a:rPr>
-              <a:t>имплементирующий </a:t>
-            </a:r>
-            <a:r>
-              <a:rPr lang="en-US" sz="1400" dirty="0" err="1" smtClean="0">
-                <a:latin typeface="Courier New" pitchFamily="49" charset="0"/>
-                <a:cs typeface="Courier New" pitchFamily="49" charset="0"/>
-              </a:rPr>
-              <a:t>IDrawable</a:t>
-            </a:r>
-            <a:endParaRPr lang="en-US" sz="1400" dirty="0" smtClean="0">
-              <a:latin typeface="Courier New" pitchFamily="49" charset="0"/>
-              <a:cs typeface="Courier New" pitchFamily="49" charset="0"/>
-            </a:endParaRPr>
-          </a:p>
-          <a:p>
-            <a:pPr algn="just"/>
-            <a:endParaRPr lang="en-US" sz="1400" dirty="0" smtClean="0">
-              <a:latin typeface="Courier New" pitchFamily="49" charset="0"/>
-              <a:cs typeface="Courier New" pitchFamily="49" charset="0"/>
-            </a:endParaRPr>
-          </a:p>
-          <a:p>
-            <a:pPr algn="just"/>
-            <a:r>
-              <a:rPr lang="en-US" sz="1400" dirty="0" smtClean="0">
-                <a:latin typeface="Courier New" pitchFamily="49" charset="0"/>
-                <a:cs typeface="Courier New" pitchFamily="49" charset="0"/>
-              </a:rPr>
-              <a:t>interface </a:t>
-            </a:r>
-            <a:r>
-              <a:rPr lang="en-US" sz="1400" dirty="0" err="1" smtClean="0">
-                <a:latin typeface="Courier New" pitchFamily="49" charset="0"/>
-                <a:cs typeface="Courier New" pitchFamily="49" charset="0"/>
-              </a:rPr>
-              <a:t>IDrawable</a:t>
-            </a:r>
-            <a:endParaRPr lang="en-US" sz="1400" dirty="0" smtClean="0">
-              <a:latin typeface="Courier New" pitchFamily="49" charset="0"/>
-              <a:cs typeface="Courier New" pitchFamily="49" charset="0"/>
-            </a:endParaRPr>
-          </a:p>
-          <a:p>
-            <a:pPr algn="just"/>
-            <a:r>
-              <a:rPr lang="en-US" sz="1400" dirty="0" smtClean="0">
-                <a:latin typeface="Courier New" pitchFamily="49" charset="0"/>
-                <a:cs typeface="Courier New" pitchFamily="49" charset="0"/>
-              </a:rPr>
-              <a:t>{</a:t>
-            </a:r>
-          </a:p>
-          <a:p>
-            <a:pPr algn="just"/>
-            <a:r>
-              <a:rPr lang="en-US" sz="1400" dirty="0" smtClean="0">
-                <a:latin typeface="Courier New" pitchFamily="49" charset="0"/>
-                <a:cs typeface="Courier New" pitchFamily="49" charset="0"/>
-              </a:rPr>
-              <a:t>    void Draw();</a:t>
-            </a:r>
-          </a:p>
-          <a:p>
-            <a:pPr algn="just"/>
-            <a:r>
-              <a:rPr lang="en-US" sz="1400" dirty="0" smtClean="0">
-                <a:latin typeface="Courier New" pitchFamily="49" charset="0"/>
-                <a:cs typeface="Courier New" pitchFamily="49" charset="0"/>
-              </a:rPr>
-              <a:t>}</a:t>
-            </a:r>
-            <a:endParaRPr lang="en-US" sz="1400" dirty="0">
-              <a:latin typeface="Courier New" pitchFamily="49" charset="0"/>
-              <a:cs typeface="Courier New" pitchFamily="49" charset="0"/>
-            </a:endParaRPr>
-          </a:p>
-        </p:txBody>
-      </p:sp>
-      <p:sp>
-        <p:nvSpPr>
-          <p:cNvPr id="4" name="Прямоугольник 3"/>
-          <p:cNvSpPr/>
-          <p:nvPr/>
-        </p:nvSpPr>
-        <p:spPr>
-          <a:xfrm>
-            <a:off x="0" y="0"/>
-            <a:ext cx="9144000" cy="2862322"/>
-          </a:xfrm>
-          <a:prstGeom prst="rect">
-            <a:avLst/>
-          </a:prstGeom>
-          <a:solidFill>
-            <a:schemeClr val="accent6">
-              <a:lumMod val="20000"/>
-              <a:lumOff val="80000"/>
-            </a:schemeClr>
-          </a:solidFill>
-        </p:spPr>
-        <p:txBody>
-          <a:bodyPr wrap="square">
-            <a:spAutoFit/>
-          </a:bodyPr>
-          <a:lstStyle/>
-          <a:p>
-            <a:pPr algn="just">
-              <a:buFont typeface="Arial" pitchFamily="34" charset="0"/>
-              <a:buChar char="•"/>
-            </a:pPr>
-            <a:r>
-              <a:rPr lang="ru-RU" dirty="0" smtClean="0">
-                <a:latin typeface="Times New Roman" pitchFamily="18" charset="0"/>
-                <a:cs typeface="Times New Roman" pitchFamily="18" charset="0"/>
-              </a:rPr>
-              <a:t>Создайте базовый класс </a:t>
-            </a:r>
-            <a:r>
-              <a:rPr lang="en-US" dirty="0" smtClean="0">
-                <a:latin typeface="Times New Roman" pitchFamily="18" charset="0"/>
-                <a:cs typeface="Times New Roman" pitchFamily="18" charset="0"/>
-              </a:rPr>
-              <a:t>Animal </a:t>
-            </a:r>
-            <a:r>
-              <a:rPr lang="ru-RU" dirty="0" smtClean="0">
-                <a:latin typeface="Times New Roman" pitchFamily="18" charset="0"/>
-                <a:cs typeface="Times New Roman" pitchFamily="18" charset="0"/>
-              </a:rPr>
-              <a:t>с методом </a:t>
-            </a:r>
-            <a:r>
-              <a:rPr lang="en-US" dirty="0" smtClean="0">
-                <a:latin typeface="Times New Roman" pitchFamily="18" charset="0"/>
-                <a:cs typeface="Times New Roman" pitchFamily="18" charset="0"/>
-              </a:rPr>
-              <a:t>Speak(). </a:t>
-            </a:r>
-            <a:r>
-              <a:rPr lang="ru-RU" dirty="0" smtClean="0">
-                <a:latin typeface="Times New Roman" pitchFamily="18" charset="0"/>
-                <a:cs typeface="Times New Roman" pitchFamily="18" charset="0"/>
-              </a:rPr>
-              <a:t>Наследуйте от него классы </a:t>
-            </a:r>
-            <a:r>
-              <a:rPr lang="en-US" dirty="0" smtClean="0">
-                <a:latin typeface="Times New Roman" pitchFamily="18" charset="0"/>
-                <a:cs typeface="Times New Roman" pitchFamily="18" charset="0"/>
-              </a:rPr>
-              <a:t>Dog </a:t>
-            </a:r>
-            <a:r>
-              <a:rPr lang="ru-RU" dirty="0" smtClean="0">
-                <a:latin typeface="Times New Roman" pitchFamily="18" charset="0"/>
-                <a:cs typeface="Times New Roman" pitchFamily="18" charset="0"/>
-              </a:rPr>
-              <a:t>и </a:t>
-            </a:r>
-            <a:r>
-              <a:rPr lang="en-US" dirty="0" smtClean="0">
-                <a:latin typeface="Times New Roman" pitchFamily="18" charset="0"/>
-                <a:cs typeface="Times New Roman" pitchFamily="18" charset="0"/>
-              </a:rPr>
-              <a:t>Cat, </a:t>
-            </a:r>
-            <a:r>
-              <a:rPr lang="ru-RU" dirty="0" smtClean="0">
-                <a:latin typeface="Times New Roman" pitchFamily="18" charset="0"/>
-                <a:cs typeface="Times New Roman" pitchFamily="18" charset="0"/>
-              </a:rPr>
-              <a:t>переопределив </a:t>
-            </a:r>
-            <a:r>
-              <a:rPr lang="en-US" dirty="0" smtClean="0">
-                <a:latin typeface="Times New Roman" pitchFamily="18" charset="0"/>
-                <a:cs typeface="Times New Roman" pitchFamily="18" charset="0"/>
-              </a:rPr>
-              <a:t>Speak() </a:t>
-            </a:r>
-            <a:r>
-              <a:rPr lang="ru-RU" dirty="0" smtClean="0">
-                <a:latin typeface="Times New Roman" pitchFamily="18" charset="0"/>
-                <a:cs typeface="Times New Roman" pitchFamily="18" charset="0"/>
-              </a:rPr>
-              <a:t>так, чтобы:</a:t>
-            </a:r>
-          </a:p>
-          <a:p>
-            <a:pPr algn="just"/>
-            <a:r>
-              <a:rPr lang="en-US" dirty="0" err="1" smtClean="0">
-                <a:latin typeface="Times New Roman" pitchFamily="18" charset="0"/>
-                <a:cs typeface="Times New Roman" pitchFamily="18" charset="0"/>
-              </a:rPr>
-              <a:t>Dog.Speak</a:t>
-            </a:r>
-            <a:r>
-              <a:rPr lang="en-US" dirty="0" smtClean="0">
-                <a:latin typeface="Times New Roman" pitchFamily="18" charset="0"/>
-                <a:cs typeface="Times New Roman" pitchFamily="18" charset="0"/>
-              </a:rPr>
-              <a:t>() </a:t>
-            </a:r>
-            <a:r>
-              <a:rPr lang="ru-RU" dirty="0" smtClean="0">
-                <a:latin typeface="Times New Roman" pitchFamily="18" charset="0"/>
-                <a:cs typeface="Times New Roman" pitchFamily="18" charset="0"/>
-              </a:rPr>
-              <a:t>выводил «Гав!»;</a:t>
-            </a:r>
-          </a:p>
-          <a:p>
-            <a:pPr algn="just"/>
-            <a:r>
-              <a:rPr lang="en-US" dirty="0" err="1" smtClean="0">
-                <a:latin typeface="Times New Roman" pitchFamily="18" charset="0"/>
-                <a:cs typeface="Times New Roman" pitchFamily="18" charset="0"/>
-              </a:rPr>
-              <a:t>Cat.Speak</a:t>
-            </a:r>
-            <a:r>
-              <a:rPr lang="en-US" dirty="0" smtClean="0">
-                <a:latin typeface="Times New Roman" pitchFamily="18" charset="0"/>
-                <a:cs typeface="Times New Roman" pitchFamily="18" charset="0"/>
-              </a:rPr>
-              <a:t>() </a:t>
-            </a:r>
-            <a:r>
-              <a:rPr lang="ru-RU" dirty="0" smtClean="0">
-                <a:latin typeface="Times New Roman" pitchFamily="18" charset="0"/>
-                <a:cs typeface="Times New Roman" pitchFamily="18" charset="0"/>
-              </a:rPr>
-              <a:t>выводил «Мяу!».</a:t>
-            </a:r>
-            <a:endParaRPr lang="en-US" dirty="0" smtClean="0">
-              <a:latin typeface="Times New Roman" pitchFamily="18" charset="0"/>
-              <a:cs typeface="Times New Roman" pitchFamily="18" charset="0"/>
-            </a:endParaRPr>
-          </a:p>
-          <a:p>
-            <a:pPr algn="just">
-              <a:buFont typeface="Arial" pitchFamily="34" charset="0"/>
-              <a:buChar char="•"/>
-            </a:pPr>
-            <a:r>
-              <a:rPr lang="ru-RU" dirty="0" smtClean="0">
-                <a:latin typeface="Times New Roman" pitchFamily="18" charset="0"/>
-                <a:cs typeface="Times New Roman" pitchFamily="18" charset="0"/>
-              </a:rPr>
-              <a:t>Добавьте в </a:t>
-            </a:r>
-            <a:r>
-              <a:rPr lang="ru-RU" dirty="0" err="1" smtClean="0">
-                <a:latin typeface="Times New Roman" pitchFamily="18" charset="0"/>
-                <a:cs typeface="Times New Roman" pitchFamily="18" charset="0"/>
-              </a:rPr>
-              <a:t>Animal</a:t>
-            </a:r>
-            <a:r>
-              <a:rPr lang="ru-RU" dirty="0" smtClean="0">
-                <a:latin typeface="Times New Roman" pitchFamily="18" charset="0"/>
-                <a:cs typeface="Times New Roman" pitchFamily="18" charset="0"/>
-              </a:rPr>
-              <a:t> поле </a:t>
-            </a:r>
-            <a:r>
-              <a:rPr lang="ru-RU" dirty="0" err="1" smtClean="0">
-                <a:latin typeface="Times New Roman" pitchFamily="18" charset="0"/>
-                <a:cs typeface="Times New Roman" pitchFamily="18" charset="0"/>
-              </a:rPr>
-              <a:t>Name</a:t>
-            </a:r>
-            <a:r>
-              <a:rPr lang="ru-RU" dirty="0" smtClean="0">
-                <a:latin typeface="Times New Roman" pitchFamily="18" charset="0"/>
-                <a:cs typeface="Times New Roman" pitchFamily="18" charset="0"/>
-              </a:rPr>
-              <a:t> и конструктор, принимающий имя. В классах </a:t>
-            </a:r>
-            <a:r>
-              <a:rPr lang="ru-RU" dirty="0" err="1" smtClean="0">
-                <a:latin typeface="Times New Roman" pitchFamily="18" charset="0"/>
-                <a:cs typeface="Times New Roman" pitchFamily="18" charset="0"/>
-              </a:rPr>
-              <a:t>Dog</a:t>
-            </a:r>
-            <a:r>
-              <a:rPr lang="ru-RU" dirty="0" smtClean="0">
-                <a:latin typeface="Times New Roman" pitchFamily="18" charset="0"/>
-                <a:cs typeface="Times New Roman" pitchFamily="18" charset="0"/>
-              </a:rPr>
-              <a:t> и </a:t>
-            </a:r>
-            <a:r>
-              <a:rPr lang="ru-RU" dirty="0" err="1" smtClean="0">
-                <a:latin typeface="Times New Roman" pitchFamily="18" charset="0"/>
-                <a:cs typeface="Times New Roman" pitchFamily="18" charset="0"/>
-              </a:rPr>
-              <a:t>Cat</a:t>
-            </a:r>
-            <a:r>
-              <a:rPr lang="ru-RU" dirty="0" smtClean="0">
-                <a:latin typeface="Times New Roman" pitchFamily="18" charset="0"/>
-                <a:cs typeface="Times New Roman" pitchFamily="18" charset="0"/>
-              </a:rPr>
-              <a:t> передайте имя в базовый конструктор. Метод </a:t>
-            </a:r>
-            <a:r>
-              <a:rPr lang="ru-RU" dirty="0" err="1" smtClean="0">
-                <a:latin typeface="Times New Roman" pitchFamily="18" charset="0"/>
-                <a:cs typeface="Times New Roman" pitchFamily="18" charset="0"/>
-              </a:rPr>
-              <a:t>Speak</a:t>
-            </a:r>
-            <a:r>
-              <a:rPr lang="ru-RU" dirty="0" smtClean="0">
-                <a:latin typeface="Times New Roman" pitchFamily="18" charset="0"/>
-                <a:cs typeface="Times New Roman" pitchFamily="18" charset="0"/>
-              </a:rPr>
-              <a:t>() должен выводить:</a:t>
-            </a:r>
-          </a:p>
-          <a:p>
-            <a:pPr algn="just"/>
-            <a:r>
-              <a:rPr lang="ru-RU" dirty="0" smtClean="0">
-                <a:latin typeface="Times New Roman" pitchFamily="18" charset="0"/>
-                <a:cs typeface="Times New Roman" pitchFamily="18" charset="0"/>
-              </a:rPr>
-              <a:t>«Собака [имя] говорит: Гав!»;</a:t>
-            </a:r>
-          </a:p>
-          <a:p>
-            <a:pPr algn="just"/>
-            <a:r>
-              <a:rPr lang="ru-RU" dirty="0" smtClean="0">
-                <a:latin typeface="Times New Roman" pitchFamily="18" charset="0"/>
-                <a:cs typeface="Times New Roman" pitchFamily="18" charset="0"/>
-              </a:rPr>
-              <a:t>«Кошка [имя] говорит: Мяу!».</a:t>
-            </a:r>
-            <a:endParaRPr lang="en-US" dirty="0" smtClean="0">
-              <a:latin typeface="Times New Roman" pitchFamily="18" charset="0"/>
-              <a:cs typeface="Times New Roman" pitchFamily="18" charset="0"/>
-            </a:endParaRPr>
-          </a:p>
-          <a:p>
-            <a:pPr algn="just">
-              <a:buFont typeface="Arial" pitchFamily="34" charset="0"/>
-              <a:buChar char="•"/>
-            </a:pPr>
-            <a:r>
-              <a:rPr lang="ru-RU" dirty="0" smtClean="0">
-                <a:latin typeface="Times New Roman" pitchFamily="18" charset="0"/>
-                <a:cs typeface="Times New Roman" pitchFamily="18" charset="0"/>
-              </a:rPr>
-              <a:t>Сделайте метод </a:t>
-            </a:r>
-            <a:r>
-              <a:rPr lang="ru-RU" dirty="0" err="1" smtClean="0">
-                <a:latin typeface="Times New Roman" pitchFamily="18" charset="0"/>
-                <a:cs typeface="Times New Roman" pitchFamily="18" charset="0"/>
-              </a:rPr>
-              <a:t>Speak</a:t>
-            </a:r>
-            <a:r>
-              <a:rPr lang="ru-RU" dirty="0" smtClean="0">
-                <a:latin typeface="Times New Roman" pitchFamily="18" charset="0"/>
-                <a:cs typeface="Times New Roman" pitchFamily="18" charset="0"/>
-              </a:rPr>
-              <a:t>() абстрактным в </a:t>
-            </a:r>
-            <a:r>
-              <a:rPr lang="ru-RU" dirty="0" err="1" smtClean="0">
-                <a:latin typeface="Times New Roman" pitchFamily="18" charset="0"/>
-                <a:cs typeface="Times New Roman" pitchFamily="18" charset="0"/>
-              </a:rPr>
-              <a:t>Animal</a:t>
-            </a:r>
-            <a:r>
-              <a:rPr lang="ru-RU" dirty="0" smtClean="0">
-                <a:latin typeface="Times New Roman" pitchFamily="18" charset="0"/>
-                <a:cs typeface="Times New Roman" pitchFamily="18" charset="0"/>
-              </a:rPr>
-              <a:t>. Тогда все наследники обязаны его реализовать.</a:t>
-            </a:r>
-            <a:endParaRPr lang="ru-RU" dirty="0">
+            <a:pPr algn="ctr"/>
+            <a:r>
+              <a:rPr lang="en-US" b="1" dirty="0" smtClean="0">
+                <a:latin typeface="Times New Roman" pitchFamily="18" charset="0"/>
+                <a:cs typeface="Times New Roman" pitchFamily="18" charset="0"/>
+                <a:hlinkClick r:id="rId4"/>
+              </a:rPr>
+              <a:t>https://metanit.com/sharp/aspnet6/11.1.php?ysclid=mmb0fc7mgh555995401</a:t>
+            </a:r>
+            <a:endParaRPr lang="en-US" b="1" dirty="0" smtClean="0">
               <a:latin typeface="Times New Roman" pitchFamily="18" charset="0"/>
               <a:cs typeface="Times New Roman" pitchFamily="18" charset="0"/>
             </a:endParaRPr>
@@ -6309,14 +4636,14 @@
       </p:grpSpPr>
       <p:sp>
         <p:nvSpPr>
-          <p:cNvPr id="3" name="Прямоугольник 2"/>
+          <p:cNvPr id="2" name="Прямоугольник 1"/>
           <p:cNvSpPr/>
           <p:nvPr/>
         </p:nvSpPr>
         <p:spPr>
           <a:xfrm>
-            <a:off x="0" y="142852"/>
-            <a:ext cx="9144000" cy="923330"/>
+            <a:off x="0" y="0"/>
+            <a:ext cx="9144000" cy="830997"/>
           </a:xfrm>
           <a:prstGeom prst="rect">
             <a:avLst/>
@@ -6328,45 +4655,47 @@
           </a:bodyPr>
           <a:lstStyle/>
           <a:p>
-            <a:pPr algn="just"/>
-            <a:r>
-              <a:rPr lang="ru-RU" dirty="0" smtClean="0">
-                <a:latin typeface="Times New Roman" pitchFamily="18" charset="0"/>
-                <a:cs typeface="Times New Roman" pitchFamily="18" charset="0"/>
-              </a:rPr>
-              <a:t>Для объявления класса в C# используется ключевое слово </a:t>
-            </a:r>
-            <a:r>
-              <a:rPr lang="ru-RU" dirty="0" err="1" smtClean="0">
-                <a:latin typeface="Times New Roman" pitchFamily="18" charset="0"/>
-                <a:cs typeface="Times New Roman" pitchFamily="18" charset="0"/>
-              </a:rPr>
-              <a:t>class</a:t>
-            </a:r>
-            <a:r>
-              <a:rPr lang="ru-RU" dirty="0" smtClean="0">
-                <a:latin typeface="Times New Roman" pitchFamily="18" charset="0"/>
-                <a:cs typeface="Times New Roman" pitchFamily="18" charset="0"/>
-              </a:rPr>
-              <a:t>, перед ним указываются модификаторы доступа и ряд других ключевых слов, которые определяют его свойства (статический, абстрактный и т. п.).</a:t>
-            </a:r>
-            <a:endParaRPr lang="ru-RU" dirty="0">
+            <a:pPr algn="ctr"/>
+            <a:r>
+              <a:rPr lang="en-US" sz="2400" b="1" dirty="0" smtClean="0">
+                <a:latin typeface="Times New Roman" pitchFamily="18" charset="0"/>
+                <a:cs typeface="Times New Roman" pitchFamily="18" charset="0"/>
+                <a:hlinkClick r:id="rId2"/>
+              </a:rPr>
+              <a:t>https://telegrambots.github.io/book/1/quickstart.html</a:t>
+            </a:r>
+            <a:endParaRPr lang="en-US" sz="2400" b="1" dirty="0" smtClean="0">
               <a:latin typeface="Times New Roman" pitchFamily="18" charset="0"/>
               <a:cs typeface="Times New Roman" pitchFamily="18" charset="0"/>
             </a:endParaRPr>
           </a:p>
+          <a:p>
+            <a:pPr algn="ctr"/>
+            <a:r>
+              <a:rPr lang="en-US" sz="2400" b="1" dirty="0" smtClean="0">
+                <a:latin typeface="Times New Roman" pitchFamily="18" charset="0"/>
+                <a:cs typeface="Times New Roman" pitchFamily="18" charset="0"/>
+                <a:hlinkClick r:id="rId3"/>
+              </a:rPr>
+              <a:t>https://stepik.org/lesson/1253156/step/1?unit=1267076</a:t>
+            </a:r>
+            <a:endParaRPr lang="en-US" sz="2400" b="1" dirty="0" smtClean="0">
+              <a:latin typeface="Times New Roman" pitchFamily="18" charset="0"/>
+              <a:cs typeface="Times New Roman" pitchFamily="18" charset="0"/>
+            </a:endParaRPr>
+          </a:p>
         </p:txBody>
       </p:sp>
       <p:pic>
         <p:nvPicPr>
-          <p:cNvPr id="20482" name="Picture 2"/>
+          <p:cNvPr id="15362" name="Picture 2" descr="https://ucarecdn.stepik.net/1f6f10d9-b67a-49af-8e9d-2a9a206ae0d9/"/>
           <p:cNvPicPr>
             <a:picLocks noChangeAspect="1" noChangeArrowheads="1"/>
           </p:cNvPicPr>
           <p:nvPr/>
         </p:nvPicPr>
         <p:blipFill>
-          <a:blip r:embed="rId2"/>
+          <a:blip r:embed="rId4"/>
           <a:srcRect/>
           <a:stretch>
             <a:fillRect/>
@@ -6374,55 +4703,185 @@
         </p:blipFill>
         <p:spPr bwMode="auto">
           <a:xfrm>
-            <a:off x="142844" y="1000108"/>
-            <a:ext cx="8810625" cy="2181225"/>
+            <a:off x="4895850" y="2214554"/>
+            <a:ext cx="4248150" cy="2409826"/>
           </a:xfrm>
           <a:prstGeom prst="rect">
             <a:avLst/>
           </a:prstGeom>
           <a:noFill/>
-          <a:ln w="9525">
-            <a:noFill/>
-            <a:miter lim="800000"/>
-            <a:headEnd/>
-            <a:tailEnd/>
-          </a:ln>
-          <a:effectLst/>
         </p:spPr>
       </p:pic>
-      <p:pic>
-        <p:nvPicPr>
-          <p:cNvPr id="20483" name="Picture 3"/>
-          <p:cNvPicPr>
-            <a:picLocks noChangeAspect="1" noChangeArrowheads="1"/>
-          </p:cNvPicPr>
+      <p:sp>
+        <p:nvSpPr>
+          <p:cNvPr id="5" name="Прямоугольник 4"/>
+          <p:cNvSpPr/>
           <p:nvPr/>
-        </p:nvPicPr>
-        <p:blipFill>
-          <a:blip r:embed="rId3"/>
-          <a:srcRect/>
-          <a:stretch>
-            <a:fillRect/>
-          </a:stretch>
-        </p:blipFill>
-        <p:spPr bwMode="auto">
-          <a:xfrm>
-            <a:off x="333388" y="3214686"/>
-            <a:ext cx="8810612" cy="3643314"/>
+        </p:nvSpPr>
+        <p:spPr>
+          <a:xfrm>
+            <a:off x="0" y="1285860"/>
+            <a:ext cx="4572000" cy="4154984"/>
           </a:xfrm>
           <a:prstGeom prst="rect">
             <a:avLst/>
           </a:prstGeom>
-          <a:noFill/>
-          <a:ln w="9525">
-            <a:noFill/>
-            <a:miter lim="800000"/>
-            <a:headEnd/>
-            <a:tailEnd/>
-          </a:ln>
-          <a:effectLst/>
-        </p:spPr>
-      </p:pic>
+        </p:spPr>
+        <p:txBody>
+          <a:bodyPr>
+            <a:spAutoFit/>
+          </a:bodyPr>
+          <a:lstStyle/>
+          <a:p>
+            <a:pPr algn="just"/>
+            <a:r>
+              <a:rPr lang="ru-RU" sz="2400" dirty="0" smtClean="0">
+                <a:latin typeface="Times New Roman" pitchFamily="18" charset="0"/>
+                <a:cs typeface="Times New Roman" pitchFamily="18" charset="0"/>
+              </a:rPr>
+              <a:t>Ключевые шаги разработки:</a:t>
+            </a:r>
+          </a:p>
+          <a:p>
+            <a:pPr algn="just"/>
+            <a:r>
+              <a:rPr lang="ru-RU" sz="2400" dirty="0" smtClean="0">
+                <a:latin typeface="Times New Roman" pitchFamily="18" charset="0"/>
+                <a:cs typeface="Times New Roman" pitchFamily="18" charset="0"/>
+              </a:rPr>
+              <a:t>    Создать бота у @</a:t>
+            </a:r>
+            <a:r>
+              <a:rPr lang="ru-RU" sz="2400" dirty="0" err="1" smtClean="0">
+                <a:latin typeface="Times New Roman" pitchFamily="18" charset="0"/>
+                <a:cs typeface="Times New Roman" pitchFamily="18" charset="0"/>
+              </a:rPr>
+              <a:t>BotFather</a:t>
+            </a:r>
+            <a:r>
+              <a:rPr lang="ru-RU" sz="2400" dirty="0" smtClean="0">
+                <a:latin typeface="Times New Roman" pitchFamily="18" charset="0"/>
+                <a:cs typeface="Times New Roman" pitchFamily="18" charset="0"/>
+              </a:rPr>
+              <a:t> и получить </a:t>
+            </a:r>
+            <a:r>
+              <a:rPr lang="ru-RU" sz="2400" dirty="0" err="1" smtClean="0">
+                <a:latin typeface="Times New Roman" pitchFamily="18" charset="0"/>
+                <a:cs typeface="Times New Roman" pitchFamily="18" charset="0"/>
+              </a:rPr>
+              <a:t>токен</a:t>
+            </a:r>
+            <a:r>
+              <a:rPr lang="ru-RU" sz="2400" dirty="0" smtClean="0">
+                <a:latin typeface="Times New Roman" pitchFamily="18" charset="0"/>
+                <a:cs typeface="Times New Roman" pitchFamily="18" charset="0"/>
+              </a:rPr>
+              <a:t>.</a:t>
+            </a:r>
+          </a:p>
+          <a:p>
+            <a:pPr algn="just"/>
+            <a:r>
+              <a:rPr lang="ru-RU" sz="2400" dirty="0" smtClean="0">
+                <a:latin typeface="Times New Roman" pitchFamily="18" charset="0"/>
+                <a:cs typeface="Times New Roman" pitchFamily="18" charset="0"/>
+              </a:rPr>
+              <a:t>    Создать проект на C# (.NET </a:t>
+            </a:r>
+            <a:r>
+              <a:rPr lang="ru-RU" sz="2400" dirty="0" err="1" smtClean="0">
+                <a:latin typeface="Times New Roman" pitchFamily="18" charset="0"/>
+                <a:cs typeface="Times New Roman" pitchFamily="18" charset="0"/>
+              </a:rPr>
+              <a:t>Console</a:t>
+            </a:r>
+            <a:r>
+              <a:rPr lang="ru-RU" sz="2400" dirty="0" smtClean="0">
+                <a:latin typeface="Times New Roman" pitchFamily="18" charset="0"/>
+                <a:cs typeface="Times New Roman" pitchFamily="18" charset="0"/>
+              </a:rPr>
+              <a:t> </a:t>
+            </a:r>
+            <a:r>
+              <a:rPr lang="ru-RU" sz="2400" dirty="0" err="1" smtClean="0">
+                <a:latin typeface="Times New Roman" pitchFamily="18" charset="0"/>
+                <a:cs typeface="Times New Roman" pitchFamily="18" charset="0"/>
+              </a:rPr>
+              <a:t>App</a:t>
+            </a:r>
+            <a:r>
+              <a:rPr lang="ru-RU" sz="2400" dirty="0" smtClean="0">
+                <a:latin typeface="Times New Roman" pitchFamily="18" charset="0"/>
+                <a:cs typeface="Times New Roman" pitchFamily="18" charset="0"/>
+              </a:rPr>
+              <a:t> или </a:t>
+            </a:r>
+            <a:r>
+              <a:rPr lang="ru-RU" sz="2400" dirty="0" err="1" smtClean="0">
+                <a:latin typeface="Times New Roman" pitchFamily="18" charset="0"/>
+                <a:cs typeface="Times New Roman" pitchFamily="18" charset="0"/>
+              </a:rPr>
+              <a:t>Web</a:t>
+            </a:r>
+            <a:r>
+              <a:rPr lang="ru-RU" sz="2400" dirty="0" smtClean="0">
+                <a:latin typeface="Times New Roman" pitchFamily="18" charset="0"/>
+                <a:cs typeface="Times New Roman" pitchFamily="18" charset="0"/>
+              </a:rPr>
+              <a:t> API).</a:t>
+            </a:r>
+          </a:p>
+          <a:p>
+            <a:pPr algn="just"/>
+            <a:r>
+              <a:rPr lang="ru-RU" sz="2400" dirty="0" smtClean="0">
+                <a:latin typeface="Times New Roman" pitchFamily="18" charset="0"/>
+                <a:cs typeface="Times New Roman" pitchFamily="18" charset="0"/>
+              </a:rPr>
+              <a:t>    Установить библиотеку </a:t>
+            </a:r>
+            <a:r>
+              <a:rPr lang="ru-RU" sz="2400" dirty="0" err="1" smtClean="0">
+                <a:latin typeface="Times New Roman" pitchFamily="18" charset="0"/>
+                <a:cs typeface="Times New Roman" pitchFamily="18" charset="0"/>
+              </a:rPr>
+              <a:t>Telegram.Bot</a:t>
+            </a:r>
+            <a:r>
+              <a:rPr lang="ru-RU" sz="2400" dirty="0" smtClean="0">
+                <a:latin typeface="Times New Roman" pitchFamily="18" charset="0"/>
+                <a:cs typeface="Times New Roman" pitchFamily="18" charset="0"/>
+              </a:rPr>
+              <a:t>.</a:t>
+            </a:r>
+          </a:p>
+          <a:p>
+            <a:pPr algn="just"/>
+            <a:r>
+              <a:rPr lang="ru-RU" sz="2400" dirty="0" smtClean="0">
+                <a:latin typeface="Times New Roman" pitchFamily="18" charset="0"/>
+                <a:cs typeface="Times New Roman" pitchFamily="18" charset="0"/>
+              </a:rPr>
+              <a:t>    Написать код, который обрабатывает сообщения.</a:t>
+            </a:r>
+          </a:p>
+          <a:p>
+            <a:pPr algn="just"/>
+            <a:r>
+              <a:rPr lang="ru-RU" sz="2400" dirty="0" smtClean="0">
+                <a:latin typeface="Times New Roman" pitchFamily="18" charset="0"/>
+                <a:cs typeface="Times New Roman" pitchFamily="18" charset="0"/>
+              </a:rPr>
+              <a:t>    Запустить программу и проверить работу бота.</a:t>
+            </a:r>
+            <a:endParaRPr lang="ru-RU" sz="2400" dirty="0">
+              <a:latin typeface="Times New Roman" pitchFamily="18" charset="0"/>
+              <a:cs typeface="Times New Roman" pitchFamily="18" charset="0"/>
+            </a:endParaRPr>
+          </a:p>
+        </p:txBody>
+      </p:sp>
     </p:spTree>
   </p:cSld>
   <p:clrMapOvr>
@@ -6450,245 +4909,253 @@
       </p:grpSpPr>
       <p:sp>
         <p:nvSpPr>
-          <p:cNvPr id="2" name="Прямоугольник 1"/>
-          <p:cNvSpPr/>
+          <p:cNvPr id="10" name="Заголовок 1"/>
+          <p:cNvSpPr>
+            <a:spLocks noGrp="1"/>
+          </p:cNvSpPr>
+          <p:nvPr>
+            <p:ph type="title"/>
+          </p:nvPr>
+        </p:nvSpPr>
+        <p:spPr>
+          <a:xfrm>
+            <a:off x="428596" y="0"/>
+            <a:ext cx="8229600" cy="1143000"/>
+          </a:xfrm>
+        </p:spPr>
+        <p:txBody>
+          <a:bodyPr>
+            <a:normAutofit/>
+          </a:bodyPr>
+          <a:lstStyle/>
+          <a:p>
+            <a:r>
+              <a:rPr lang="ru-RU" b="1" dirty="0" smtClean="0"/>
+              <a:t>Подключение к </a:t>
+            </a:r>
+            <a:r>
+              <a:rPr lang="ru-RU" b="1" dirty="0" err="1" smtClean="0"/>
+              <a:t>веб-сервису</a:t>
+            </a:r>
+            <a:endParaRPr lang="ru-RU" dirty="0"/>
+          </a:p>
+        </p:txBody>
+      </p:sp>
+      <p:pic>
+        <p:nvPicPr>
+          <p:cNvPr id="1028" name="Picture 4"/>
+          <p:cNvPicPr>
+            <a:picLocks noChangeAspect="1" noChangeArrowheads="1"/>
+          </p:cNvPicPr>
           <p:nvPr/>
-        </p:nvSpPr>
-        <p:spPr>
-          <a:xfrm>
-            <a:off x="0" y="0"/>
-            <a:ext cx="4071934" cy="5632311"/>
+        </p:nvPicPr>
+        <p:blipFill>
+          <a:blip r:embed="rId2"/>
+          <a:srcRect/>
+          <a:stretch>
+            <a:fillRect/>
+          </a:stretch>
+        </p:blipFill>
+        <p:spPr bwMode="auto">
+          <a:xfrm>
+            <a:off x="4086225" y="3000372"/>
+            <a:ext cx="5057775" cy="3562350"/>
           </a:xfrm>
           <a:prstGeom prst="rect">
             <a:avLst/>
           </a:prstGeom>
-        </p:spPr>
-        <p:txBody>
-          <a:bodyPr wrap="square">
+          <a:noFill/>
+          <a:ln w="9525">
+            <a:noFill/>
+            <a:miter lim="800000"/>
+            <a:headEnd/>
+            <a:tailEnd/>
+          </a:ln>
+          <a:effectLst/>
+        </p:spPr>
+      </p:pic>
+      <p:pic>
+        <p:nvPicPr>
+          <p:cNvPr id="1029" name="Picture 5"/>
+          <p:cNvPicPr>
+            <a:picLocks noChangeAspect="1" noChangeArrowheads="1"/>
+          </p:cNvPicPr>
+          <p:nvPr/>
+        </p:nvPicPr>
+        <p:blipFill>
+          <a:blip r:embed="rId3"/>
+          <a:srcRect/>
+          <a:stretch>
+            <a:fillRect/>
+          </a:stretch>
+        </p:blipFill>
+        <p:spPr bwMode="auto">
+          <a:xfrm>
+            <a:off x="357158" y="1000108"/>
+            <a:ext cx="4095750" cy="2466975"/>
+          </a:xfrm>
+          <a:prstGeom prst="rect">
+            <a:avLst/>
+          </a:prstGeom>
+          <a:noFill/>
+          <a:ln w="9525">
+            <a:noFill/>
+            <a:miter lim="800000"/>
+            <a:headEnd/>
+            <a:tailEnd/>
+          </a:ln>
+          <a:effectLst/>
+        </p:spPr>
+      </p:pic>
+      <p:cxnSp>
+        <p:nvCxnSpPr>
+          <p:cNvPr id="8" name="Shape 7"/>
+          <p:cNvCxnSpPr>
+            <a:stCxn id="1029" idx="2"/>
+            <a:endCxn id="1028" idx="1"/>
+          </p:cNvCxnSpPr>
+          <p:nvPr/>
+        </p:nvCxnSpPr>
+        <p:spPr>
+          <a:xfrm rot="16200000" flipH="1">
+            <a:off x="2588397" y="3283719"/>
+            <a:ext cx="1314464" cy="1681192"/>
+          </a:xfrm>
+          <a:prstGeom prst="bentConnector2">
+            <a:avLst/>
+          </a:prstGeom>
+          <a:ln w="25400">
+            <a:solidFill>
+              <a:schemeClr val="tx1"/>
+            </a:solidFill>
+            <a:tailEnd type="arrow"/>
+          </a:ln>
+        </p:spPr>
+        <p:style>
+          <a:lnRef idx="1">
+            <a:schemeClr val="accent1"/>
+          </a:lnRef>
+          <a:fillRef idx="0">
+            <a:schemeClr val="accent1"/>
+          </a:fillRef>
+          <a:effectRef idx="0">
+            <a:schemeClr val="accent1"/>
+          </a:effectRef>
+          <a:fontRef idx="minor">
+            <a:schemeClr val="tx1"/>
+          </a:fontRef>
+        </p:style>
+      </p:cxnSp>
+      <p:pic>
+        <p:nvPicPr>
+          <p:cNvPr id="1030" name="Picture 6"/>
+          <p:cNvPicPr>
+            <a:picLocks noChangeAspect="1" noChangeArrowheads="1"/>
+          </p:cNvPicPr>
+          <p:nvPr/>
+        </p:nvPicPr>
+        <p:blipFill>
+          <a:blip r:embed="rId4"/>
+          <a:srcRect/>
+          <a:stretch>
+            <a:fillRect/>
+          </a:stretch>
+        </p:blipFill>
+        <p:spPr bwMode="auto">
+          <a:xfrm>
+            <a:off x="4786314" y="1571612"/>
+            <a:ext cx="4101527" cy="1071570"/>
+          </a:xfrm>
+          <a:prstGeom prst="rect">
+            <a:avLst/>
+          </a:prstGeom>
+          <a:noFill/>
+          <a:ln w="9525">
+            <a:solidFill>
+              <a:schemeClr val="tx1"/>
+            </a:solidFill>
+            <a:miter lim="800000"/>
+            <a:headEnd/>
+            <a:tailEnd/>
+          </a:ln>
+          <a:effectLst/>
+        </p:spPr>
+      </p:pic>
+      <p:sp>
+        <p:nvSpPr>
+          <p:cNvPr id="16" name="Прямоугольник 15"/>
+          <p:cNvSpPr/>
+          <p:nvPr/>
+        </p:nvSpPr>
+        <p:spPr>
+          <a:xfrm>
+            <a:off x="5090686" y="2643182"/>
+            <a:ext cx="3553280" cy="369332"/>
+          </a:xfrm>
+          <a:prstGeom prst="rect">
+            <a:avLst/>
+          </a:prstGeom>
+        </p:spPr>
+        <p:txBody>
+          <a:bodyPr wrap="none">
             <a:spAutoFit/>
           </a:bodyPr>
           <a:lstStyle/>
           <a:p>
-            <a:pPr algn="just"/>
-            <a:r>
-              <a:rPr lang="ru-RU" dirty="0" smtClean="0">
-                <a:latin typeface="Times New Roman" pitchFamily="18" charset="0"/>
-                <a:cs typeface="Times New Roman" pitchFamily="18" charset="0"/>
-              </a:rPr>
-              <a:t>Для начала хотелось бы сказать, что класс относится к более общей концепции C# - к типу, помимо класса туда входят интерфейсы, структуры.</a:t>
-            </a:r>
-          </a:p>
-          <a:p>
-            <a:pPr algn="just"/>
-            <a:r>
-              <a:rPr lang="ru-RU" dirty="0" smtClean="0">
-                <a:latin typeface="Times New Roman" pitchFamily="18" charset="0"/>
-                <a:cs typeface="Times New Roman" pitchFamily="18" charset="0"/>
-              </a:rPr>
-              <a:t>В классе мы можем встретить следующие структурные элементы:</a:t>
-            </a:r>
-          </a:p>
-          <a:p>
-            <a:pPr algn="just"/>
-            <a:r>
-              <a:rPr lang="ru-RU" dirty="0" smtClean="0">
-                <a:latin typeface="Times New Roman" pitchFamily="18" charset="0"/>
-                <a:cs typeface="Times New Roman" pitchFamily="18" charset="0"/>
-              </a:rPr>
-              <a:t>    константы;</a:t>
-            </a:r>
-          </a:p>
-          <a:p>
-            <a:pPr algn="just"/>
-            <a:r>
-              <a:rPr lang="ru-RU" dirty="0" smtClean="0">
-                <a:latin typeface="Times New Roman" pitchFamily="18" charset="0"/>
-                <a:cs typeface="Times New Roman" pitchFamily="18" charset="0"/>
-              </a:rPr>
-              <a:t>    поля;</a:t>
-            </a:r>
-          </a:p>
-          <a:p>
-            <a:pPr algn="just"/>
-            <a:r>
-              <a:rPr lang="ru-RU" dirty="0" smtClean="0">
-                <a:latin typeface="Times New Roman" pitchFamily="18" charset="0"/>
-                <a:cs typeface="Times New Roman" pitchFamily="18" charset="0"/>
-              </a:rPr>
-              <a:t>    свойства;</a:t>
-            </a:r>
-          </a:p>
-          <a:p>
-            <a:pPr algn="just"/>
-            <a:r>
-              <a:rPr lang="ru-RU" dirty="0" smtClean="0">
-                <a:latin typeface="Times New Roman" pitchFamily="18" charset="0"/>
-                <a:cs typeface="Times New Roman" pitchFamily="18" charset="0"/>
-              </a:rPr>
-              <a:t>    методы;</a:t>
-            </a:r>
-          </a:p>
-          <a:p>
-            <a:pPr algn="just"/>
-            <a:r>
-              <a:rPr lang="ru-RU" dirty="0" smtClean="0">
-                <a:latin typeface="Times New Roman" pitchFamily="18" charset="0"/>
-                <a:cs typeface="Times New Roman" pitchFamily="18" charset="0"/>
-              </a:rPr>
-              <a:t>    конструктор экземпляра;</a:t>
-            </a:r>
-          </a:p>
-          <a:p>
-            <a:pPr algn="just"/>
-            <a:r>
-              <a:rPr lang="ru-RU" dirty="0" smtClean="0">
-                <a:latin typeface="Times New Roman" pitchFamily="18" charset="0"/>
-                <a:cs typeface="Times New Roman" pitchFamily="18" charset="0"/>
-              </a:rPr>
-              <a:t>    конструктор типа;</a:t>
-            </a:r>
-          </a:p>
-          <a:p>
-            <a:pPr algn="just"/>
-            <a:r>
-              <a:rPr lang="ru-RU" dirty="0" smtClean="0">
-                <a:latin typeface="Times New Roman" pitchFamily="18" charset="0"/>
-                <a:cs typeface="Times New Roman" pitchFamily="18" charset="0"/>
-              </a:rPr>
-              <a:t>    перегруженные операторы;</a:t>
-            </a:r>
-          </a:p>
-          <a:p>
-            <a:pPr algn="just"/>
-            <a:r>
-              <a:rPr lang="ru-RU" dirty="0" smtClean="0">
-                <a:latin typeface="Times New Roman" pitchFamily="18" charset="0"/>
-                <a:cs typeface="Times New Roman" pitchFamily="18" charset="0"/>
-              </a:rPr>
-              <a:t>    операторы преобразования;</a:t>
-            </a:r>
-          </a:p>
-          <a:p>
-            <a:pPr algn="just"/>
-            <a:r>
-              <a:rPr lang="ru-RU" dirty="0" smtClean="0">
-                <a:latin typeface="Times New Roman" pitchFamily="18" charset="0"/>
-                <a:cs typeface="Times New Roman" pitchFamily="18" charset="0"/>
-              </a:rPr>
-              <a:t>У каждого из этих структурных элементов могут быть разные наборы модификаторов, которые изменяют область видимости, принадлежность к экземпляру или типу, изменяемость и т.п.</a:t>
-            </a:r>
-            <a:endParaRPr lang="ru-RU" dirty="0">
-              <a:latin typeface="Times New Roman" pitchFamily="18" charset="0"/>
-              <a:cs typeface="Times New Roman" pitchFamily="18" charset="0"/>
-            </a:endParaRPr>
-          </a:p>
-        </p:txBody>
-      </p:sp>
-      <p:grpSp>
-        <p:nvGrpSpPr>
-          <p:cNvPr id="7" name="Группа 6"/>
-          <p:cNvGrpSpPr/>
+            <a:r>
+              <a:rPr lang="ru-RU" b="1" dirty="0" smtClean="0"/>
+              <a:t>Создание объекта класса сервиса</a:t>
+            </a:r>
+            <a:endParaRPr lang="ru-RU" b="1" dirty="0"/>
+          </a:p>
+        </p:txBody>
+      </p:sp>
+      <p:pic>
+        <p:nvPicPr>
+          <p:cNvPr id="9" name="Picture 2"/>
+          <p:cNvPicPr>
+            <a:picLocks noChangeAspect="1" noChangeArrowheads="1"/>
+          </p:cNvPicPr>
           <p:nvPr/>
-        </p:nvGrpSpPr>
-        <p:grpSpPr>
-          <a:xfrm>
-            <a:off x="4048125" y="0"/>
-            <a:ext cx="5095875" cy="6772275"/>
-            <a:chOff x="4048125" y="0"/>
-            <a:chExt cx="5095875" cy="6772275"/>
-          </a:xfrm>
-        </p:grpSpPr>
-        <p:pic>
-          <p:nvPicPr>
-            <p:cNvPr id="22530" name="Picture 2"/>
-            <p:cNvPicPr>
-              <a:picLocks noChangeAspect="1" noChangeArrowheads="1"/>
-            </p:cNvPicPr>
-            <p:nvPr/>
-          </p:nvPicPr>
-          <p:blipFill>
-            <a:blip r:embed="rId2"/>
-            <a:srcRect/>
-            <a:stretch>
-              <a:fillRect/>
-            </a:stretch>
-          </p:blipFill>
-          <p:spPr bwMode="auto">
-            <a:xfrm>
-              <a:off x="4048125" y="0"/>
-              <a:ext cx="5095875" cy="6772275"/>
-            </a:xfrm>
-            <a:prstGeom prst="rect">
-              <a:avLst/>
-            </a:prstGeom>
-            <a:solidFill>
-              <a:schemeClr val="bg2"/>
-            </a:solidFill>
-            <a:ln w="9525">
-              <a:solidFill>
-                <a:schemeClr val="accent1">
-                  <a:shade val="50000"/>
-                </a:schemeClr>
-              </a:solidFill>
-              <a:miter lim="800000"/>
-              <a:headEnd/>
-              <a:tailEnd/>
-            </a:ln>
-            <a:effectLst/>
-          </p:spPr>
-        </p:pic>
-        <p:sp>
-          <p:nvSpPr>
-            <p:cNvPr id="6" name="Прямоугольник 5"/>
-            <p:cNvSpPr/>
-            <p:nvPr/>
-          </p:nvSpPr>
-          <p:spPr>
-            <a:xfrm>
-              <a:off x="4500562" y="6000768"/>
-              <a:ext cx="2643206" cy="428628"/>
-            </a:xfrm>
-            <a:prstGeom prst="rect">
-              <a:avLst/>
-            </a:prstGeom>
-            <a:solidFill>
-              <a:srgbClr val="F6F5EE"/>
-            </a:solidFill>
-            <a:ln>
-              <a:noFill/>
-            </a:ln>
-          </p:spPr>
-          <p:style>
-            <a:lnRef idx="2">
-              <a:schemeClr val="accent1">
-                <a:shade val="50000"/>
-              </a:schemeClr>
-            </a:lnRef>
-            <a:fillRef idx="1">
-              <a:schemeClr val="accent1"/>
-            </a:fillRef>
-            <a:effectRef idx="0">
-              <a:schemeClr val="accent1"/>
-            </a:effectRef>
-            <a:fontRef idx="minor">
-              <a:schemeClr val="lt1"/>
-            </a:fontRef>
-          </p:style>
-          <p:txBody>
-            <a:bodyPr rtlCol="0" anchor="ctr"/>
-            <a:lstStyle/>
-            <a:p>
-              <a:pPr algn="ctr"/>
-              <a:endParaRPr lang="ru-RU"/>
-            </a:p>
-          </p:txBody>
-        </p:sp>
-      </p:grpSp>
+        </p:nvPicPr>
+        <p:blipFill>
+          <a:blip r:embed="rId5"/>
+          <a:srcRect/>
+          <a:stretch>
+            <a:fillRect/>
+          </a:stretch>
+        </p:blipFill>
+        <p:spPr bwMode="auto">
+          <a:xfrm>
+            <a:off x="0" y="5072074"/>
+            <a:ext cx="4224976" cy="1428736"/>
+          </a:xfrm>
+          <a:prstGeom prst="rect">
+            <a:avLst/>
+          </a:prstGeom>
+          <a:noFill/>
+          <a:ln w="9525">
+            <a:noFill/>
+            <a:miter lim="800000"/>
+            <a:headEnd/>
+            <a:tailEnd/>
+          </a:ln>
+          <a:effectLst/>
+        </p:spPr>
+      </p:pic>
     </p:spTree>
   </p:cSld>
   <p:clrMapOvr>
     <a:masterClrMapping/>
   </p:clrMapOvr>
+  <p:transition/>
+  <p:timing>
+    <p:tnLst>
+      <p:par>
+        <p:cTn id="1" dur="indefinite" restart="never" nodeType="tmRoot"/>
+      </p:par>
+    </p:tnLst>
+  </p:timing>
 </p:sld>
 </file>
 
@@ -6711,97 +5178,45 @@
       </p:grpSpPr>
       <p:sp>
         <p:nvSpPr>
-          <p:cNvPr id="2" name="Прямоугольник 1"/>
-          <p:cNvSpPr/>
-          <p:nvPr/>
+          <p:cNvPr id="2" name="Заголовок 1"/>
+          <p:cNvSpPr>
+            <a:spLocks noGrp="1"/>
+          </p:cNvSpPr>
+          <p:nvPr>
+            <p:ph type="title"/>
+          </p:nvPr>
         </p:nvSpPr>
         <p:spPr>
           <a:xfrm>
-            <a:off x="0" y="0"/>
-            <a:ext cx="9144000" cy="2031325"/>
-          </a:xfrm>
-          <a:prstGeom prst="rect">
-            <a:avLst/>
-          </a:prstGeom>
-        </p:spPr>
-        <p:txBody>
-          <a:bodyPr wrap="square">
-            <a:spAutoFit/>
+            <a:off x="457200" y="-285776"/>
+            <a:ext cx="8229600" cy="1143000"/>
+          </a:xfrm>
+        </p:spPr>
+        <p:txBody>
+          <a:bodyPr>
+            <a:normAutofit/>
           </a:bodyPr>
           <a:lstStyle/>
           <a:p>
-            <a:pPr algn="just"/>
-            <a:r>
-              <a:rPr lang="ru-RU" dirty="0" smtClean="0">
-                <a:latin typeface="Times New Roman" pitchFamily="18" charset="0"/>
-                <a:cs typeface="Times New Roman" pitchFamily="18" charset="0"/>
-              </a:rPr>
-              <a:t>При выполнении оператора </a:t>
-            </a:r>
-            <a:r>
-              <a:rPr lang="ru-RU" dirty="0" err="1" smtClean="0">
-                <a:latin typeface="Times New Roman" pitchFamily="18" charset="0"/>
-                <a:cs typeface="Times New Roman" pitchFamily="18" charset="0"/>
-              </a:rPr>
-              <a:t>new</a:t>
-            </a:r>
-            <a:r>
-              <a:rPr lang="ru-RU" dirty="0" smtClean="0">
-                <a:latin typeface="Times New Roman" pitchFamily="18" charset="0"/>
-                <a:cs typeface="Times New Roman" pitchFamily="18" charset="0"/>
-              </a:rPr>
+            <a:r>
+              <a:rPr lang="en-US" sz="3200" dirty="0" err="1" smtClean="0"/>
+              <a:t>alglib</a:t>
+            </a:r>
+            <a:r>
+              <a:rPr lang="en-US" sz="3200" dirty="0" smtClean="0"/>
               <a:t>:</a:t>
             </a:r>
-          </a:p>
-          <a:p>
-            <a:pPr algn="just"/>
-            <a:r>
-              <a:rPr lang="ru-RU" dirty="0" smtClean="0">
-                <a:latin typeface="Times New Roman" pitchFamily="18" charset="0"/>
-                <a:cs typeface="Times New Roman" pitchFamily="18" charset="0"/>
-              </a:rPr>
-              <a:t>    Сначала определяется необходимый набор байт для хранения объекта типа (включая дополнительные специальные поля, если данные будут храниться в куче).</a:t>
-            </a:r>
-          </a:p>
-          <a:p>
-            <a:pPr algn="just"/>
-            <a:r>
-              <a:rPr lang="ru-RU" dirty="0" smtClean="0">
-                <a:latin typeface="Times New Roman" pitchFamily="18" charset="0"/>
-                <a:cs typeface="Times New Roman" pitchFamily="18" charset="0"/>
-              </a:rPr>
-              <a:t>    Выделяется соответствующая память, и все байты зарезервированного пространства обнуляются.</a:t>
-            </a:r>
-          </a:p>
-          <a:p>
-            <a:pPr algn="just"/>
-            <a:r>
-              <a:rPr lang="ru-RU" dirty="0" smtClean="0">
-                <a:latin typeface="Times New Roman" pitchFamily="18" charset="0"/>
-                <a:cs typeface="Times New Roman" pitchFamily="18" charset="0"/>
-              </a:rPr>
-              <a:t>    Инициализируются дополнительные специальные поля (если объект хранится в куче).</a:t>
-            </a:r>
-          </a:p>
-          <a:p>
-            <a:pPr algn="just"/>
-            <a:r>
-              <a:rPr lang="ru-RU" dirty="0" smtClean="0">
-                <a:latin typeface="Times New Roman" pitchFamily="18" charset="0"/>
-                <a:cs typeface="Times New Roman" pitchFamily="18" charset="0"/>
-              </a:rPr>
-              <a:t>    Вызывается конструктор типа с указанными параметрами.</a:t>
-            </a:r>
-            <a:endParaRPr lang="ru-RU" dirty="0">
-              <a:latin typeface="Times New Roman" pitchFamily="18" charset="0"/>
-              <a:cs typeface="Times New Roman" pitchFamily="18" charset="0"/>
-            </a:endParaRPr>
+            <a:r>
+              <a:rPr lang="ru-RU" sz="3200" dirty="0" smtClean="0"/>
+              <a:t>Подключение библиотеки к проекту</a:t>
+            </a:r>
+            <a:endParaRPr lang="ru-RU" sz="3200" dirty="0"/>
           </a:p>
         </p:txBody>
       </p:sp>
       <p:pic>
         <p:nvPicPr>
-          <p:cNvPr id="21506" name="Picture 2" descr="https://ucarecdn.stepik.net/4bb2a83c-cd6c-45b5-84fd-730041a4e753/"/>
+          <p:cNvPr id="3" name="Picture 2"/>
           <p:cNvPicPr>
             <a:picLocks noChangeAspect="1" noChangeArrowheads="1"/>
           </p:cNvPicPr>
@@ -6816,15 +5231,170 @@
         </p:blipFill>
         <p:spPr bwMode="auto">
           <a:xfrm>
-            <a:off x="0" y="2143116"/>
-            <a:ext cx="9144000" cy="4357694"/>
+            <a:off x="214282" y="1285860"/>
+            <a:ext cx="4276725" cy="2619375"/>
           </a:xfrm>
           <a:prstGeom prst="rect">
             <a:avLst/>
           </a:prstGeom>
           <a:noFill/>
+          <a:ln w="9525">
+            <a:noFill/>
+            <a:miter lim="800000"/>
+            <a:headEnd/>
+            <a:tailEnd/>
+          </a:ln>
+          <a:effectLst/>
         </p:spPr>
       </p:pic>
+      <p:pic>
+        <p:nvPicPr>
+          <p:cNvPr id="4" name="Picture 3"/>
+          <p:cNvPicPr>
+            <a:picLocks noChangeAspect="1" noChangeArrowheads="1"/>
+          </p:cNvPicPr>
+          <p:nvPr/>
+        </p:nvPicPr>
+        <p:blipFill>
+          <a:blip r:embed="rId3"/>
+          <a:srcRect/>
+          <a:stretch>
+            <a:fillRect/>
+          </a:stretch>
+        </p:blipFill>
+        <p:spPr bwMode="auto">
+          <a:xfrm>
+            <a:off x="3357554" y="3214686"/>
+            <a:ext cx="4323555" cy="3224221"/>
+          </a:xfrm>
+          <a:prstGeom prst="rect">
+            <a:avLst/>
+          </a:prstGeom>
+          <a:noFill/>
+          <a:ln w="9525">
+            <a:noFill/>
+            <a:miter lim="800000"/>
+            <a:headEnd/>
+            <a:tailEnd/>
+          </a:ln>
+          <a:effectLst/>
+        </p:spPr>
+      </p:pic>
+      <p:cxnSp>
+        <p:nvCxnSpPr>
+          <p:cNvPr id="5" name="Прямая со стрелкой 4"/>
+          <p:cNvCxnSpPr/>
+          <p:nvPr/>
+        </p:nvCxnSpPr>
+        <p:spPr>
+          <a:xfrm rot="10800000" flipV="1">
+            <a:off x="3857620" y="1643050"/>
+            <a:ext cx="2643206" cy="2071702"/>
+          </a:xfrm>
+          <a:prstGeom prst="straightConnector1">
+            <a:avLst/>
+          </a:prstGeom>
+          <a:ln w="25400">
+            <a:solidFill>
+              <a:srgbClr val="FF0000"/>
+            </a:solidFill>
+            <a:tailEnd type="arrow"/>
+          </a:ln>
+        </p:spPr>
+        <p:style>
+          <a:lnRef idx="1">
+            <a:schemeClr val="accent1"/>
+          </a:lnRef>
+          <a:fillRef idx="0">
+            <a:schemeClr val="accent1"/>
+          </a:fillRef>
+          <a:effectRef idx="0">
+            <a:schemeClr val="accent1"/>
+          </a:effectRef>
+          <a:fontRef idx="minor">
+            <a:schemeClr val="tx1"/>
+          </a:fontRef>
+        </p:style>
+      </p:cxnSp>
+      <p:cxnSp>
+        <p:nvCxnSpPr>
+          <p:cNvPr id="6" name="Прямая соединительная линия 5"/>
+          <p:cNvCxnSpPr/>
+          <p:nvPr/>
+        </p:nvCxnSpPr>
+        <p:spPr>
+          <a:xfrm>
+            <a:off x="6500826" y="1643050"/>
+            <a:ext cx="1500198" cy="1588"/>
+          </a:xfrm>
+          <a:prstGeom prst="line">
+            <a:avLst/>
+          </a:prstGeom>
+          <a:ln w="25400">
+            <a:solidFill>
+              <a:srgbClr val="FF0000"/>
+            </a:solidFill>
+          </a:ln>
+        </p:spPr>
+        <p:style>
+          <a:lnRef idx="1">
+            <a:schemeClr val="accent1"/>
+          </a:lnRef>
+          <a:fillRef idx="0">
+            <a:schemeClr val="accent1"/>
+          </a:fillRef>
+          <a:effectRef idx="0">
+            <a:schemeClr val="accent1"/>
+          </a:effectRef>
+          <a:fontRef idx="minor">
+            <a:schemeClr val="tx1"/>
+          </a:fontRef>
+        </p:style>
+      </p:cxnSp>
+      <p:sp>
+        <p:nvSpPr>
+          <p:cNvPr id="7" name="TextBox 6"/>
+          <p:cNvSpPr txBox="1"/>
+          <p:nvPr/>
+        </p:nvSpPr>
+        <p:spPr>
+          <a:xfrm>
+            <a:off x="5929322" y="714356"/>
+            <a:ext cx="2881082" cy="923330"/>
+          </a:xfrm>
+          <a:prstGeom prst="rect">
+            <a:avLst/>
+          </a:prstGeom>
+          <a:noFill/>
+        </p:spPr>
+        <p:txBody>
+          <a:bodyPr wrap="square" rtlCol="0">
+            <a:spAutoFit/>
+          </a:bodyPr>
+          <a:lstStyle/>
+          <a:p>
+            <a:pPr algn="ctr"/>
+            <a:r>
+              <a:rPr lang="ru-RU" b="1" dirty="0" smtClean="0">
+                <a:latin typeface="Times New Roman" pitchFamily="18" charset="0"/>
+                <a:cs typeface="Times New Roman" pitchFamily="18" charset="0"/>
+              </a:rPr>
+              <a:t>Вот здесь нужно найти ссылку на файл </a:t>
+            </a:r>
+            <a:r>
+              <a:rPr lang="en-US" b="1" dirty="0" smtClean="0">
+                <a:latin typeface="Times New Roman" pitchFamily="18" charset="0"/>
+                <a:cs typeface="Times New Roman" pitchFamily="18" charset="0"/>
+              </a:rPr>
+              <a:t>alglibnet2.dll</a:t>
+            </a:r>
+            <a:endParaRPr lang="ru-RU" b="1" dirty="0">
+              <a:latin typeface="Times New Roman" pitchFamily="18" charset="0"/>
+              <a:cs typeface="Times New Roman" pitchFamily="18" charset="0"/>
+            </a:endParaRPr>
+          </a:p>
+        </p:txBody>
+      </p:sp>
     </p:spTree>
   </p:cSld>
   <p:clrMapOvr>
@@ -6850,16 +5420,118 @@
           <a:chExt cx="0" cy="0"/>
         </a:xfrm>
       </p:grpSpPr>
+      <p:sp>
+        <p:nvSpPr>
+          <p:cNvPr id="2" name="Прямоугольник 1"/>
+          <p:cNvSpPr/>
+          <p:nvPr/>
+        </p:nvSpPr>
+        <p:spPr>
+          <a:xfrm>
+            <a:off x="0" y="0"/>
+            <a:ext cx="9144000" cy="2246769"/>
+          </a:xfrm>
+          <a:prstGeom prst="rect">
+            <a:avLst/>
+          </a:prstGeom>
+        </p:spPr>
+        <p:txBody>
+          <a:bodyPr wrap="square">
+            <a:spAutoFit/>
+          </a:bodyPr>
+          <a:lstStyle/>
+          <a:p>
+            <a:pPr algn="ctr"/>
+            <a:r>
+              <a:rPr lang="en-US" sz="3200" b="1" dirty="0" smtClean="0">
+                <a:latin typeface="Times New Roman" pitchFamily="18" charset="0"/>
+                <a:cs typeface="Times New Roman" pitchFamily="18" charset="0"/>
+              </a:rPr>
+              <a:t>DLL</a:t>
+            </a:r>
+          </a:p>
+          <a:p>
+            <a:pPr algn="ctr"/>
+            <a:endParaRPr lang="en-US" b="1" dirty="0" smtClean="0">
+              <a:latin typeface="Times New Roman" pitchFamily="18" charset="0"/>
+              <a:cs typeface="Times New Roman" pitchFamily="18" charset="0"/>
+            </a:endParaRPr>
+          </a:p>
+          <a:p>
+            <a:pPr algn="ctr"/>
+            <a:r>
+              <a:rPr lang="en-US" b="1" dirty="0" smtClean="0">
+                <a:latin typeface="Times New Roman" pitchFamily="18" charset="0"/>
+                <a:cs typeface="Times New Roman" pitchFamily="18" charset="0"/>
+                <a:hlinkClick r:id="rId2"/>
+              </a:rPr>
+              <a:t>https://metanit.com/sharp/tutorial/3.46.php?ysclid=mmb1rpxbus531260456</a:t>
+            </a:r>
+            <a:endParaRPr lang="en-US" b="1" dirty="0" smtClean="0">
+              <a:latin typeface="Times New Roman" pitchFamily="18" charset="0"/>
+              <a:cs typeface="Times New Roman" pitchFamily="18" charset="0"/>
+            </a:endParaRPr>
+          </a:p>
+          <a:p>
+            <a:endParaRPr lang="en-US" b="1" dirty="0" smtClean="0">
+              <a:latin typeface="Times New Roman" pitchFamily="18" charset="0"/>
+              <a:cs typeface="Times New Roman" pitchFamily="18" charset="0"/>
+            </a:endParaRPr>
+          </a:p>
+          <a:p>
+            <a:pPr algn="ctr"/>
+            <a:r>
+              <a:rPr lang="ru-RU" dirty="0" smtClean="0">
+                <a:latin typeface="Times New Roman" pitchFamily="18" charset="0"/>
+                <a:cs typeface="Times New Roman" pitchFamily="18" charset="0"/>
+              </a:rPr>
+              <a:t>Как импортировать DLL в </a:t>
+            </a:r>
+            <a:r>
+              <a:rPr lang="ru-RU" dirty="0" err="1" smtClean="0">
+                <a:latin typeface="Times New Roman" pitchFamily="18" charset="0"/>
+                <a:cs typeface="Times New Roman" pitchFamily="18" charset="0"/>
+              </a:rPr>
+              <a:t>Python</a:t>
+            </a:r>
+            <a:endParaRPr lang="ru-RU" dirty="0" smtClean="0">
+              <a:latin typeface="Times New Roman" pitchFamily="18" charset="0"/>
+              <a:cs typeface="Times New Roman" pitchFamily="18" charset="0"/>
+            </a:endParaRPr>
+          </a:p>
+          <a:p>
+            <a:pPr algn="ctr"/>
+            <a:r>
+              <a:rPr lang="en-US" b="1" dirty="0" smtClean="0">
+                <a:latin typeface="Times New Roman" pitchFamily="18" charset="0"/>
+                <a:cs typeface="Times New Roman" pitchFamily="18" charset="0"/>
+                <a:hlinkClick r:id="rId3"/>
+              </a:rPr>
+              <a:t>https://disk.yandex.ru/i/m--e7LQFAFgBlQ</a:t>
+            </a:r>
+            <a:endParaRPr lang="ru-RU" b="1" dirty="0" smtClean="0">
+              <a:latin typeface="Times New Roman" pitchFamily="18" charset="0"/>
+              <a:cs typeface="Times New Roman" pitchFamily="18" charset="0"/>
+            </a:endParaRPr>
+          </a:p>
+          <a:p>
+            <a:endParaRPr lang="ru-RU" b="1" dirty="0">
+              <a:latin typeface="Times New Roman" pitchFamily="18" charset="0"/>
+              <a:cs typeface="Times New Roman" pitchFamily="18" charset="0"/>
+            </a:endParaRPr>
+          </a:p>
+        </p:txBody>
+      </p:sp>
       <p:pic>
         <p:nvPicPr>
-          <p:cNvPr id="3074" name="Picture 2"/>
+          <p:cNvPr id="16387" name="Picture 3"/>
           <p:cNvPicPr>
             <a:picLocks noChangeAspect="1" noChangeArrowheads="1"/>
           </p:cNvPicPr>
           <p:nvPr/>
         </p:nvPicPr>
         <p:blipFill>
-          <a:blip r:embed="rId2"/>
+          <a:blip r:embed="rId4"/>
           <a:srcRect/>
           <a:stretch>
             <a:fillRect/>
@@ -6867,8 +5539,8 @@
         </p:blipFill>
         <p:spPr bwMode="auto">
           <a:xfrm>
-            <a:off x="85725" y="571480"/>
-            <a:ext cx="9058275" cy="5572125"/>
+            <a:off x="857224" y="1928802"/>
+            <a:ext cx="7397459" cy="4929198"/>
           </a:xfrm>
           <a:prstGeom prst="rect">
             <a:avLst/>
@@ -6883,38 +5555,6 @@
           <a:effectLst/>
         </p:spPr>
       </p:pic>
-      <p:sp>
-        <p:nvSpPr>
-          <p:cNvPr id="3" name="Прямоугольник 2"/>
-          <p:cNvSpPr/>
-          <p:nvPr/>
-        </p:nvSpPr>
-        <p:spPr>
-          <a:xfrm>
-            <a:off x="2714612" y="0"/>
-            <a:ext cx="4208011" cy="646331"/>
-          </a:xfrm>
-          <a:prstGeom prst="rect">
-            <a:avLst/>
-          </a:prstGeom>
-        </p:spPr>
-        <p:txBody>
-          <a:bodyPr wrap="none">
-            <a:spAutoFit/>
-          </a:bodyPr>
-          <a:lstStyle/>
-          <a:p>
-            <a:r>
-              <a:rPr lang="ru-RU" sz="3600" b="1" dirty="0" smtClean="0">
-                <a:latin typeface="Times New Roman" pitchFamily="18" charset="0"/>
-                <a:cs typeface="Times New Roman" pitchFamily="18" charset="0"/>
-              </a:rPr>
-              <a:t>КОНСТРУКТОРЫ</a:t>
-            </a:r>
-            <a:endParaRPr lang="ru-RU" sz="3600" b="1" dirty="0"/>
-          </a:p>
-        </p:txBody>
-      </p:sp>
     </p:spTree>
   </p:cSld>
   <p:clrMapOvr>
@@ -6940,55 +5580,133 @@
           <a:chExt cx="0" cy="0"/>
         </a:xfrm>
       </p:grpSpPr>
-      <p:pic>
-        <p:nvPicPr>
-          <p:cNvPr id="1026" name="Picture 2"/>
-          <p:cNvPicPr>
-            <a:picLocks noChangeAspect="1" noChangeArrowheads="1"/>
-          </p:cNvPicPr>
+      <p:sp>
+        <p:nvSpPr>
+          <p:cNvPr id="2" name="Прямоугольник 1"/>
+          <p:cNvSpPr/>
           <p:nvPr/>
-        </p:nvPicPr>
-        <p:blipFill>
-          <a:blip r:embed="rId2"/>
-          <a:srcRect/>
-          <a:stretch>
-            <a:fillRect/>
-          </a:stretch>
-        </p:blipFill>
-        <p:spPr bwMode="auto">
-          <a:xfrm>
-            <a:off x="0" y="571480"/>
-            <a:ext cx="3771900" cy="3514725"/>
+        </p:nvSpPr>
+        <p:spPr>
+          <a:xfrm>
+            <a:off x="1214414" y="857232"/>
+            <a:ext cx="7127272" cy="584775"/>
           </a:xfrm>
           <a:prstGeom prst="rect">
             <a:avLst/>
           </a:prstGeom>
-          <a:noFill/>
-          <a:ln w="9525">
-            <a:noFill/>
-            <a:miter lim="800000"/>
-            <a:headEnd/>
-            <a:tailEnd/>
-          </a:ln>
-          <a:effectLst/>
-        </p:spPr>
-      </p:pic>
-      <p:sp>
-        <p:nvSpPr>
-          <p:cNvPr id="3" name="Прямоугольник 2"/>
-          <p:cNvSpPr/>
+        </p:spPr>
+        <p:txBody>
+          <a:bodyPr wrap="none">
+            <a:spAutoFit/>
+          </a:bodyPr>
+          <a:lstStyle/>
+          <a:p>
+            <a:pPr algn="just"/>
+            <a:r>
+              <a:rPr lang="en-US" sz="3200" dirty="0" smtClean="0">
+                <a:latin typeface="Times New Roman" pitchFamily="18" charset="0"/>
+                <a:cs typeface="Times New Roman" pitchFamily="18" charset="0"/>
+                <a:hlinkClick r:id="rId2"/>
+              </a:rPr>
+              <a:t>https://metanit.com/sharp/patterns/1.1.php</a:t>
+            </a:r>
+            <a:endParaRPr lang="ru-RU" sz="3200" dirty="0" smtClean="0">
+              <a:latin typeface="Times New Roman" pitchFamily="18" charset="0"/>
+              <a:cs typeface="Times New Roman" pitchFamily="18" charset="0"/>
+            </a:endParaRPr>
+          </a:p>
+        </p:txBody>
+      </p:sp>
+      <p:sp>
+        <p:nvSpPr>
+          <p:cNvPr id="3" name="Заголовок 1"/>
+          <p:cNvSpPr txBox="1">
+            <a:spLocks/>
+          </p:cNvSpPr>
           <p:nvPr/>
         </p:nvSpPr>
         <p:spPr>
           <a:xfrm>
-            <a:off x="3857620" y="571480"/>
-            <a:ext cx="5286380" cy="1938992"/>
+            <a:off x="428596" y="0"/>
+            <a:ext cx="8229600" cy="1143000"/>
           </a:xfrm>
           <a:prstGeom prst="rect">
             <a:avLst/>
           </a:prstGeom>
         </p:spPr>
         <p:txBody>
+          <a:bodyPr>
+            <a:normAutofit/>
+          </a:bodyPr>
+          <a:lstStyle/>
+          <a:p>
+            <a:pPr marL="0" marR="0" lvl="0" indent="0" algn="ctr" defTabSz="914400" rtl="0" eaLnBrk="1" fontAlgn="auto" latinLnBrk="0" hangingPunct="1">
+              <a:lnSpc>
+                <a:spcPct val="100000"/>
+              </a:lnSpc>
+              <a:spcBef>
+                <a:spcPct val="0"/>
+              </a:spcBef>
+              <a:spcAft>
+                <a:spcPts val="0"/>
+              </a:spcAft>
+              <a:buClrTx/>
+              <a:buSzTx/>
+              <a:buFontTx/>
+              <a:buNone/>
+              <a:tabLst/>
+              <a:defRPr/>
+            </a:pPr>
+            <a:r>
+              <a:rPr kumimoji="0" lang="ru-RU" sz="4400" b="1" i="0" u="none" strike="noStrike" kern="1200" cap="none" spc="0" normalizeH="0" baseline="0" noProof="0" dirty="0" smtClean="0">
+                <a:ln>
+                  <a:noFill/>
+                </a:ln>
+                <a:solidFill>
+                  <a:schemeClr val="tx1"/>
+                </a:solidFill>
+                <a:effectLst/>
+                <a:uLnTx/>
+                <a:uFillTx/>
+                <a:latin typeface="+mj-lt"/>
+                <a:ea typeface="+mj-ea"/>
+                <a:cs typeface="+mj-cs"/>
+              </a:rPr>
+              <a:t>Паттерны проектирования</a:t>
+            </a:r>
+            <a:endParaRPr kumimoji="0" lang="ru-RU" sz="4400" b="0" i="0" u="none" strike="noStrike" kern="1200" cap="none" spc="0" normalizeH="0" baseline="0" noProof="0" dirty="0">
+              <a:ln>
+                <a:noFill/>
+              </a:ln>
+              <a:solidFill>
+                <a:schemeClr val="tx1"/>
+              </a:solidFill>
+              <a:effectLst/>
+              <a:uLnTx/>
+              <a:uFillTx/>
+              <a:latin typeface="+mj-lt"/>
+              <a:ea typeface="+mj-ea"/>
+              <a:cs typeface="+mj-cs"/>
+            </a:endParaRPr>
+          </a:p>
+        </p:txBody>
+      </p:sp>
+      <p:sp>
+        <p:nvSpPr>
+          <p:cNvPr id="4" name="Прямоугольник 3"/>
+          <p:cNvSpPr/>
+          <p:nvPr/>
+        </p:nvSpPr>
+        <p:spPr>
+          <a:xfrm>
+            <a:off x="0" y="2274838"/>
+            <a:ext cx="9144000" cy="3539430"/>
+          </a:xfrm>
+          <a:prstGeom prst="rect">
+            <a:avLst/>
+          </a:prstGeom>
+        </p:spPr>
+        <p:txBody>
           <a:bodyPr wrap="square">
             <a:spAutoFit/>
           </a:bodyPr>
@@ -6996,167 +5714,19 @@
           <a:p>
             <a:pPr algn="just"/>
             <a:r>
-              <a:rPr lang="ru-RU" sz="2400" dirty="0" smtClean="0">
-                <a:latin typeface="Times New Roman" pitchFamily="18" charset="0"/>
-                <a:cs typeface="Times New Roman" pitchFamily="18" charset="0"/>
-              </a:rPr>
-              <a:t>В данном примере у класса </a:t>
-            </a:r>
-            <a:r>
-              <a:rPr lang="ru-RU" sz="2400" dirty="0" err="1" smtClean="0">
-                <a:latin typeface="Times New Roman" pitchFamily="18" charset="0"/>
-                <a:cs typeface="Times New Roman" pitchFamily="18" charset="0"/>
-              </a:rPr>
-              <a:t>Person</a:t>
-            </a:r>
-            <a:r>
-              <a:rPr lang="ru-RU" sz="2400" dirty="0" smtClean="0">
-                <a:latin typeface="Times New Roman" pitchFamily="18" charset="0"/>
-                <a:cs typeface="Times New Roman" pitchFamily="18" charset="0"/>
-              </a:rPr>
-              <a:t> есть два скрытых поля и два открытых свойства, которые позволяют прочитать значения скрытых полей и изменить их.</a:t>
-            </a:r>
-            <a:endParaRPr lang="ru-RU" sz="2400" dirty="0">
-              <a:latin typeface="Times New Roman" pitchFamily="18" charset="0"/>
-              <a:cs typeface="Times New Roman" pitchFamily="18" charset="0"/>
-            </a:endParaRPr>
-          </a:p>
-        </p:txBody>
-      </p:sp>
-      <p:pic>
-        <p:nvPicPr>
-          <p:cNvPr id="5121" name="Picture 1"/>
-          <p:cNvPicPr>
-            <a:picLocks noChangeAspect="1" noChangeArrowheads="1"/>
-          </p:cNvPicPr>
-          <p:nvPr/>
-        </p:nvPicPr>
-        <p:blipFill>
-          <a:blip r:embed="rId3"/>
-          <a:srcRect/>
-          <a:stretch>
-            <a:fillRect/>
-          </a:stretch>
-        </p:blipFill>
-        <p:spPr bwMode="auto">
-          <a:xfrm>
-            <a:off x="4857752" y="2500282"/>
-            <a:ext cx="3514725" cy="1133475"/>
-          </a:xfrm>
-          <a:prstGeom prst="rect">
-            <a:avLst/>
-          </a:prstGeom>
-          <a:noFill/>
-          <a:ln w="9525">
-            <a:noFill/>
-            <a:miter lim="800000"/>
-            <a:headEnd/>
-            <a:tailEnd/>
-          </a:ln>
-          <a:effectLst/>
-        </p:spPr>
-      </p:pic>
-      <p:sp>
-        <p:nvSpPr>
-          <p:cNvPr id="5" name="Прямоугольник 4"/>
-          <p:cNvSpPr/>
-          <p:nvPr/>
-        </p:nvSpPr>
-        <p:spPr>
-          <a:xfrm>
-            <a:off x="5214942" y="3643314"/>
-            <a:ext cx="2735749" cy="369332"/>
-          </a:xfrm>
-          <a:prstGeom prst="rect">
-            <a:avLst/>
-          </a:prstGeom>
-        </p:spPr>
-        <p:txBody>
-          <a:bodyPr wrap="none">
-            <a:spAutoFit/>
-          </a:bodyPr>
-          <a:lstStyle/>
-          <a:p>
-            <a:r>
-              <a:rPr lang="ru-RU" b="1" dirty="0" smtClean="0">
-                <a:solidFill>
-                  <a:srgbClr val="FF0000"/>
-                </a:solidFill>
-                <a:latin typeface="Times New Roman" pitchFamily="18" charset="0"/>
-                <a:cs typeface="Times New Roman" pitchFamily="18" charset="0"/>
-              </a:rPr>
-              <a:t>ТАК НЕЖЕЛАТЕЛЬНО</a:t>
-            </a:r>
-            <a:endParaRPr lang="ru-RU" b="1" dirty="0">
-              <a:solidFill>
-                <a:srgbClr val="FF0000"/>
-              </a:solidFill>
-            </a:endParaRPr>
-          </a:p>
-        </p:txBody>
-      </p:sp>
-      <p:pic>
-        <p:nvPicPr>
-          <p:cNvPr id="5122" name="Picture 2"/>
-          <p:cNvPicPr>
-            <a:picLocks noChangeAspect="1" noChangeArrowheads="1"/>
-          </p:cNvPicPr>
-          <p:nvPr/>
-        </p:nvPicPr>
-        <p:blipFill>
-          <a:blip r:embed="rId4"/>
-          <a:srcRect/>
-          <a:stretch>
-            <a:fillRect/>
-          </a:stretch>
-        </p:blipFill>
-        <p:spPr bwMode="auto">
-          <a:xfrm>
-            <a:off x="785786" y="4124305"/>
-            <a:ext cx="7496175" cy="2733695"/>
-          </a:xfrm>
-          <a:prstGeom prst="rect">
-            <a:avLst/>
-          </a:prstGeom>
-          <a:noFill/>
-          <a:ln w="9525">
-            <a:noFill/>
-            <a:miter lim="800000"/>
-            <a:headEnd/>
-            <a:tailEnd/>
-          </a:ln>
-          <a:effectLst/>
-        </p:spPr>
-      </p:pic>
-      <p:sp>
-        <p:nvSpPr>
-          <p:cNvPr id="8" name="Прямоугольник 7"/>
-          <p:cNvSpPr/>
-          <p:nvPr/>
-        </p:nvSpPr>
-        <p:spPr>
-          <a:xfrm>
-            <a:off x="2571736" y="0"/>
-            <a:ext cx="4253216" cy="646331"/>
-          </a:xfrm>
-          <a:prstGeom prst="rect">
-            <a:avLst/>
-          </a:prstGeom>
-        </p:spPr>
-        <p:txBody>
-          <a:bodyPr wrap="none">
-            <a:spAutoFit/>
-          </a:bodyPr>
-          <a:lstStyle/>
-          <a:p>
-            <a:r>
-              <a:rPr lang="ru-RU" sz="3600" b="1" dirty="0" smtClean="0">
-                <a:latin typeface="Times New Roman" pitchFamily="18" charset="0"/>
-                <a:cs typeface="Times New Roman" pitchFamily="18" charset="0"/>
-              </a:rPr>
-              <a:t>ИНКАПСУЛЯЦИЯ</a:t>
-            </a:r>
-            <a:endParaRPr lang="ru-RU" sz="3600" b="1" dirty="0"/>
+              <a:rPr lang="ru-RU" sz="3200" b="1" dirty="0">
+                <a:latin typeface="Times New Roman" pitchFamily="18" charset="0"/>
+                <a:cs typeface="Times New Roman" pitchFamily="18" charset="0"/>
+              </a:rPr>
+              <a:t>Паттерны проектирования</a:t>
+            </a:r>
+            <a:r>
+              <a:rPr lang="ru-RU" sz="3200" dirty="0">
+                <a:latin typeface="Times New Roman" pitchFamily="18" charset="0"/>
+                <a:cs typeface="Times New Roman" pitchFamily="18" charset="0"/>
+              </a:rPr>
+              <a:t> (шаблоны проектирования) — это типовые решения часто встречающихся задач при создании программного обеспечения. Они не описывают готовый код — задают структуру взаимодействия объектов, классов и методов, чтобы решать задачи повторяемым и проверенным способом.</a:t>
+            </a:r>
           </a:p>
         </p:txBody>
       </p:sp>
@@ -7185,52 +5755,9 @@
           <a:chExt cx="0" cy="0"/>
         </a:xfrm>
       </p:grpSpPr>
-      <p:sp>
-        <p:nvSpPr>
-          <p:cNvPr id="2" name="Прямоугольник 1"/>
-          <p:cNvSpPr/>
-          <p:nvPr/>
-        </p:nvSpPr>
-        <p:spPr>
-          <a:xfrm>
-            <a:off x="0" y="0"/>
-            <a:ext cx="9144000" cy="1754326"/>
-          </a:xfrm>
-          <a:prstGeom prst="rect">
-            <a:avLst/>
-          </a:prstGeom>
-        </p:spPr>
-        <p:txBody>
-          <a:bodyPr wrap="square">
-            <a:spAutoFit/>
-          </a:bodyPr>
-          <a:lstStyle/>
-          <a:p>
-            <a:pPr algn="just"/>
-            <a:r>
-              <a:rPr lang="ru-RU" b="1" dirty="0" smtClean="0">
-                <a:latin typeface="Times New Roman" pitchFamily="18" charset="0"/>
-                <a:cs typeface="Times New Roman" pitchFamily="18" charset="0"/>
-              </a:rPr>
-              <a:t>Модификаторы доступа </a:t>
-            </a:r>
-            <a:r>
-              <a:rPr lang="ru-RU" dirty="0" smtClean="0">
-                <a:latin typeface="Times New Roman" pitchFamily="18" charset="0"/>
-                <a:cs typeface="Times New Roman" pitchFamily="18" charset="0"/>
-              </a:rPr>
-              <a:t>используются для того, чтобы ограничить видимость элементов типов и непосредственно самих типов. Видимость, в смысле того, можете ли вы обратиться к элементу типа или самому типу (например, создать объект класса) снаружи. Модификаторы доступа - это один из основных инструментов реализации принципа инкапсуляции - сокрытия деталей реализации. С помощью них вы можете управлять уровнем доступа к элементам класса.</a:t>
-            </a:r>
-            <a:endParaRPr lang="ru-RU" dirty="0">
-              <a:latin typeface="Times New Roman" pitchFamily="18" charset="0"/>
-              <a:cs typeface="Times New Roman" pitchFamily="18" charset="0"/>
-            </a:endParaRPr>
-          </a:p>
-        </p:txBody>
-      </p:sp>
       <p:pic>
         <p:nvPicPr>
-          <p:cNvPr id="23554" name="Picture 2"/>
+          <p:cNvPr id="20482" name="Picture 2"/>
           <p:cNvPicPr>
             <a:picLocks noChangeAspect="1" noChangeArrowheads="1"/>
           </p:cNvPicPr>
@@ -7245,8 +5772,8 @@
         </p:blipFill>
         <p:spPr bwMode="auto">
           <a:xfrm>
-            <a:off x="0" y="1643050"/>
-            <a:ext cx="4257675" cy="2771775"/>
+            <a:off x="0" y="0"/>
+            <a:ext cx="4643438" cy="2552700"/>
           </a:xfrm>
           <a:prstGeom prst="rect">
             <a:avLst/>
@@ -7263,7 +5790,7 @@
       </p:pic>
       <p:pic>
         <p:nvPicPr>
-          <p:cNvPr id="23556" name="Picture 4"/>
+          <p:cNvPr id="20483" name="Picture 3"/>
           <p:cNvPicPr>
             <a:picLocks noChangeAspect="1" noChangeArrowheads="1"/>
           </p:cNvPicPr>
@@ -7278,8 +5805,8 @@
         </p:blipFill>
         <p:spPr bwMode="auto">
           <a:xfrm>
-            <a:off x="5724525" y="1928802"/>
-            <a:ext cx="3419475" cy="2047875"/>
+            <a:off x="0" y="2928934"/>
+            <a:ext cx="4643438" cy="3743325"/>
           </a:xfrm>
           <a:prstGeom prst="rect">
             <a:avLst/>
@@ -7294,59 +5821,9 @@
           <a:effectLst/>
         </p:spPr>
       </p:pic>
-      <p:sp>
-        <p:nvSpPr>
-          <p:cNvPr id="7" name="Прямоугольник 6"/>
-          <p:cNvSpPr/>
-          <p:nvPr/>
-        </p:nvSpPr>
-        <p:spPr>
-          <a:xfrm>
-            <a:off x="0" y="4429132"/>
-            <a:ext cx="9144000" cy="1200329"/>
-          </a:xfrm>
-          <a:prstGeom prst="rect">
-            <a:avLst/>
-          </a:prstGeom>
-        </p:spPr>
-        <p:txBody>
-          <a:bodyPr wrap="square">
-            <a:spAutoFit/>
-          </a:bodyPr>
-          <a:lstStyle/>
-          <a:p>
-            <a:pPr algn="just"/>
-            <a:r>
-              <a:rPr lang="ru-RU" dirty="0" smtClean="0">
-                <a:latin typeface="Times New Roman" pitchFamily="18" charset="0"/>
-                <a:cs typeface="Times New Roman" pitchFamily="18" charset="0"/>
-              </a:rPr>
-              <a:t>Константы - это неизменяемые сущности, которые объявляются на уровне типа. Значение константы должно быть известно на этапе компиляции. Для объявления константы используется ключевое слово </a:t>
-            </a:r>
-            <a:r>
-              <a:rPr lang="ru-RU" dirty="0" err="1" smtClean="0">
-                <a:latin typeface="Times New Roman" pitchFamily="18" charset="0"/>
-                <a:cs typeface="Times New Roman" pitchFamily="18" charset="0"/>
-              </a:rPr>
-              <a:t>const</a:t>
-            </a:r>
-            <a:r>
-              <a:rPr lang="ru-RU" dirty="0" smtClean="0">
-                <a:latin typeface="Times New Roman" pitchFamily="18" charset="0"/>
-                <a:cs typeface="Times New Roman" pitchFamily="18" charset="0"/>
-              </a:rPr>
-              <a:t>, которое ставится после модификатора доступа (если он указывается) и перед именем типа.</a:t>
-            </a:r>
-            <a:endParaRPr lang="ru-RU" dirty="0">
-              <a:latin typeface="Times New Roman" pitchFamily="18" charset="0"/>
-              <a:cs typeface="Times New Roman" pitchFamily="18" charset="0"/>
-            </a:endParaRPr>
-          </a:p>
-        </p:txBody>
-      </p:sp>
       <p:pic>
         <p:nvPicPr>
-          <p:cNvPr id="23557" name="Picture 5"/>
+          <p:cNvPr id="20484" name="Picture 4"/>
           <p:cNvPicPr>
             <a:picLocks noChangeAspect="1" noChangeArrowheads="1"/>
           </p:cNvPicPr>
@@ -7361,8 +5838,41 @@
         </p:blipFill>
         <p:spPr bwMode="auto">
           <a:xfrm>
-            <a:off x="2285984" y="5591175"/>
-            <a:ext cx="4638675" cy="1266825"/>
+            <a:off x="4791075" y="28575"/>
+            <a:ext cx="4352925" cy="5400689"/>
+          </a:xfrm>
+          <a:prstGeom prst="rect">
+            <a:avLst/>
+          </a:prstGeom>
+          <a:noFill/>
+          <a:ln w="9525">
+            <a:noFill/>
+            <a:miter lim="800000"/>
+            <a:headEnd/>
+            <a:tailEnd/>
+          </a:ln>
+          <a:effectLst/>
+        </p:spPr>
+      </p:pic>
+      <p:pic>
+        <p:nvPicPr>
+          <p:cNvPr id="20485" name="Picture 5"/>
+          <p:cNvPicPr>
+            <a:picLocks noChangeAspect="1" noChangeArrowheads="1"/>
+          </p:cNvPicPr>
+          <p:nvPr/>
+        </p:nvPicPr>
+        <p:blipFill>
+          <a:blip r:embed="rId5"/>
+          <a:srcRect/>
+          <a:stretch>
+            <a:fillRect/>
+          </a:stretch>
+        </p:blipFill>
+        <p:spPr bwMode="auto">
+          <a:xfrm>
+            <a:off x="5786446" y="4766541"/>
+            <a:ext cx="3357554" cy="2091459"/>
           </a:xfrm>
           <a:prstGeom prst="rect">
             <a:avLst/>
@@ -7402,53 +5912,48 @@
           <a:chExt cx="0" cy="0"/>
         </a:xfrm>
       </p:grpSpPr>
-      <p:pic>
-        <p:nvPicPr>
-          <p:cNvPr id="24578" name="Picture 2"/>
-          <p:cNvPicPr>
-            <a:picLocks noChangeAspect="1" noChangeArrowheads="1"/>
-          </p:cNvPicPr>
+      <p:sp>
+        <p:nvSpPr>
+          <p:cNvPr id="2" name="Заголовок 1"/>
+          <p:cNvSpPr>
+            <a:spLocks noGrp="1"/>
+          </p:cNvSpPr>
+          <p:nvPr>
+            <p:ph type="title"/>
+          </p:nvPr>
+        </p:nvSpPr>
+        <p:spPr>
+          <a:xfrm>
+            <a:off x="457200" y="-24"/>
+            <a:ext cx="8229600" cy="1143000"/>
+          </a:xfrm>
+        </p:spPr>
+        <p:txBody>
+          <a:bodyPr/>
+          <a:lstStyle/>
+          <a:p>
+            <a:r>
+              <a:rPr lang="ru-RU" dirty="0" smtClean="0"/>
+              <a:t>Дополнительные материалы</a:t>
+            </a:r>
+            <a:endParaRPr lang="ru-RU" dirty="0"/>
+          </a:p>
+        </p:txBody>
+      </p:sp>
+      <p:sp>
+        <p:nvSpPr>
+          <p:cNvPr id="3" name="Прямоугольник 2"/>
+          <p:cNvSpPr/>
           <p:nvPr/>
-        </p:nvPicPr>
-        <p:blipFill>
-          <a:blip r:embed="rId2"/>
-          <a:srcRect/>
-          <a:stretch>
-            <a:fillRect/>
-          </a:stretch>
-        </p:blipFill>
-        <p:spPr bwMode="auto">
-          <a:xfrm>
-            <a:off x="0" y="1785926"/>
-            <a:ext cx="9144000" cy="4774912"/>
+        </p:nvSpPr>
+        <p:spPr>
+          <a:xfrm>
+            <a:off x="0" y="1214422"/>
+            <a:ext cx="9144000" cy="4278094"/>
           </a:xfrm>
           <a:prstGeom prst="rect">
             <a:avLst/>
           </a:prstGeom>
-          <a:noFill/>
-          <a:ln w="9525">
-            <a:noFill/>
-            <a:miter lim="800000"/>
-            <a:headEnd/>
-            <a:tailEnd/>
-          </a:ln>
-          <a:effectLst/>
-        </p:spPr>
-      </p:pic>
-      <p:sp>
-        <p:nvSpPr>
-          <p:cNvPr id="3" name="Прямоугольник 2"/>
-          <p:cNvSpPr/>
-          <p:nvPr/>
-        </p:nvSpPr>
-        <p:spPr>
-          <a:xfrm>
-            <a:off x="0" y="0"/>
-            <a:ext cx="9144000" cy="1631216"/>
-          </a:xfrm>
-          <a:prstGeom prst="rect">
-            <a:avLst/>
-          </a:prstGeom>
         </p:spPr>
         <p:txBody>
           <a:bodyPr wrap="square">
@@ -7458,76 +5963,151 @@
           <a:p>
             <a:pPr algn="just"/>
             <a:r>
-              <a:rPr lang="ru-RU" sz="2000" b="1" dirty="0" smtClean="0">
-                <a:latin typeface="Times New Roman" pitchFamily="18" charset="0"/>
-                <a:cs typeface="Times New Roman" pitchFamily="18" charset="0"/>
-              </a:rPr>
-              <a:t>Поля</a:t>
-            </a:r>
-            <a:r>
-              <a:rPr lang="ru-RU" sz="2000" dirty="0" smtClean="0">
-                <a:latin typeface="Times New Roman" pitchFamily="18" charset="0"/>
-                <a:cs typeface="Times New Roman" pitchFamily="18" charset="0"/>
-              </a:rPr>
-              <a:t> - это переменные, которые располагаются в типе (классе или структуре). Если вы поставите модификатор доступа </a:t>
-            </a:r>
-            <a:r>
-              <a:rPr lang="ru-RU" sz="2000" dirty="0" err="1" smtClean="0">
-                <a:latin typeface="Times New Roman" pitchFamily="18" charset="0"/>
-                <a:cs typeface="Times New Roman" pitchFamily="18" charset="0"/>
-              </a:rPr>
-              <a:t>public</a:t>
-            </a:r>
-            <a:r>
-              <a:rPr lang="ru-RU" sz="2000" dirty="0" smtClean="0">
-                <a:latin typeface="Times New Roman" pitchFamily="18" charset="0"/>
-                <a:cs typeface="Times New Roman" pitchFamily="18" charset="0"/>
-              </a:rPr>
-              <a:t> или </a:t>
-            </a:r>
-            <a:r>
-              <a:rPr lang="ru-RU" sz="2000" dirty="0" err="1" smtClean="0">
-                <a:latin typeface="Times New Roman" pitchFamily="18" charset="0"/>
-                <a:cs typeface="Times New Roman" pitchFamily="18" charset="0"/>
-              </a:rPr>
-              <a:t>internal</a:t>
-            </a:r>
-            <a:r>
-              <a:rPr lang="ru-RU" sz="2000" dirty="0" smtClean="0">
-                <a:latin typeface="Times New Roman" pitchFamily="18" charset="0"/>
-                <a:cs typeface="Times New Roman" pitchFamily="18" charset="0"/>
-              </a:rPr>
-              <a:t>, то к этим полям можно будет получить доступ снаружи. Если вы поставите модификатор доступа </a:t>
-            </a:r>
-            <a:r>
-              <a:rPr lang="ru-RU" sz="2000" dirty="0" err="1" smtClean="0">
-                <a:latin typeface="Times New Roman" pitchFamily="18" charset="0"/>
-                <a:cs typeface="Times New Roman" pitchFamily="18" charset="0"/>
-              </a:rPr>
-              <a:t>private</a:t>
-            </a:r>
-            <a:r>
-              <a:rPr lang="ru-RU" sz="2000" dirty="0" smtClean="0">
-                <a:latin typeface="Times New Roman" pitchFamily="18" charset="0"/>
-                <a:cs typeface="Times New Roman" pitchFamily="18" charset="0"/>
-              </a:rPr>
-              <a:t>, то с таким полем можно будет работать только внутри класса. Если </a:t>
-            </a:r>
-            <a:r>
-              <a:rPr lang="ru-RU" sz="2000" dirty="0" err="1" smtClean="0">
-                <a:latin typeface="Times New Roman" pitchFamily="18" charset="0"/>
-                <a:cs typeface="Times New Roman" pitchFamily="18" charset="0"/>
-              </a:rPr>
-              <a:t>protected</a:t>
-            </a:r>
-            <a:r>
-              <a:rPr lang="ru-RU" sz="2000" dirty="0" smtClean="0">
-                <a:latin typeface="Times New Roman" pitchFamily="18" charset="0"/>
-                <a:cs typeface="Times New Roman" pitchFamily="18" charset="0"/>
-              </a:rPr>
-              <a:t>, то внутри класса и в его наследниках.</a:t>
-            </a:r>
-            <a:endParaRPr lang="ru-RU" sz="2000" dirty="0">
+              <a:rPr lang="ru-RU" sz="2400" b="1" dirty="0">
+                <a:latin typeface="Times New Roman" pitchFamily="18" charset="0"/>
+                <a:cs typeface="Times New Roman" pitchFamily="18" charset="0"/>
+              </a:rPr>
+              <a:t>Использование </a:t>
+            </a:r>
+            <a:r>
+              <a:rPr lang="en-US" sz="2400" b="1" dirty="0" err="1">
+                <a:latin typeface="Times New Roman" pitchFamily="18" charset="0"/>
+                <a:cs typeface="Times New Roman" pitchFamily="18" charset="0"/>
+              </a:rPr>
+              <a:t>IronPython</a:t>
+            </a:r>
+            <a:r>
+              <a:rPr lang="en-US" sz="2400" b="1" dirty="0">
+                <a:latin typeface="Times New Roman" pitchFamily="18" charset="0"/>
+                <a:cs typeface="Times New Roman" pitchFamily="18" charset="0"/>
+              </a:rPr>
+              <a:t> </a:t>
+            </a:r>
+            <a:r>
+              <a:rPr lang="ru-RU" sz="2400" b="1" dirty="0">
+                <a:latin typeface="Times New Roman" pitchFamily="18" charset="0"/>
+                <a:cs typeface="Times New Roman" pitchFamily="18" charset="0"/>
+              </a:rPr>
+              <a:t>в .</a:t>
+            </a:r>
+            <a:r>
+              <a:rPr lang="en-US" sz="2400" b="1" dirty="0" smtClean="0">
+                <a:latin typeface="Times New Roman" pitchFamily="18" charset="0"/>
+                <a:cs typeface="Times New Roman" pitchFamily="18" charset="0"/>
+              </a:rPr>
+              <a:t>NET</a:t>
+            </a:r>
+          </a:p>
+          <a:p>
+            <a:pPr algn="just"/>
+            <a:r>
+              <a:rPr lang="en-US" sz="2200" dirty="0" smtClean="0">
+                <a:latin typeface="Times New Roman" pitchFamily="18" charset="0"/>
+                <a:cs typeface="Times New Roman" pitchFamily="18" charset="0"/>
+                <a:hlinkClick r:id="rId2"/>
+              </a:rPr>
+              <a:t>https://metanit.com/sharp/tutorial/9.3.php?ysclid=mmz0sc7smi533010303</a:t>
+            </a:r>
+            <a:endParaRPr lang="en-US" sz="2200" dirty="0" smtClean="0">
+              <a:latin typeface="Times New Roman" pitchFamily="18" charset="0"/>
+              <a:cs typeface="Times New Roman" pitchFamily="18" charset="0"/>
+            </a:endParaRPr>
+          </a:p>
+          <a:p>
+            <a:pPr algn="just"/>
+            <a:endParaRPr lang="en-US" sz="2200" dirty="0" smtClean="0">
+              <a:latin typeface="Times New Roman" pitchFamily="18" charset="0"/>
+              <a:cs typeface="Times New Roman" pitchFamily="18" charset="0"/>
+            </a:endParaRPr>
+          </a:p>
+          <a:p>
+            <a:pPr algn="just"/>
+            <a:r>
+              <a:rPr lang="ru-RU" sz="2400" b="1" dirty="0" err="1" smtClean="0">
+                <a:latin typeface="Times New Roman" pitchFamily="18" charset="0"/>
+                <a:cs typeface="Times New Roman" pitchFamily="18" charset="0"/>
+              </a:rPr>
+              <a:t>Фреймоврки</a:t>
+            </a:r>
+            <a:r>
+              <a:rPr lang="ru-RU" sz="2400" b="1" dirty="0" smtClean="0">
+                <a:latin typeface="Times New Roman" pitchFamily="18" charset="0"/>
+                <a:cs typeface="Times New Roman" pitchFamily="18" charset="0"/>
+              </a:rPr>
+              <a:t> для тестирования</a:t>
+            </a:r>
+          </a:p>
+          <a:p>
+            <a:pPr algn="just"/>
+            <a:r>
+              <a:rPr lang="en-US" sz="2200" dirty="0" smtClean="0">
+                <a:latin typeface="Times New Roman" pitchFamily="18" charset="0"/>
+                <a:cs typeface="Times New Roman" pitchFamily="18" charset="0"/>
+                <a:hlinkClick r:id="rId3"/>
+              </a:rPr>
+              <a:t>https://dev.to/kevinwalker/nunit-vs-xunit-vs-mstest-differences-between-them-33mm?ysclid=mn0q193ek2615718352</a:t>
+            </a:r>
+            <a:endParaRPr lang="ru-RU" sz="2200" dirty="0" smtClean="0">
+              <a:latin typeface="Times New Roman" pitchFamily="18" charset="0"/>
+              <a:cs typeface="Times New Roman" pitchFamily="18" charset="0"/>
+            </a:endParaRPr>
+          </a:p>
+          <a:p>
+            <a:pPr algn="just"/>
+            <a:endParaRPr lang="ru-RU" sz="2200" dirty="0" smtClean="0">
+              <a:latin typeface="Times New Roman" pitchFamily="18" charset="0"/>
+              <a:cs typeface="Times New Roman" pitchFamily="18" charset="0"/>
+            </a:endParaRPr>
+          </a:p>
+          <a:p>
+            <a:pPr algn="just"/>
+            <a:r>
+              <a:rPr lang="en-US" sz="2400" b="1" dirty="0" smtClean="0">
+                <a:latin typeface="Times New Roman" pitchFamily="18" charset="0"/>
+                <a:cs typeface="Times New Roman" pitchFamily="18" charset="0"/>
+              </a:rPr>
+              <a:t>C# </a:t>
+            </a:r>
+            <a:r>
+              <a:rPr lang="ru-RU" sz="2400" b="1" dirty="0" smtClean="0">
+                <a:latin typeface="Times New Roman" pitchFamily="18" charset="0"/>
+                <a:cs typeface="Times New Roman" pitchFamily="18" charset="0"/>
+              </a:rPr>
+              <a:t>Службы</a:t>
+            </a:r>
+          </a:p>
+          <a:p>
+            <a:pPr algn="just"/>
+            <a:r>
+              <a:rPr lang="en-US" sz="2200" dirty="0" smtClean="0">
+                <a:latin typeface="Times New Roman" pitchFamily="18" charset="0"/>
+                <a:cs typeface="Times New Roman" pitchFamily="18" charset="0"/>
+                <a:hlinkClick r:id="rId4"/>
+              </a:rPr>
+              <a:t>https://metanit.com/sharp/tutorial/21.1.php?ysclid=mn0qnn23lo303952396</a:t>
+            </a:r>
+            <a:endParaRPr lang="ru-RU" sz="2200" dirty="0" smtClean="0">
+              <a:latin typeface="Times New Roman" pitchFamily="18" charset="0"/>
+              <a:cs typeface="Times New Roman" pitchFamily="18" charset="0"/>
+            </a:endParaRPr>
+          </a:p>
+          <a:p>
+            <a:pPr algn="just"/>
+            <a:endParaRPr lang="ru-RU" sz="2200" dirty="0" smtClean="0">
+              <a:latin typeface="Times New Roman" pitchFamily="18" charset="0"/>
+              <a:cs typeface="Times New Roman" pitchFamily="18" charset="0"/>
+            </a:endParaRPr>
+          </a:p>
+          <a:p>
+            <a:pPr algn="just"/>
+            <a:endParaRPr lang="en-US" sz="2200" dirty="0" smtClean="0">
+              <a:latin typeface="Times New Roman" pitchFamily="18" charset="0"/>
+              <a:cs typeface="Times New Roman" pitchFamily="18" charset="0"/>
+            </a:endParaRPr>
+          </a:p>
+          <a:p>
+            <a:pPr algn="just"/>
+            <a:endParaRPr lang="en-US" sz="2400" b="1" dirty="0">
               <a:latin typeface="Times New Roman" pitchFamily="18" charset="0"/>
               <a:cs typeface="Times New Roman" pitchFamily="18" charset="0"/>
             </a:endParaRPr>
